--- a/Hệ thống Tư vấn Hướng nghiệp AI.pptx
+++ b/Hệ thống Tư vấn Hướng nghiệp AI.pptx
@@ -5,7 +5,7 @@
     <p:sldMasterId id="2147483659" r:id="rId1"/>
   </p:sldMasterIdLst>
   <p:notesMasterIdLst>
-    <p:notesMasterId r:id="rId15"/>
+    <p:notesMasterId r:id="rId19"/>
   </p:notesMasterIdLst>
   <p:sldIdLst>
     <p:sldId id="256" r:id="rId2"/>
@@ -17,41 +17,45 @@
     <p:sldId id="261" r:id="rId8"/>
     <p:sldId id="262" r:id="rId9"/>
     <p:sldId id="263" r:id="rId10"/>
-    <p:sldId id="264" r:id="rId11"/>
-    <p:sldId id="265" r:id="rId12"/>
-    <p:sldId id="266" r:id="rId13"/>
-    <p:sldId id="267" r:id="rId14"/>
+    <p:sldId id="269" r:id="rId11"/>
+    <p:sldId id="270" r:id="rId12"/>
+    <p:sldId id="271" r:id="rId13"/>
+    <p:sldId id="272" r:id="rId14"/>
+    <p:sldId id="273" r:id="rId15"/>
+    <p:sldId id="266" r:id="rId16"/>
+    <p:sldId id="265" r:id="rId17"/>
+    <p:sldId id="267" r:id="rId18"/>
   </p:sldIdLst>
   <p:sldSz cx="12192000" cy="6858000"/>
   <p:notesSz cx="6858000" cy="9144000"/>
   <p:embeddedFontLst>
     <p:embeddedFont>
       <p:font typeface="Calibri" panose="020F0502020204030204" pitchFamily="34" charset="0"/>
-      <p:regular r:id="rId16"/>
-      <p:bold r:id="rId17"/>
-      <p:italic r:id="rId18"/>
-      <p:boldItalic r:id="rId19"/>
-    </p:embeddedFont>
-    <p:embeddedFont>
-      <p:font typeface="Inter" panose="020B0604020202020204" charset="0"/>
       <p:regular r:id="rId20"/>
       <p:bold r:id="rId21"/>
       <p:italic r:id="rId22"/>
       <p:boldItalic r:id="rId23"/>
     </p:embeddedFont>
     <p:embeddedFont>
-      <p:font typeface="Inter SemiBold" panose="020B0604020202020204" charset="0"/>
+      <p:font typeface="Inter" panose="020B0604020202020204" charset="0"/>
       <p:regular r:id="rId24"/>
       <p:bold r:id="rId25"/>
       <p:italic r:id="rId26"/>
       <p:boldItalic r:id="rId27"/>
     </p:embeddedFont>
     <p:embeddedFont>
-      <p:font typeface="Urbanist" panose="020B0604020202020204" charset="0"/>
+      <p:font typeface="Inter SemiBold" panose="020B0604020202020204" charset="0"/>
       <p:regular r:id="rId28"/>
       <p:bold r:id="rId29"/>
       <p:italic r:id="rId30"/>
       <p:boldItalic r:id="rId31"/>
+    </p:embeddedFont>
+    <p:embeddedFont>
+      <p:font typeface="Urbanist" panose="020B0604020202020204" charset="0"/>
+      <p:regular r:id="rId32"/>
+      <p:bold r:id="rId33"/>
+      <p:italic r:id="rId34"/>
+      <p:boldItalic r:id="rId35"/>
     </p:embeddedFont>
   </p:embeddedFontLst>
   <p:defaultTextStyle>
@@ -852,7 +856,7 @@
   <p:cSld>
     <p:spTree>
       <p:nvGrpSpPr>
-        <p:cNvPr id="1" name="Shape 211"/>
+        <p:cNvPr id="1" name="Shape 80"/>
         <p:cNvGrpSpPr/>
         <p:nvPr/>
       </p:nvGrpSpPr>
@@ -866,7 +870,7 @@
       </p:grpSpPr>
       <p:sp>
         <p:nvSpPr>
-          <p:cNvPr id="212" name="Google Shape;212;p9:notes"/>
+          <p:cNvPr id="81" name="Google Shape;81;p1:notes"/>
           <p:cNvSpPr txBox="1">
             <a:spLocks noGrp="1"/>
           </p:cNvSpPr>
@@ -904,7 +908,7 @@
       </p:sp>
       <p:sp>
         <p:nvSpPr>
-          <p:cNvPr id="213" name="Google Shape;213;p9:notes"/>
+          <p:cNvPr id="82" name="Google Shape;82;p1:notes"/>
           <p:cNvSpPr>
             <a:spLocks noGrp="1" noRot="1" noChangeAspect="1"/>
           </p:cNvSpPr>
@@ -956,7 +960,7 @@
   <p:cSld>
     <p:spTree>
       <p:nvGrpSpPr>
-        <p:cNvPr id="1" name="Shape 225"/>
+        <p:cNvPr id="1" name="Shape 103"/>
         <p:cNvGrpSpPr/>
         <p:nvPr/>
       </p:nvGrpSpPr>
@@ -970,7 +974,7 @@
       </p:grpSpPr>
       <p:sp>
         <p:nvSpPr>
-          <p:cNvPr id="226" name="Google Shape;226;p10:notes"/>
+          <p:cNvPr id="104" name="Google Shape;104;p2:notes"/>
           <p:cNvSpPr txBox="1">
             <a:spLocks noGrp="1"/>
           </p:cNvSpPr>
@@ -1008,7 +1012,7 @@
       </p:sp>
       <p:sp>
         <p:nvSpPr>
-          <p:cNvPr id="227" name="Google Shape;227;p10:notes"/>
+          <p:cNvPr id="105" name="Google Shape;105;p2:notes"/>
           <p:cNvSpPr>
             <a:spLocks noGrp="1" noRot="1" noChangeAspect="1"/>
           </p:cNvSpPr>
@@ -1060,7 +1064,7 @@
   <p:cSld>
     <p:spTree>
       <p:nvGrpSpPr>
-        <p:cNvPr id="1" name="Shape 257"/>
+        <p:cNvPr id="1" name="Shape 119"/>
         <p:cNvGrpSpPr/>
         <p:nvPr/>
       </p:nvGrpSpPr>
@@ -1074,7 +1078,7 @@
       </p:grpSpPr>
       <p:sp>
         <p:nvSpPr>
-          <p:cNvPr id="258" name="Google Shape;258;p11:notes"/>
+          <p:cNvPr id="120" name="Google Shape;120;p3:notes"/>
           <p:cNvSpPr txBox="1">
             <a:spLocks noGrp="1"/>
           </p:cNvSpPr>
@@ -1112,7 +1116,7 @@
       </p:sp>
       <p:sp>
         <p:nvSpPr>
-          <p:cNvPr id="259" name="Google Shape;259;p11:notes"/>
+          <p:cNvPr id="121" name="Google Shape;121;p3:notes"/>
           <p:cNvSpPr>
             <a:spLocks noGrp="1" noRot="1" noChangeAspect="1"/>
           </p:cNvSpPr>
@@ -1160,6 +1164,422 @@
 </file>
 
 <file path=ppt/notesSlides/notesSlide13.xml><?xml version="1.0" encoding="utf-8"?>
+<p:notes xmlns:a="http://schemas.openxmlformats.org/drawingml/2006/main" xmlns:r="http://schemas.openxmlformats.org/officeDocument/2006/relationships" xmlns:p="http://schemas.openxmlformats.org/presentationml/2006/main" showMasterSp="0" showMasterPhAnim="0">
+  <p:cSld>
+    <p:spTree>
+      <p:nvGrpSpPr>
+        <p:cNvPr id="1" name="Shape 138"/>
+        <p:cNvGrpSpPr/>
+        <p:nvPr/>
+      </p:nvGrpSpPr>
+      <p:grpSpPr>
+        <a:xfrm>
+          <a:off x="0" y="0"/>
+          <a:ext cx="0" cy="0"/>
+          <a:chOff x="0" y="0"/>
+          <a:chExt cx="0" cy="0"/>
+        </a:xfrm>
+      </p:grpSpPr>
+      <p:sp>
+        <p:nvSpPr>
+          <p:cNvPr id="139" name="Google Shape;139;p4:notes"/>
+          <p:cNvSpPr txBox="1">
+            <a:spLocks noGrp="1"/>
+          </p:cNvSpPr>
+          <p:nvPr>
+            <p:ph type="body" idx="1"/>
+          </p:nvPr>
+        </p:nvSpPr>
+        <p:spPr>
+          <a:xfrm>
+            <a:off x="685800" y="4343400"/>
+            <a:ext cx="5486400" cy="4114800"/>
+          </a:xfrm>
+          <a:prstGeom prst="rect">
+            <a:avLst/>
+          </a:prstGeom>
+        </p:spPr>
+        <p:txBody>
+          <a:bodyPr spcFirstLastPara="1" wrap="square" lIns="91425" tIns="91425" rIns="91425" bIns="91425" anchor="t" anchorCtr="0">
+            <a:noAutofit/>
+          </a:bodyPr>
+          <a:lstStyle/>
+          <a:p>
+            <a:pPr marL="0" lvl="0" indent="0" algn="l" rtl="0">
+              <a:spcBef>
+                <a:spcPts val="0"/>
+              </a:spcBef>
+              <a:spcAft>
+                <a:spcPts val="0"/>
+              </a:spcAft>
+              <a:buNone/>
+            </a:pPr>
+            <a:endParaRPr/>
+          </a:p>
+        </p:txBody>
+      </p:sp>
+      <p:sp>
+        <p:nvSpPr>
+          <p:cNvPr id="140" name="Google Shape;140;p4:notes"/>
+          <p:cNvSpPr>
+            <a:spLocks noGrp="1" noRot="1" noChangeAspect="1"/>
+          </p:cNvSpPr>
+          <p:nvPr>
+            <p:ph type="sldImg" idx="2"/>
+          </p:nvPr>
+        </p:nvSpPr>
+        <p:spPr>
+          <a:xfrm>
+            <a:off x="381000" y="685800"/>
+            <a:ext cx="6096000" cy="3429000"/>
+          </a:xfrm>
+          <a:custGeom>
+            <a:avLst/>
+            <a:gdLst/>
+            <a:ahLst/>
+            <a:cxnLst/>
+            <a:rect l="l" t="t" r="r" b="b"/>
+            <a:pathLst>
+              <a:path w="120000" h="120000" extrusionOk="0">
+                <a:moveTo>
+                  <a:pt x="0" y="0"/>
+                </a:moveTo>
+                <a:lnTo>
+                  <a:pt x="120000" y="0"/>
+                </a:lnTo>
+                <a:lnTo>
+                  <a:pt x="120000" y="120000"/>
+                </a:lnTo>
+                <a:lnTo>
+                  <a:pt x="0" y="120000"/>
+                </a:lnTo>
+                <a:close/>
+              </a:path>
+            </a:pathLst>
+          </a:custGeom>
+        </p:spPr>
+      </p:sp>
+    </p:spTree>
+  </p:cSld>
+  <p:clrMapOvr>
+    <a:masterClrMapping/>
+  </p:clrMapOvr>
+</p:notes>
+</file>
+
+<file path=ppt/notesSlides/notesSlide14.xml><?xml version="1.0" encoding="utf-8"?>
+<p:notes xmlns:a="http://schemas.openxmlformats.org/drawingml/2006/main" xmlns:r="http://schemas.openxmlformats.org/officeDocument/2006/relationships" xmlns:p="http://schemas.openxmlformats.org/presentationml/2006/main" showMasterSp="0" showMasterPhAnim="0">
+  <p:cSld>
+    <p:spTree>
+      <p:nvGrpSpPr>
+        <p:cNvPr id="1" name="Shape 156"/>
+        <p:cNvGrpSpPr/>
+        <p:nvPr/>
+      </p:nvGrpSpPr>
+      <p:grpSpPr>
+        <a:xfrm>
+          <a:off x="0" y="0"/>
+          <a:ext cx="0" cy="0"/>
+          <a:chOff x="0" y="0"/>
+          <a:chExt cx="0" cy="0"/>
+        </a:xfrm>
+      </p:grpSpPr>
+      <p:sp>
+        <p:nvSpPr>
+          <p:cNvPr id="157" name="Google Shape;157;p5:notes"/>
+          <p:cNvSpPr txBox="1">
+            <a:spLocks noGrp="1"/>
+          </p:cNvSpPr>
+          <p:nvPr>
+            <p:ph type="body" idx="1"/>
+          </p:nvPr>
+        </p:nvSpPr>
+        <p:spPr>
+          <a:xfrm>
+            <a:off x="685800" y="4343400"/>
+            <a:ext cx="5486400" cy="4114800"/>
+          </a:xfrm>
+          <a:prstGeom prst="rect">
+            <a:avLst/>
+          </a:prstGeom>
+        </p:spPr>
+        <p:txBody>
+          <a:bodyPr spcFirstLastPara="1" wrap="square" lIns="91425" tIns="91425" rIns="91425" bIns="91425" anchor="t" anchorCtr="0">
+            <a:noAutofit/>
+          </a:bodyPr>
+          <a:lstStyle/>
+          <a:p>
+            <a:pPr marL="0" lvl="0" indent="0" algn="l" rtl="0">
+              <a:spcBef>
+                <a:spcPts val="0"/>
+              </a:spcBef>
+              <a:spcAft>
+                <a:spcPts val="0"/>
+              </a:spcAft>
+              <a:buNone/>
+            </a:pPr>
+            <a:endParaRPr/>
+          </a:p>
+        </p:txBody>
+      </p:sp>
+      <p:sp>
+        <p:nvSpPr>
+          <p:cNvPr id="158" name="Google Shape;158;p5:notes"/>
+          <p:cNvSpPr>
+            <a:spLocks noGrp="1" noRot="1" noChangeAspect="1"/>
+          </p:cNvSpPr>
+          <p:nvPr>
+            <p:ph type="sldImg" idx="2"/>
+          </p:nvPr>
+        </p:nvSpPr>
+        <p:spPr>
+          <a:xfrm>
+            <a:off x="381000" y="685800"/>
+            <a:ext cx="6096000" cy="3429000"/>
+          </a:xfrm>
+          <a:custGeom>
+            <a:avLst/>
+            <a:gdLst/>
+            <a:ahLst/>
+            <a:cxnLst/>
+            <a:rect l="l" t="t" r="r" b="b"/>
+            <a:pathLst>
+              <a:path w="120000" h="120000" extrusionOk="0">
+                <a:moveTo>
+                  <a:pt x="0" y="0"/>
+                </a:moveTo>
+                <a:lnTo>
+                  <a:pt x="120000" y="0"/>
+                </a:lnTo>
+                <a:lnTo>
+                  <a:pt x="120000" y="120000"/>
+                </a:lnTo>
+                <a:lnTo>
+                  <a:pt x="0" y="120000"/>
+                </a:lnTo>
+                <a:close/>
+              </a:path>
+            </a:pathLst>
+          </a:custGeom>
+        </p:spPr>
+      </p:sp>
+    </p:spTree>
+  </p:cSld>
+  <p:clrMapOvr>
+    <a:masterClrMapping/>
+  </p:clrMapOvr>
+</p:notes>
+</file>
+
+<file path=ppt/notesSlides/notesSlide15.xml><?xml version="1.0" encoding="utf-8"?>
+<p:notes xmlns:a="http://schemas.openxmlformats.org/drawingml/2006/main" xmlns:r="http://schemas.openxmlformats.org/officeDocument/2006/relationships" xmlns:p="http://schemas.openxmlformats.org/presentationml/2006/main" showMasterSp="0" showMasterPhAnim="0">
+  <p:cSld>
+    <p:spTree>
+      <p:nvGrpSpPr>
+        <p:cNvPr id="1" name="Shape 257"/>
+        <p:cNvGrpSpPr/>
+        <p:nvPr/>
+      </p:nvGrpSpPr>
+      <p:grpSpPr>
+        <a:xfrm>
+          <a:off x="0" y="0"/>
+          <a:ext cx="0" cy="0"/>
+          <a:chOff x="0" y="0"/>
+          <a:chExt cx="0" cy="0"/>
+        </a:xfrm>
+      </p:grpSpPr>
+      <p:sp>
+        <p:nvSpPr>
+          <p:cNvPr id="258" name="Google Shape;258;p11:notes"/>
+          <p:cNvSpPr txBox="1">
+            <a:spLocks noGrp="1"/>
+          </p:cNvSpPr>
+          <p:nvPr>
+            <p:ph type="body" idx="1"/>
+          </p:nvPr>
+        </p:nvSpPr>
+        <p:spPr>
+          <a:xfrm>
+            <a:off x="685800" y="4343400"/>
+            <a:ext cx="5486400" cy="4114800"/>
+          </a:xfrm>
+          <a:prstGeom prst="rect">
+            <a:avLst/>
+          </a:prstGeom>
+        </p:spPr>
+        <p:txBody>
+          <a:bodyPr spcFirstLastPara="1" wrap="square" lIns="91425" tIns="91425" rIns="91425" bIns="91425" anchor="t" anchorCtr="0">
+            <a:noAutofit/>
+          </a:bodyPr>
+          <a:lstStyle/>
+          <a:p>
+            <a:pPr marL="0" lvl="0" indent="0" algn="l" rtl="0">
+              <a:spcBef>
+                <a:spcPts val="0"/>
+              </a:spcBef>
+              <a:spcAft>
+                <a:spcPts val="0"/>
+              </a:spcAft>
+              <a:buNone/>
+            </a:pPr>
+            <a:endParaRPr/>
+          </a:p>
+        </p:txBody>
+      </p:sp>
+      <p:sp>
+        <p:nvSpPr>
+          <p:cNvPr id="259" name="Google Shape;259;p11:notes"/>
+          <p:cNvSpPr>
+            <a:spLocks noGrp="1" noRot="1" noChangeAspect="1"/>
+          </p:cNvSpPr>
+          <p:nvPr>
+            <p:ph type="sldImg" idx="2"/>
+          </p:nvPr>
+        </p:nvSpPr>
+        <p:spPr>
+          <a:xfrm>
+            <a:off x="381000" y="685800"/>
+            <a:ext cx="6096000" cy="3429000"/>
+          </a:xfrm>
+          <a:custGeom>
+            <a:avLst/>
+            <a:gdLst/>
+            <a:ahLst/>
+            <a:cxnLst/>
+            <a:rect l="l" t="t" r="r" b="b"/>
+            <a:pathLst>
+              <a:path w="120000" h="120000" extrusionOk="0">
+                <a:moveTo>
+                  <a:pt x="0" y="0"/>
+                </a:moveTo>
+                <a:lnTo>
+                  <a:pt x="120000" y="0"/>
+                </a:lnTo>
+                <a:lnTo>
+                  <a:pt x="120000" y="120000"/>
+                </a:lnTo>
+                <a:lnTo>
+                  <a:pt x="0" y="120000"/>
+                </a:lnTo>
+                <a:close/>
+              </a:path>
+            </a:pathLst>
+          </a:custGeom>
+        </p:spPr>
+      </p:sp>
+    </p:spTree>
+  </p:cSld>
+  <p:clrMapOvr>
+    <a:masterClrMapping/>
+  </p:clrMapOvr>
+</p:notes>
+</file>
+
+<file path=ppt/notesSlides/notesSlide16.xml><?xml version="1.0" encoding="utf-8"?>
+<p:notes xmlns:a="http://schemas.openxmlformats.org/drawingml/2006/main" xmlns:r="http://schemas.openxmlformats.org/officeDocument/2006/relationships" xmlns:p="http://schemas.openxmlformats.org/presentationml/2006/main" showMasterSp="0" showMasterPhAnim="0">
+  <p:cSld>
+    <p:spTree>
+      <p:nvGrpSpPr>
+        <p:cNvPr id="1" name="Shape 225"/>
+        <p:cNvGrpSpPr/>
+        <p:nvPr/>
+      </p:nvGrpSpPr>
+      <p:grpSpPr>
+        <a:xfrm>
+          <a:off x="0" y="0"/>
+          <a:ext cx="0" cy="0"/>
+          <a:chOff x="0" y="0"/>
+          <a:chExt cx="0" cy="0"/>
+        </a:xfrm>
+      </p:grpSpPr>
+      <p:sp>
+        <p:nvSpPr>
+          <p:cNvPr id="226" name="Google Shape;226;p10:notes"/>
+          <p:cNvSpPr txBox="1">
+            <a:spLocks noGrp="1"/>
+          </p:cNvSpPr>
+          <p:nvPr>
+            <p:ph type="body" idx="1"/>
+          </p:nvPr>
+        </p:nvSpPr>
+        <p:spPr>
+          <a:xfrm>
+            <a:off x="685800" y="4343400"/>
+            <a:ext cx="5486400" cy="4114800"/>
+          </a:xfrm>
+          <a:prstGeom prst="rect">
+            <a:avLst/>
+          </a:prstGeom>
+        </p:spPr>
+        <p:txBody>
+          <a:bodyPr spcFirstLastPara="1" wrap="square" lIns="91425" tIns="91425" rIns="91425" bIns="91425" anchor="t" anchorCtr="0">
+            <a:noAutofit/>
+          </a:bodyPr>
+          <a:lstStyle/>
+          <a:p>
+            <a:pPr marL="0" lvl="0" indent="0" algn="l" rtl="0">
+              <a:spcBef>
+                <a:spcPts val="0"/>
+              </a:spcBef>
+              <a:spcAft>
+                <a:spcPts val="0"/>
+              </a:spcAft>
+              <a:buNone/>
+            </a:pPr>
+            <a:endParaRPr/>
+          </a:p>
+        </p:txBody>
+      </p:sp>
+      <p:sp>
+        <p:nvSpPr>
+          <p:cNvPr id="227" name="Google Shape;227;p10:notes"/>
+          <p:cNvSpPr>
+            <a:spLocks noGrp="1" noRot="1" noChangeAspect="1"/>
+          </p:cNvSpPr>
+          <p:nvPr>
+            <p:ph type="sldImg" idx="2"/>
+          </p:nvPr>
+        </p:nvSpPr>
+        <p:spPr>
+          <a:xfrm>
+            <a:off x="381000" y="685800"/>
+            <a:ext cx="6096000" cy="3429000"/>
+          </a:xfrm>
+          <a:custGeom>
+            <a:avLst/>
+            <a:gdLst/>
+            <a:ahLst/>
+            <a:cxnLst/>
+            <a:rect l="l" t="t" r="r" b="b"/>
+            <a:pathLst>
+              <a:path w="120000" h="120000" extrusionOk="0">
+                <a:moveTo>
+                  <a:pt x="0" y="0"/>
+                </a:moveTo>
+                <a:lnTo>
+                  <a:pt x="120000" y="0"/>
+                </a:lnTo>
+                <a:lnTo>
+                  <a:pt x="120000" y="120000"/>
+                </a:lnTo>
+                <a:lnTo>
+                  <a:pt x="0" y="120000"/>
+                </a:lnTo>
+                <a:close/>
+              </a:path>
+            </a:pathLst>
+          </a:custGeom>
+        </p:spPr>
+      </p:sp>
+    </p:spTree>
+  </p:cSld>
+  <p:clrMapOvr>
+    <a:masterClrMapping/>
+  </p:clrMapOvr>
+</p:notes>
+</file>
+
+<file path=ppt/notesSlides/notesSlide17.xml><?xml version="1.0" encoding="utf-8"?>
 <p:notes xmlns:a="http://schemas.openxmlformats.org/drawingml/2006/main" xmlns:r="http://schemas.openxmlformats.org/officeDocument/2006/relationships" xmlns:p="http://schemas.openxmlformats.org/presentationml/2006/main" showMasterSp="0" showMasterPhAnim="0">
   <p:cSld>
     <p:spTree>
@@ -12283,17 +12703,9 @@
 <file path=ppt/slides/slide10.xml><?xml version="1.0" encoding="utf-8"?>
 <p:sld xmlns:a="http://schemas.openxmlformats.org/drawingml/2006/main" xmlns:r="http://schemas.openxmlformats.org/officeDocument/2006/relationships" xmlns:p="http://schemas.openxmlformats.org/presentationml/2006/main">
   <p:cSld>
-    <p:bg>
-      <p:bgPr>
-        <a:solidFill>
-          <a:srgbClr val="0F172A"/>
-        </a:solidFill>
-        <a:effectLst/>
-      </p:bgPr>
-    </p:bg>
     <p:spTree>
       <p:nvGrpSpPr>
-        <p:cNvPr id="1" name="Shape 214"/>
+        <p:cNvPr id="1" name="Shape 83"/>
         <p:cNvGrpSpPr/>
         <p:nvPr/>
       </p:nvGrpSpPr>
@@ -12307,7 +12719,7 @@
       </p:grpSpPr>
       <p:pic>
         <p:nvPicPr>
-          <p:cNvPr id="215" name="Google Shape;215;p21" descr="image.png"/>
+          <p:cNvPr id="84" name="Google Shape;84;p13" descr="image.png"/>
           <p:cNvPicPr preferRelativeResize="0"/>
           <p:nvPr/>
         </p:nvPicPr>
@@ -12332,473 +12744,76 @@
           </a:ln>
         </p:spPr>
       </p:pic>
-      <p:sp>
-        <p:nvSpPr>
-          <p:cNvPr id="216" name="Google Shape;216;p21"/>
-          <p:cNvSpPr txBox="1"/>
+      <p:pic>
+        <p:nvPicPr>
+          <p:cNvPr id="85" name="Google Shape;85;p13" descr="image.png"/>
+          <p:cNvPicPr preferRelativeResize="0"/>
           <p:nvPr/>
-        </p:nvSpPr>
-        <p:spPr>
-          <a:xfrm>
-            <a:off x="571500" y="2924175"/>
-            <a:ext cx="3333750" cy="1524000"/>
-          </a:xfrm>
-          <a:prstGeom prst="rect">
-            <a:avLst/>
-          </a:prstGeom>
-          <a:noFill/>
-          <a:ln>
-            <a:noFill/>
-          </a:ln>
-        </p:spPr>
-        <p:txBody>
-          <a:bodyPr spcFirstLastPara="1" wrap="square" lIns="0" tIns="0" rIns="0" bIns="0" anchor="t" anchorCtr="0">
-            <a:spAutoFit/>
-          </a:bodyPr>
-          <a:lstStyle/>
-          <a:p>
-            <a:pPr marL="0" marR="0" lvl="0" indent="0" algn="ctr" rtl="0">
-              <a:lnSpc>
-                <a:spcPct val="100000"/>
-              </a:lnSpc>
-              <a:spcBef>
-                <a:spcPts val="0"/>
-              </a:spcBef>
-              <a:spcAft>
-                <a:spcPts val="0"/>
-              </a:spcAft>
-              <a:buNone/>
-            </a:pPr>
-            <a:r>
-              <a:rPr lang="en-US" sz="12000" b="1" i="0" u="none" strike="noStrike" cap="none">
-                <a:solidFill>
-                  <a:srgbClr val="06B6D4"/>
-                </a:solidFill>
-                <a:latin typeface="Inter"/>
-                <a:ea typeface="Inter"/>
-                <a:cs typeface="Inter"/>
-                <a:sym typeface="Inter"/>
-              </a:rPr>
-              <a:t>03</a:t>
-            </a:r>
-            <a:endParaRPr/>
-          </a:p>
-        </p:txBody>
-      </p:sp>
-      <p:sp>
-        <p:nvSpPr>
-          <p:cNvPr id="217" name="Google Shape;217;p21"/>
-          <p:cNvSpPr txBox="1"/>
+        </p:nvPicPr>
+        <p:blipFill rotWithShape="1">
+          <a:blip r:embed="rId4">
+            <a:alphaModFix/>
+          </a:blip>
+          <a:srcRect/>
+          <a:stretch/>
+        </p:blipFill>
+        <p:spPr>
+          <a:xfrm>
+            <a:off x="1047750" y="2181225"/>
+            <a:ext cx="4857750" cy="3257550"/>
+          </a:xfrm>
+          <a:prstGeom prst="rect">
+            <a:avLst/>
+          </a:prstGeom>
+          <a:noFill/>
+          <a:ln>
+            <a:noFill/>
+          </a:ln>
+        </p:spPr>
+      </p:pic>
+      <p:pic>
+        <p:nvPicPr>
+          <p:cNvPr id="86" name="Google Shape;86;p13" descr="image.png"/>
+          <p:cNvPicPr preferRelativeResize="0"/>
           <p:nvPr/>
-        </p:nvSpPr>
-        <p:spPr>
-          <a:xfrm>
-            <a:off x="571500" y="4543425"/>
-            <a:ext cx="3333750" cy="276225"/>
-          </a:xfrm>
-          <a:prstGeom prst="rect">
-            <a:avLst/>
-          </a:prstGeom>
-          <a:noFill/>
-          <a:ln>
-            <a:noFill/>
-          </a:ln>
-        </p:spPr>
-        <p:txBody>
-          <a:bodyPr spcFirstLastPara="1" wrap="square" lIns="0" tIns="0" rIns="0" bIns="0" anchor="t" anchorCtr="0">
-            <a:spAutoFit/>
-          </a:bodyPr>
-          <a:lstStyle/>
-          <a:p>
-            <a:pPr marL="0" marR="0" lvl="0" indent="0" algn="ctr" rtl="0">
-              <a:spcBef>
-                <a:spcPts val="0"/>
-              </a:spcBef>
-              <a:spcAft>
-                <a:spcPts val="0"/>
-              </a:spcAft>
-              <a:buNone/>
-            </a:pPr>
-            <a:r>
-              <a:rPr lang="en-US" sz="1800" b="0" i="0" u="none" strike="noStrike" cap="none">
-                <a:solidFill>
-                  <a:srgbClr val="FFFFFF"/>
-                </a:solidFill>
-                <a:latin typeface="Inter SemiBold"/>
-                <a:ea typeface="Inter SemiBold"/>
-                <a:cs typeface="Inter SemiBold"/>
-                <a:sym typeface="Inter SemiBold"/>
-              </a:rPr>
-              <a:t>Tầng Dự phòng (Levels)</a:t>
-            </a:r>
-            <a:endParaRPr/>
-          </a:p>
-        </p:txBody>
-      </p:sp>
-      <p:sp>
-        <p:nvSpPr>
-          <p:cNvPr id="218" name="Google Shape;218;p21"/>
-          <p:cNvSpPr txBox="1"/>
-          <p:nvPr/>
-        </p:nvSpPr>
-        <p:spPr>
-          <a:xfrm>
-            <a:off x="4476750" y="2671762"/>
-            <a:ext cx="6980872" cy="323850"/>
-          </a:xfrm>
-          <a:prstGeom prst="rect">
-            <a:avLst/>
-          </a:prstGeom>
-          <a:noFill/>
-          <a:ln>
-            <a:noFill/>
-          </a:ln>
-        </p:spPr>
-        <p:txBody>
-          <a:bodyPr spcFirstLastPara="1" wrap="square" lIns="0" tIns="0" rIns="0" bIns="0" anchor="t" anchorCtr="0">
-            <a:spAutoFit/>
-          </a:bodyPr>
-          <a:lstStyle/>
-          <a:p>
-            <a:pPr marL="0" marR="0" lvl="0" indent="0" algn="l" rtl="0">
-              <a:spcBef>
-                <a:spcPts val="0"/>
-              </a:spcBef>
-              <a:spcAft>
-                <a:spcPts val="0"/>
-              </a:spcAft>
-              <a:buNone/>
-            </a:pPr>
-            <a:r>
-              <a:rPr lang="en-US" sz="2100" b="1" i="0" u="none" strike="noStrike" cap="none">
-                <a:solidFill>
-                  <a:srgbClr val="06B6D4"/>
-                </a:solidFill>
-                <a:latin typeface="Urbanist"/>
-                <a:ea typeface="Urbanist"/>
-                <a:cs typeface="Urbanist"/>
-                <a:sym typeface="Urbanist"/>
-              </a:rPr>
-              <a:t>Hệ thống Không Bao giờ Thất bại</a:t>
-            </a:r>
-            <a:endParaRPr/>
-          </a:p>
-        </p:txBody>
-      </p:sp>
-      <p:sp>
-        <p:nvSpPr>
-          <p:cNvPr id="219" name="Google Shape;219;p21"/>
-          <p:cNvSpPr txBox="1"/>
-          <p:nvPr/>
-        </p:nvSpPr>
-        <p:spPr>
-          <a:xfrm>
-            <a:off x="4476750" y="3138487"/>
-            <a:ext cx="6648450" cy="304800"/>
-          </a:xfrm>
-          <a:prstGeom prst="rect">
-            <a:avLst/>
-          </a:prstGeom>
-          <a:noFill/>
-          <a:ln>
-            <a:noFill/>
-          </a:ln>
-        </p:spPr>
-        <p:txBody>
-          <a:bodyPr spcFirstLastPara="1" wrap="square" lIns="0" tIns="0" rIns="0" bIns="0" anchor="t" anchorCtr="0">
-            <a:spAutoFit/>
-          </a:bodyPr>
-          <a:lstStyle/>
-          <a:p>
-            <a:pPr marL="0" marR="0" lvl="0" indent="0" algn="l" rtl="0">
-              <a:lnSpc>
-                <a:spcPct val="160000"/>
-              </a:lnSpc>
-              <a:spcBef>
-                <a:spcPts val="0"/>
-              </a:spcBef>
-              <a:spcAft>
-                <a:spcPts val="0"/>
-              </a:spcAft>
-              <a:buNone/>
-            </a:pPr>
-            <a:r>
-              <a:rPr lang="en-US" sz="1500" b="0" i="0" u="none" strike="noStrike" cap="none">
-                <a:solidFill>
-                  <a:srgbClr val="94A3B8"/>
-                </a:solidFill>
-                <a:latin typeface="Inter"/>
-                <a:ea typeface="Inter"/>
-                <a:cs typeface="Inter"/>
-                <a:sym typeface="Inter"/>
-              </a:rPr>
-              <a:t>Chúng tôi xây dựng cơ chế tự phục hồi (Self-healing) thông minh:</a:t>
-            </a:r>
-            <a:endParaRPr/>
-          </a:p>
-        </p:txBody>
-      </p:sp>
-      <p:sp>
-        <p:nvSpPr>
-          <p:cNvPr id="220" name="Google Shape;220;p21"/>
-          <p:cNvSpPr txBox="1"/>
-          <p:nvPr/>
-        </p:nvSpPr>
-        <p:spPr>
-          <a:xfrm>
-            <a:off x="4905375" y="3586162"/>
-            <a:ext cx="6219825" cy="304800"/>
-          </a:xfrm>
-          <a:prstGeom prst="rect">
-            <a:avLst/>
-          </a:prstGeom>
-          <a:noFill/>
-          <a:ln>
-            <a:noFill/>
-          </a:ln>
-        </p:spPr>
-        <p:txBody>
-          <a:bodyPr spcFirstLastPara="1" wrap="square" lIns="0" tIns="0" rIns="0" bIns="0" anchor="t" anchorCtr="0">
-            <a:spAutoFit/>
-          </a:bodyPr>
-          <a:lstStyle/>
-          <a:p>
-            <a:pPr marL="0" marR="0" lvl="0" indent="0" algn="l" rtl="0">
-              <a:lnSpc>
-                <a:spcPct val="160000"/>
-              </a:lnSpc>
-              <a:spcBef>
-                <a:spcPts val="0"/>
-              </a:spcBef>
-              <a:spcAft>
-                <a:spcPts val="0"/>
-              </a:spcAft>
-              <a:buNone/>
-            </a:pPr>
-            <a:r>
-              <a:rPr lang="en-US" sz="1500" b="0" i="0" u="none" strike="noStrike" cap="none">
-                <a:solidFill>
-                  <a:srgbClr val="06B6D4"/>
-                </a:solidFill>
-                <a:latin typeface="Inter"/>
-                <a:ea typeface="Inter"/>
-                <a:cs typeface="Inter"/>
-                <a:sym typeface="Inter"/>
-              </a:rPr>
-              <a:t>L1 - RAG:</a:t>
-            </a:r>
-            <a:r>
-              <a:rPr lang="en-US" sz="1500" b="0" i="0" u="none" strike="noStrike" cap="none">
-                <a:solidFill>
-                  <a:srgbClr val="94A3B8"/>
-                </a:solidFill>
-                <a:latin typeface="Inter"/>
-                <a:ea typeface="Inter"/>
-                <a:cs typeface="Inter"/>
-                <a:sym typeface="Inter"/>
-              </a:rPr>
-              <a:t> Sử dụng dữ liệu gốc + Gemini (Ưu tiên).</a:t>
-            </a:r>
-            <a:endParaRPr/>
-          </a:p>
-        </p:txBody>
-      </p:sp>
-      <p:sp>
-        <p:nvSpPr>
-          <p:cNvPr id="221" name="Google Shape;221;p21"/>
-          <p:cNvSpPr txBox="1"/>
-          <p:nvPr/>
-        </p:nvSpPr>
-        <p:spPr>
-          <a:xfrm>
-            <a:off x="4905375" y="4081462"/>
-            <a:ext cx="6219825" cy="304800"/>
-          </a:xfrm>
-          <a:prstGeom prst="rect">
-            <a:avLst/>
-          </a:prstGeom>
-          <a:noFill/>
-          <a:ln>
-            <a:noFill/>
-          </a:ln>
-        </p:spPr>
-        <p:txBody>
-          <a:bodyPr spcFirstLastPara="1" wrap="square" lIns="0" tIns="0" rIns="0" bIns="0" anchor="t" anchorCtr="0">
-            <a:spAutoFit/>
-          </a:bodyPr>
-          <a:lstStyle/>
-          <a:p>
-            <a:pPr marL="0" marR="0" lvl="0" indent="0" algn="l" rtl="0">
-              <a:lnSpc>
-                <a:spcPct val="160000"/>
-              </a:lnSpc>
-              <a:spcBef>
-                <a:spcPts val="0"/>
-              </a:spcBef>
-              <a:spcAft>
-                <a:spcPts val="0"/>
-              </a:spcAft>
-              <a:buNone/>
-            </a:pPr>
-            <a:r>
-              <a:rPr lang="en-US" sz="1500" b="0" i="0" u="none" strike="noStrike" cap="none">
-                <a:solidFill>
-                  <a:srgbClr val="06B6D4"/>
-                </a:solidFill>
-                <a:latin typeface="Inter"/>
-                <a:ea typeface="Inter"/>
-                <a:cs typeface="Inter"/>
-                <a:sym typeface="Inter"/>
-              </a:rPr>
-              <a:t>L2 - LLM-Only:</a:t>
-            </a:r>
-            <a:r>
-              <a:rPr lang="en-US" sz="1500" b="0" i="0" u="none" strike="noStrike" cap="none">
-                <a:solidFill>
-                  <a:srgbClr val="94A3B8"/>
-                </a:solidFill>
-                <a:latin typeface="Inter"/>
-                <a:ea typeface="Inter"/>
-                <a:cs typeface="Inter"/>
-                <a:sym typeface="Inter"/>
-              </a:rPr>
-              <a:t> Khi RAG bị giới hạn, LLM sẽ tư vấn theo kinh nghiệm.</a:t>
-            </a:r>
-            <a:endParaRPr/>
-          </a:p>
-        </p:txBody>
-      </p:sp>
-      <p:sp>
-        <p:nvSpPr>
-          <p:cNvPr id="222" name="Google Shape;222;p21"/>
-          <p:cNvSpPr txBox="1"/>
-          <p:nvPr/>
-        </p:nvSpPr>
-        <p:spPr>
-          <a:xfrm>
-            <a:off x="4905375" y="4576762"/>
-            <a:ext cx="6219825" cy="304800"/>
-          </a:xfrm>
-          <a:prstGeom prst="rect">
-            <a:avLst/>
-          </a:prstGeom>
-          <a:noFill/>
-          <a:ln>
-            <a:noFill/>
-          </a:ln>
-        </p:spPr>
-        <p:txBody>
-          <a:bodyPr spcFirstLastPara="1" wrap="square" lIns="0" tIns="0" rIns="0" bIns="0" anchor="t" anchorCtr="0">
-            <a:spAutoFit/>
-          </a:bodyPr>
-          <a:lstStyle/>
-          <a:p>
-            <a:pPr marL="0" marR="0" lvl="0" indent="0" algn="l" rtl="0">
-              <a:lnSpc>
-                <a:spcPct val="160000"/>
-              </a:lnSpc>
-              <a:spcBef>
-                <a:spcPts val="0"/>
-              </a:spcBef>
-              <a:spcAft>
-                <a:spcPts val="0"/>
-              </a:spcAft>
-              <a:buNone/>
-            </a:pPr>
-            <a:r>
-              <a:rPr lang="en-US" sz="1500" b="0" i="0" u="none" strike="noStrike" cap="none">
-                <a:solidFill>
-                  <a:srgbClr val="06B6D4"/>
-                </a:solidFill>
-                <a:latin typeface="Inter"/>
-                <a:ea typeface="Inter"/>
-                <a:cs typeface="Inter"/>
-                <a:sym typeface="Inter"/>
-              </a:rPr>
-              <a:t>L3 - Rule-Based:</a:t>
-            </a:r>
-            <a:r>
-              <a:rPr lang="en-US" sz="1500" b="0" i="0" u="none" strike="noStrike" cap="none">
-                <a:solidFill>
-                  <a:srgbClr val="94A3B8"/>
-                </a:solidFill>
-                <a:latin typeface="Inter"/>
-                <a:ea typeface="Inter"/>
-                <a:cs typeface="Inter"/>
-                <a:sym typeface="Inter"/>
-              </a:rPr>
-              <a:t> Dùng quy tắc Holland cơ bản nếu AI gặp sự cố.</a:t>
-            </a:r>
-            <a:endParaRPr/>
-          </a:p>
-        </p:txBody>
-      </p:sp>
-      <p:sp>
-        <p:nvSpPr>
-          <p:cNvPr id="223" name="Google Shape;223;p21"/>
-          <p:cNvSpPr txBox="1"/>
-          <p:nvPr/>
-        </p:nvSpPr>
-        <p:spPr>
-          <a:xfrm>
-            <a:off x="809625" y="571500"/>
-            <a:ext cx="11351418" cy="504825"/>
-          </a:xfrm>
-          <a:prstGeom prst="rect">
-            <a:avLst/>
-          </a:prstGeom>
-          <a:noFill/>
-          <a:ln>
-            <a:noFill/>
-          </a:ln>
-        </p:spPr>
-        <p:txBody>
-          <a:bodyPr spcFirstLastPara="1" wrap="square" lIns="0" tIns="0" rIns="0" bIns="0" anchor="t" anchorCtr="0">
-            <a:spAutoFit/>
-          </a:bodyPr>
-          <a:lstStyle/>
-          <a:p>
-            <a:pPr marL="0" marR="0" lvl="0" indent="0" algn="l" rtl="0">
-              <a:spcBef>
-                <a:spcPts val="0"/>
-              </a:spcBef>
-              <a:spcAft>
-                <a:spcPts val="0"/>
-              </a:spcAft>
-              <a:buNone/>
-            </a:pPr>
-            <a:r>
-              <a:rPr lang="en-US" sz="3300" b="1" i="0" u="none" strike="noStrike" cap="none">
-                <a:solidFill>
-                  <a:srgbClr val="FFFFFF"/>
-                </a:solidFill>
-                <a:latin typeface="Urbanist"/>
-                <a:ea typeface="Urbanist"/>
-                <a:cs typeface="Urbanist"/>
-                <a:sym typeface="Urbanist"/>
-              </a:rPr>
-              <a:t>Resilience &amp; Fallback Strategy</a:t>
-            </a:r>
-            <a:endParaRPr/>
-          </a:p>
-        </p:txBody>
-      </p:sp>
-      <p:sp>
-        <p:nvSpPr>
-          <p:cNvPr id="224" name="Google Shape;224;p21"/>
+        </p:nvPicPr>
+        <p:blipFill rotWithShape="1">
+          <a:blip r:embed="rId5">
+            <a:alphaModFix/>
+          </a:blip>
+          <a:srcRect/>
+          <a:stretch/>
+        </p:blipFill>
+        <p:spPr>
+          <a:xfrm>
+            <a:off x="6286500" y="2181226"/>
+            <a:ext cx="4857750" cy="3257550"/>
+          </a:xfrm>
+          <a:prstGeom prst="rect">
+            <a:avLst/>
+          </a:prstGeom>
+          <a:noFill/>
+          <a:ln>
+            <a:noFill/>
+          </a:ln>
+        </p:spPr>
+      </p:pic>
+      <p:sp>
+        <p:nvSpPr>
+          <p:cNvPr id="88" name="Google Shape;88;p13"/>
           <p:cNvSpPr/>
           <p:nvPr/>
         </p:nvSpPr>
         <p:spPr>
           <a:xfrm>
-            <a:off x="571500" y="571500"/>
-            <a:ext cx="57150" cy="504825"/>
+            <a:off x="571500" y="6467475"/>
+            <a:ext cx="11049000" cy="9525"/>
           </a:xfrm>
           <a:prstGeom prst="rect">
             <a:avLst/>
           </a:prstGeom>
           <a:solidFill>
-            <a:srgbClr val="06B6D4"/>
+            <a:srgbClr val="FFFFFF"/>
           </a:solidFill>
           <a:ln>
             <a:noFill/>
@@ -12831,6 +12846,641 @@
           </a:p>
         </p:txBody>
       </p:sp>
+      <p:sp>
+        <p:nvSpPr>
+          <p:cNvPr id="89" name="Google Shape;89;p13"/>
+          <p:cNvSpPr txBox="1"/>
+          <p:nvPr/>
+        </p:nvSpPr>
+        <p:spPr>
+          <a:xfrm>
+            <a:off x="571500" y="381000"/>
+            <a:ext cx="11601450" cy="485775"/>
+          </a:xfrm>
+          <a:prstGeom prst="rect">
+            <a:avLst/>
+          </a:prstGeom>
+          <a:noFill/>
+          <a:ln>
+            <a:noFill/>
+          </a:ln>
+        </p:spPr>
+        <p:txBody>
+          <a:bodyPr spcFirstLastPara="1" wrap="square" lIns="0" tIns="0" rIns="0" bIns="0" anchor="t" anchorCtr="0">
+            <a:spAutoFit/>
+          </a:bodyPr>
+          <a:lstStyle/>
+          <a:p>
+            <a:pPr marL="0" marR="0" lvl="0" indent="0" algn="l" rtl="0">
+              <a:spcBef>
+                <a:spcPts val="0"/>
+              </a:spcBef>
+              <a:spcAft>
+                <a:spcPts val="0"/>
+              </a:spcAft>
+              <a:buNone/>
+            </a:pPr>
+            <a:r>
+              <a:rPr lang="en-US" sz="3150" b="1" i="0" u="none" strike="noStrike" cap="none">
+                <a:solidFill>
+                  <a:srgbClr val="FFFFFF"/>
+                </a:solidFill>
+                <a:latin typeface="Urbanist"/>
+                <a:ea typeface="Urbanist"/>
+                <a:cs typeface="Urbanist"/>
+                <a:sym typeface="Urbanist"/>
+              </a:rPr>
+              <a:t>01. Độ Tin Cậy (Reliability)</a:t>
+            </a:r>
+            <a:endParaRPr/>
+          </a:p>
+        </p:txBody>
+      </p:sp>
+      <p:sp>
+        <p:nvSpPr>
+          <p:cNvPr id="90" name="Google Shape;90;p13"/>
+          <p:cNvSpPr txBox="1"/>
+          <p:nvPr/>
+        </p:nvSpPr>
+        <p:spPr>
+          <a:xfrm>
+            <a:off x="1047750" y="1533525"/>
+            <a:ext cx="10096500" cy="361950"/>
+          </a:xfrm>
+          <a:prstGeom prst="rect">
+            <a:avLst/>
+          </a:prstGeom>
+          <a:noFill/>
+          <a:ln>
+            <a:noFill/>
+          </a:ln>
+        </p:spPr>
+        <p:txBody>
+          <a:bodyPr spcFirstLastPara="1" wrap="square" lIns="0" tIns="0" rIns="0" bIns="0" anchor="t" anchorCtr="0">
+            <a:spAutoFit/>
+          </a:bodyPr>
+          <a:lstStyle/>
+          <a:p>
+            <a:pPr marL="0" marR="0" lvl="0" indent="0" algn="l" rtl="0">
+              <a:spcBef>
+                <a:spcPts val="0"/>
+              </a:spcBef>
+              <a:spcAft>
+                <a:spcPts val="0"/>
+              </a:spcAft>
+              <a:buNone/>
+            </a:pPr>
+            <a:r>
+              <a:rPr lang="en-US" sz="2400" b="1" i="0" u="none" strike="noStrike" cap="none">
+                <a:solidFill>
+                  <a:srgbClr val="0EA5E9"/>
+                </a:solidFill>
+                <a:latin typeface="Urbanist"/>
+                <a:ea typeface="Urbanist"/>
+                <a:cs typeface="Urbanist"/>
+                <a:sym typeface="Urbanist"/>
+              </a:rPr>
+              <a:t>Đảm bảo nhất quán &amp; Triệt tiêu "Ảo tưởng"</a:t>
+            </a:r>
+            <a:endParaRPr/>
+          </a:p>
+        </p:txBody>
+      </p:sp>
+      <p:sp>
+        <p:nvSpPr>
+          <p:cNvPr id="92" name="Google Shape;92;p13"/>
+          <p:cNvSpPr txBox="1"/>
+          <p:nvPr/>
+        </p:nvSpPr>
+        <p:spPr>
+          <a:xfrm>
+            <a:off x="1657350" y="2419350"/>
+            <a:ext cx="4210526" cy="276225"/>
+          </a:xfrm>
+          <a:prstGeom prst="rect">
+            <a:avLst/>
+          </a:prstGeom>
+          <a:noFill/>
+          <a:ln>
+            <a:noFill/>
+          </a:ln>
+        </p:spPr>
+        <p:txBody>
+          <a:bodyPr spcFirstLastPara="1" wrap="square" lIns="0" tIns="0" rIns="0" bIns="0" anchor="ctr" anchorCtr="0">
+            <a:spAutoFit/>
+          </a:bodyPr>
+          <a:lstStyle/>
+          <a:p>
+            <a:pPr marL="0" marR="0" lvl="0" indent="0" algn="l" rtl="0">
+              <a:spcBef>
+                <a:spcPts val="0"/>
+              </a:spcBef>
+              <a:spcAft>
+                <a:spcPts val="0"/>
+              </a:spcAft>
+              <a:buNone/>
+            </a:pPr>
+            <a:r>
+              <a:rPr lang="en-US" sz="1800" b="1" i="0" u="none" strike="noStrike" cap="none">
+                <a:solidFill>
+                  <a:srgbClr val="B91C1C"/>
+                </a:solidFill>
+                <a:latin typeface="Urbanist"/>
+                <a:ea typeface="Urbanist"/>
+                <a:cs typeface="Urbanist"/>
+                <a:sym typeface="Urbanist"/>
+              </a:rPr>
+              <a:t>Rủi ro</a:t>
+            </a:r>
+            <a:endParaRPr/>
+          </a:p>
+        </p:txBody>
+      </p:sp>
+      <p:sp>
+        <p:nvSpPr>
+          <p:cNvPr id="93" name="Google Shape;93;p13"/>
+          <p:cNvSpPr txBox="1"/>
+          <p:nvPr/>
+        </p:nvSpPr>
+        <p:spPr>
+          <a:xfrm>
+            <a:off x="1333500" y="2924175"/>
+            <a:ext cx="4333875" cy="800100"/>
+          </a:xfrm>
+          <a:prstGeom prst="rect">
+            <a:avLst/>
+          </a:prstGeom>
+          <a:noFill/>
+          <a:ln>
+            <a:noFill/>
+          </a:ln>
+        </p:spPr>
+        <p:txBody>
+          <a:bodyPr spcFirstLastPara="1" wrap="square" lIns="0" tIns="0" rIns="0" bIns="0" anchor="t" anchorCtr="0">
+            <a:spAutoFit/>
+          </a:bodyPr>
+          <a:lstStyle/>
+          <a:p>
+            <a:pPr marL="0" marR="0" lvl="0" indent="0" algn="l" rtl="0">
+              <a:lnSpc>
+                <a:spcPct val="140000"/>
+              </a:lnSpc>
+              <a:spcBef>
+                <a:spcPts val="0"/>
+              </a:spcBef>
+              <a:spcAft>
+                <a:spcPts val="0"/>
+              </a:spcAft>
+              <a:buNone/>
+            </a:pPr>
+            <a:r>
+              <a:rPr lang="en-US" sz="1500" b="0" i="0" u="none" strike="noStrike" cap="none">
+                <a:solidFill>
+                  <a:srgbClr val="334155"/>
+                </a:solidFill>
+                <a:latin typeface="Urbanist"/>
+                <a:ea typeface="Urbanist"/>
+                <a:cs typeface="Urbanist"/>
+                <a:sym typeface="Urbanist"/>
+              </a:rPr>
+              <a:t>LLM tự bịa ra ngành nghề không có thật, lộ trình học tập phi thực tế, dự báo sai lệch nhu cầu thị trường.</a:t>
+            </a:r>
+            <a:endParaRPr/>
+          </a:p>
+        </p:txBody>
+      </p:sp>
+      <p:sp>
+        <p:nvSpPr>
+          <p:cNvPr id="94" name="Google Shape;94;p13"/>
+          <p:cNvSpPr txBox="1"/>
+          <p:nvPr/>
+        </p:nvSpPr>
+        <p:spPr>
+          <a:xfrm>
+            <a:off x="6896100" y="2419350"/>
+            <a:ext cx="4210526" cy="276225"/>
+          </a:xfrm>
+          <a:prstGeom prst="rect">
+            <a:avLst/>
+          </a:prstGeom>
+          <a:noFill/>
+          <a:ln>
+            <a:noFill/>
+          </a:ln>
+        </p:spPr>
+        <p:txBody>
+          <a:bodyPr spcFirstLastPara="1" wrap="square" lIns="0" tIns="0" rIns="0" bIns="0" anchor="ctr" anchorCtr="0">
+            <a:spAutoFit/>
+          </a:bodyPr>
+          <a:lstStyle/>
+          <a:p>
+            <a:pPr marL="0" marR="0" lvl="0" indent="0" algn="l" rtl="0">
+              <a:spcBef>
+                <a:spcPts val="0"/>
+              </a:spcBef>
+              <a:spcAft>
+                <a:spcPts val="0"/>
+              </a:spcAft>
+              <a:buNone/>
+            </a:pPr>
+            <a:r>
+              <a:rPr lang="en-US" sz="1800" b="1" i="0" u="none" strike="noStrike" cap="none">
+                <a:solidFill>
+                  <a:srgbClr val="0369A1"/>
+                </a:solidFill>
+                <a:latin typeface="Urbanist"/>
+                <a:ea typeface="Urbanist"/>
+                <a:cs typeface="Urbanist"/>
+                <a:sym typeface="Urbanist"/>
+              </a:rPr>
+              <a:t>Giải pháp kỹ thuật</a:t>
+            </a:r>
+            <a:endParaRPr/>
+          </a:p>
+        </p:txBody>
+      </p:sp>
+      <p:pic>
+        <p:nvPicPr>
+          <p:cNvPr id="95" name="Google Shape;95;p13" descr="image.png"/>
+          <p:cNvPicPr preferRelativeResize="0"/>
+          <p:nvPr/>
+        </p:nvPicPr>
+        <p:blipFill rotWithShape="1">
+          <a:blip r:embed="rId6">
+            <a:alphaModFix/>
+          </a:blip>
+          <a:srcRect/>
+          <a:stretch/>
+        </p:blipFill>
+        <p:spPr>
+          <a:xfrm>
+            <a:off x="1333500" y="2443162"/>
+            <a:ext cx="228600" cy="228600"/>
+          </a:xfrm>
+          <a:prstGeom prst="rect">
+            <a:avLst/>
+          </a:prstGeom>
+          <a:noFill/>
+          <a:ln>
+            <a:noFill/>
+          </a:ln>
+        </p:spPr>
+      </p:pic>
+      <p:pic>
+        <p:nvPicPr>
+          <p:cNvPr id="96" name="Google Shape;96;p13" descr="image.png"/>
+          <p:cNvPicPr preferRelativeResize="0"/>
+          <p:nvPr/>
+        </p:nvPicPr>
+        <p:blipFill rotWithShape="1">
+          <a:blip r:embed="rId7">
+            <a:alphaModFix/>
+          </a:blip>
+          <a:srcRect/>
+          <a:stretch/>
+        </p:blipFill>
+        <p:spPr>
+          <a:xfrm>
+            <a:off x="6572250" y="2443162"/>
+            <a:ext cx="228600" cy="228600"/>
+          </a:xfrm>
+          <a:prstGeom prst="rect">
+            <a:avLst/>
+          </a:prstGeom>
+          <a:noFill/>
+          <a:ln>
+            <a:noFill/>
+          </a:ln>
+        </p:spPr>
+      </p:pic>
+      <p:sp>
+        <p:nvSpPr>
+          <p:cNvPr id="97" name="Google Shape;97;p13"/>
+          <p:cNvSpPr txBox="1"/>
+          <p:nvPr/>
+        </p:nvSpPr>
+        <p:spPr>
+          <a:xfrm>
+            <a:off x="6724650" y="2924175"/>
+            <a:ext cx="38100" cy="266700"/>
+          </a:xfrm>
+          <a:prstGeom prst="rect">
+            <a:avLst/>
+          </a:prstGeom>
+          <a:noFill/>
+          <a:ln>
+            <a:noFill/>
+          </a:ln>
+        </p:spPr>
+        <p:txBody>
+          <a:bodyPr spcFirstLastPara="1" wrap="square" lIns="0" tIns="0" rIns="0" bIns="0" anchor="t" anchorCtr="0">
+            <a:spAutoFit/>
+          </a:bodyPr>
+          <a:lstStyle/>
+          <a:p>
+            <a:pPr marL="0" marR="0" lvl="0" indent="0" algn="l" rtl="0">
+              <a:spcBef>
+                <a:spcPts val="0"/>
+              </a:spcBef>
+              <a:spcAft>
+                <a:spcPts val="0"/>
+              </a:spcAft>
+              <a:buNone/>
+            </a:pPr>
+            <a:r>
+              <a:rPr lang="en-US" sz="1500" b="0" i="0" u="none" strike="noStrike" cap="none">
+                <a:solidFill>
+                  <a:srgbClr val="334155"/>
+                </a:solidFill>
+                <a:latin typeface="Urbanist"/>
+                <a:ea typeface="Urbanist"/>
+                <a:cs typeface="Urbanist"/>
+                <a:sym typeface="Urbanist"/>
+              </a:rPr>
+              <a:t>•</a:t>
+            </a:r>
+            <a:endParaRPr/>
+          </a:p>
+        </p:txBody>
+      </p:sp>
+      <p:sp>
+        <p:nvSpPr>
+          <p:cNvPr id="98" name="Google Shape;98;p13"/>
+          <p:cNvSpPr txBox="1"/>
+          <p:nvPr/>
+        </p:nvSpPr>
+        <p:spPr>
+          <a:xfrm>
+            <a:off x="6762750" y="2924175"/>
+            <a:ext cx="4143375" cy="969496"/>
+          </a:xfrm>
+          <a:prstGeom prst="rect">
+            <a:avLst/>
+          </a:prstGeom>
+          <a:noFill/>
+          <a:ln>
+            <a:noFill/>
+          </a:ln>
+        </p:spPr>
+        <p:txBody>
+          <a:bodyPr spcFirstLastPara="1" wrap="square" lIns="38100" tIns="0" rIns="0" bIns="0" anchor="t" anchorCtr="0">
+            <a:spAutoFit/>
+          </a:bodyPr>
+          <a:lstStyle/>
+          <a:p>
+            <a:pPr marL="0" marR="0" lvl="0" indent="0" algn="l" rtl="0">
+              <a:lnSpc>
+                <a:spcPct val="140000"/>
+              </a:lnSpc>
+              <a:spcBef>
+                <a:spcPts val="0"/>
+              </a:spcBef>
+              <a:spcAft>
+                <a:spcPts val="0"/>
+              </a:spcAft>
+              <a:buNone/>
+            </a:pPr>
+            <a:r>
+              <a:rPr lang="en-US" sz="1500" b="1" i="0" u="none" strike="noStrike" cap="none">
+                <a:solidFill>
+                  <a:srgbClr val="334155"/>
+                </a:solidFill>
+                <a:latin typeface="Urbanist"/>
+                <a:ea typeface="Urbanist"/>
+                <a:cs typeface="Urbanist"/>
+                <a:sym typeface="Urbanist"/>
+              </a:rPr>
+              <a:t>RAG + Vector DB:</a:t>
+            </a:r>
+            <a:r>
+              <a:rPr lang="en-US" sz="1500" b="0" i="0" u="none" strike="noStrike" cap="none">
+                <a:solidFill>
+                  <a:srgbClr val="334155"/>
+                </a:solidFill>
+                <a:latin typeface="Urbanist"/>
+                <a:ea typeface="Urbanist"/>
+                <a:cs typeface="Urbanist"/>
+                <a:sym typeface="Urbanist"/>
+              </a:rPr>
+              <a:t> Kết nối nguồn chuẩn (Bộ LĐ-TB&amp;XH, Bộ GDDT, VietnamWorks, và d</a:t>
+            </a:r>
+            <a:r>
+              <a:rPr lang="en-US" sz="1500">
+                <a:solidFill>
+                  <a:srgbClr val="334155"/>
+                </a:solidFill>
+                <a:latin typeface="Urbanist"/>
+                <a:ea typeface="Urbanist"/>
+                <a:cs typeface="Urbanist"/>
+                <a:sym typeface="Urbanist"/>
+              </a:rPr>
+              <a:t>ữ liệu từ các tr</a:t>
+            </a:r>
+            <a:r>
+              <a:rPr lang="vi-VN" sz="1500">
+                <a:solidFill>
+                  <a:srgbClr val="334155"/>
+                </a:solidFill>
+                <a:latin typeface="Urbanist"/>
+                <a:ea typeface="Urbanist"/>
+                <a:cs typeface="Urbanist"/>
+                <a:sym typeface="Urbanist"/>
+              </a:rPr>
+              <a:t>ư</a:t>
+            </a:r>
+            <a:r>
+              <a:rPr lang="en-US" sz="1500">
+                <a:solidFill>
+                  <a:srgbClr val="334155"/>
+                </a:solidFill>
+                <a:latin typeface="Urbanist"/>
+                <a:ea typeface="Urbanist"/>
+                <a:cs typeface="Urbanist"/>
+                <a:sym typeface="Urbanist"/>
+              </a:rPr>
+              <a:t>ờng cao đẳng/đại học</a:t>
+            </a:r>
+            <a:r>
+              <a:rPr lang="en-US" sz="1500" b="0" i="0" u="none" strike="noStrike" cap="none">
+                <a:solidFill>
+                  <a:srgbClr val="334155"/>
+                </a:solidFill>
+                <a:latin typeface="Urbanist"/>
+                <a:ea typeface="Urbanist"/>
+                <a:cs typeface="Urbanist"/>
+                <a:sym typeface="Urbanist"/>
+              </a:rPr>
+              <a:t>).</a:t>
+            </a:r>
+            <a:endParaRPr/>
+          </a:p>
+        </p:txBody>
+      </p:sp>
+      <p:sp>
+        <p:nvSpPr>
+          <p:cNvPr id="99" name="Google Shape;99;p13"/>
+          <p:cNvSpPr txBox="1"/>
+          <p:nvPr/>
+        </p:nvSpPr>
+        <p:spPr>
+          <a:xfrm>
+            <a:off x="6724650" y="3552825"/>
+            <a:ext cx="38100" cy="266700"/>
+          </a:xfrm>
+          <a:prstGeom prst="rect">
+            <a:avLst/>
+          </a:prstGeom>
+          <a:noFill/>
+          <a:ln>
+            <a:noFill/>
+          </a:ln>
+        </p:spPr>
+        <p:txBody>
+          <a:bodyPr spcFirstLastPara="1" wrap="square" lIns="0" tIns="0" rIns="0" bIns="0" anchor="t" anchorCtr="0">
+            <a:spAutoFit/>
+          </a:bodyPr>
+          <a:lstStyle/>
+          <a:p>
+            <a:pPr marL="0" marR="0" lvl="0" indent="0" algn="l" rtl="0">
+              <a:spcBef>
+                <a:spcPts val="0"/>
+              </a:spcBef>
+              <a:spcAft>
+                <a:spcPts val="0"/>
+              </a:spcAft>
+              <a:buNone/>
+            </a:pPr>
+            <a:r>
+              <a:rPr lang="en-US" sz="1500" b="0" i="0" u="none" strike="noStrike" cap="none">
+                <a:solidFill>
+                  <a:srgbClr val="334155"/>
+                </a:solidFill>
+                <a:latin typeface="Urbanist"/>
+                <a:ea typeface="Urbanist"/>
+                <a:cs typeface="Urbanist"/>
+                <a:sym typeface="Urbanist"/>
+              </a:rPr>
+              <a:t>•</a:t>
+            </a:r>
+            <a:endParaRPr/>
+          </a:p>
+        </p:txBody>
+      </p:sp>
+      <p:sp>
+        <p:nvSpPr>
+          <p:cNvPr id="100" name="Google Shape;100;p13"/>
+          <p:cNvSpPr txBox="1"/>
+          <p:nvPr/>
+        </p:nvSpPr>
+        <p:spPr>
+          <a:xfrm>
+            <a:off x="6800850" y="4181475"/>
+            <a:ext cx="4143375" cy="533400"/>
+          </a:xfrm>
+          <a:prstGeom prst="rect">
+            <a:avLst/>
+          </a:prstGeom>
+          <a:noFill/>
+          <a:ln>
+            <a:noFill/>
+          </a:ln>
+        </p:spPr>
+        <p:txBody>
+          <a:bodyPr spcFirstLastPara="1" wrap="square" lIns="38100" tIns="0" rIns="0" bIns="0" anchor="t" anchorCtr="0">
+            <a:spAutoFit/>
+          </a:bodyPr>
+          <a:lstStyle/>
+          <a:p>
+            <a:pPr marL="0" marR="0" lvl="0" indent="0" algn="l" rtl="0">
+              <a:lnSpc>
+                <a:spcPct val="140000"/>
+              </a:lnSpc>
+              <a:spcBef>
+                <a:spcPts val="0"/>
+              </a:spcBef>
+              <a:spcAft>
+                <a:spcPts val="0"/>
+              </a:spcAft>
+              <a:buNone/>
+            </a:pPr>
+            <a:r>
+              <a:rPr lang="en-US" sz="1500" b="1" i="0" u="none" strike="noStrike" cap="none">
+                <a:solidFill>
+                  <a:srgbClr val="334155"/>
+                </a:solidFill>
+                <a:latin typeface="Urbanist"/>
+                <a:ea typeface="Urbanist"/>
+                <a:cs typeface="Urbanist"/>
+                <a:sym typeface="Urbanist"/>
+              </a:rPr>
+              <a:t>Temperature ≈ 0:</a:t>
+            </a:r>
+            <a:r>
+              <a:rPr lang="en-US" sz="1500" b="0" i="0" u="none" strike="noStrike" cap="none">
+                <a:solidFill>
+                  <a:srgbClr val="334155"/>
+                </a:solidFill>
+                <a:latin typeface="Urbanist"/>
+                <a:ea typeface="Urbanist"/>
+                <a:cs typeface="Urbanist"/>
+                <a:sym typeface="Urbanist"/>
+              </a:rPr>
+              <a:t> Đảm bảo câu trả lời chính xác, nhất quán.</a:t>
+            </a:r>
+            <a:endParaRPr/>
+          </a:p>
+        </p:txBody>
+      </p:sp>
+      <p:sp>
+        <p:nvSpPr>
+          <p:cNvPr id="101" name="Google Shape;101;p13"/>
+          <p:cNvSpPr txBox="1"/>
+          <p:nvPr/>
+        </p:nvSpPr>
+        <p:spPr>
+          <a:xfrm>
+            <a:off x="6724650" y="4181475"/>
+            <a:ext cx="38100" cy="266700"/>
+          </a:xfrm>
+          <a:prstGeom prst="rect">
+            <a:avLst/>
+          </a:prstGeom>
+          <a:noFill/>
+          <a:ln>
+            <a:noFill/>
+          </a:ln>
+        </p:spPr>
+        <p:txBody>
+          <a:bodyPr spcFirstLastPara="1" wrap="square" lIns="0" tIns="0" rIns="0" bIns="0" anchor="t" anchorCtr="0">
+            <a:spAutoFit/>
+          </a:bodyPr>
+          <a:lstStyle/>
+          <a:p>
+            <a:pPr marL="0" marR="0" lvl="0" indent="0" algn="l" rtl="0">
+              <a:spcBef>
+                <a:spcPts val="0"/>
+              </a:spcBef>
+              <a:spcAft>
+                <a:spcPts val="0"/>
+              </a:spcAft>
+              <a:buNone/>
+            </a:pPr>
+            <a:r>
+              <a:rPr lang="en-US" sz="1500" b="0" i="0" u="none" strike="noStrike" cap="none">
+                <a:solidFill>
+                  <a:srgbClr val="334155"/>
+                </a:solidFill>
+                <a:latin typeface="Urbanist"/>
+                <a:ea typeface="Urbanist"/>
+                <a:cs typeface="Urbanist"/>
+                <a:sym typeface="Urbanist"/>
+              </a:rPr>
+              <a:t>•</a:t>
+            </a:r>
+            <a:endParaRPr/>
+          </a:p>
+        </p:txBody>
+      </p:sp>
     </p:spTree>
   </p:cSld>
   <p:clrMapOvr>
@@ -12840,6 +13490,3274 @@
 </file>
 
 <file path=ppt/slides/slide11.xml><?xml version="1.0" encoding="utf-8"?>
+<p:sld xmlns:a="http://schemas.openxmlformats.org/drawingml/2006/main" xmlns:r="http://schemas.openxmlformats.org/officeDocument/2006/relationships" xmlns:p="http://schemas.openxmlformats.org/presentationml/2006/main">
+  <p:cSld>
+    <p:spTree>
+      <p:nvGrpSpPr>
+        <p:cNvPr id="1" name="Shape 106"/>
+        <p:cNvGrpSpPr/>
+        <p:nvPr/>
+      </p:nvGrpSpPr>
+      <p:grpSpPr>
+        <a:xfrm>
+          <a:off x="0" y="0"/>
+          <a:ext cx="0" cy="0"/>
+          <a:chOff x="0" y="0"/>
+          <a:chExt cx="0" cy="0"/>
+        </a:xfrm>
+      </p:grpSpPr>
+      <p:pic>
+        <p:nvPicPr>
+          <p:cNvPr id="107" name="Google Shape;107;p14" descr="image.png"/>
+          <p:cNvPicPr preferRelativeResize="0"/>
+          <p:nvPr/>
+        </p:nvPicPr>
+        <p:blipFill rotWithShape="1">
+          <a:blip r:embed="rId3">
+            <a:alphaModFix/>
+          </a:blip>
+          <a:srcRect/>
+          <a:stretch/>
+        </p:blipFill>
+        <p:spPr>
+          <a:xfrm>
+            <a:off x="0" y="0"/>
+            <a:ext cx="12192000" cy="6858000"/>
+          </a:xfrm>
+          <a:prstGeom prst="rect">
+            <a:avLst/>
+          </a:prstGeom>
+          <a:noFill/>
+          <a:ln>
+            <a:noFill/>
+          </a:ln>
+        </p:spPr>
+      </p:pic>
+      <p:pic>
+        <p:nvPicPr>
+          <p:cNvPr id="108" name="Google Shape;108;p14" descr="image.png"/>
+          <p:cNvPicPr preferRelativeResize="0"/>
+          <p:nvPr/>
+        </p:nvPicPr>
+        <p:blipFill rotWithShape="1">
+          <a:blip r:embed="rId4">
+            <a:alphaModFix/>
+          </a:blip>
+          <a:srcRect/>
+          <a:stretch/>
+        </p:blipFill>
+        <p:spPr>
+          <a:xfrm>
+            <a:off x="1047749" y="2181225"/>
+            <a:ext cx="4429685" cy="3257550"/>
+          </a:xfrm>
+          <a:prstGeom prst="rect">
+            <a:avLst/>
+          </a:prstGeom>
+          <a:noFill/>
+          <a:ln>
+            <a:noFill/>
+          </a:ln>
+        </p:spPr>
+      </p:pic>
+      <p:pic>
+        <p:nvPicPr>
+          <p:cNvPr id="109" name="Google Shape;109;p14" descr="image.png"/>
+          <p:cNvPicPr preferRelativeResize="0"/>
+          <p:nvPr/>
+        </p:nvPicPr>
+        <p:blipFill rotWithShape="1">
+          <a:blip r:embed="rId5">
+            <a:alphaModFix/>
+          </a:blip>
+          <a:srcRect/>
+          <a:stretch/>
+        </p:blipFill>
+        <p:spPr>
+          <a:xfrm>
+            <a:off x="6714568" y="2181225"/>
+            <a:ext cx="5287492" cy="3219450"/>
+          </a:xfrm>
+          <a:prstGeom prst="rect">
+            <a:avLst/>
+          </a:prstGeom>
+          <a:noFill/>
+          <a:ln>
+            <a:noFill/>
+          </a:ln>
+        </p:spPr>
+      </p:pic>
+      <p:sp>
+        <p:nvSpPr>
+          <p:cNvPr id="111" name="Google Shape;111;p14"/>
+          <p:cNvSpPr/>
+          <p:nvPr/>
+        </p:nvSpPr>
+        <p:spPr>
+          <a:xfrm>
+            <a:off x="571500" y="6467475"/>
+            <a:ext cx="11049000" cy="9525"/>
+          </a:xfrm>
+          <a:prstGeom prst="rect">
+            <a:avLst/>
+          </a:prstGeom>
+          <a:solidFill>
+            <a:srgbClr val="FFFFFF"/>
+          </a:solidFill>
+          <a:ln>
+            <a:noFill/>
+          </a:ln>
+        </p:spPr>
+        <p:txBody>
+          <a:bodyPr spcFirstLastPara="1" wrap="square" lIns="91425" tIns="45700" rIns="91425" bIns="45700" anchor="ctr" anchorCtr="0">
+            <a:noAutofit/>
+          </a:bodyPr>
+          <a:lstStyle/>
+          <a:p>
+            <a:pPr marL="0" marR="0" lvl="0" indent="0" algn="ctr" rtl="0">
+              <a:spcBef>
+                <a:spcPts val="0"/>
+              </a:spcBef>
+              <a:spcAft>
+                <a:spcPts val="0"/>
+              </a:spcAft>
+              <a:buNone/>
+            </a:pPr>
+            <a:endParaRPr sz="1800" b="0" i="0" u="none" strike="noStrike" cap="none">
+              <a:solidFill>
+                <a:schemeClr val="dk1"/>
+              </a:solidFill>
+              <a:latin typeface="Calibri"/>
+              <a:ea typeface="Calibri"/>
+              <a:cs typeface="Calibri"/>
+              <a:sym typeface="Calibri"/>
+            </a:endParaRPr>
+          </a:p>
+        </p:txBody>
+      </p:sp>
+      <p:sp>
+        <p:nvSpPr>
+          <p:cNvPr id="112" name="Google Shape;112;p14"/>
+          <p:cNvSpPr txBox="1"/>
+          <p:nvPr/>
+        </p:nvSpPr>
+        <p:spPr>
+          <a:xfrm>
+            <a:off x="571500" y="381000"/>
+            <a:ext cx="11601450" cy="485775"/>
+          </a:xfrm>
+          <a:prstGeom prst="rect">
+            <a:avLst/>
+          </a:prstGeom>
+          <a:noFill/>
+          <a:ln>
+            <a:noFill/>
+          </a:ln>
+        </p:spPr>
+        <p:txBody>
+          <a:bodyPr spcFirstLastPara="1" wrap="square" lIns="0" tIns="0" rIns="0" bIns="0" anchor="t" anchorCtr="0">
+            <a:spAutoFit/>
+          </a:bodyPr>
+          <a:lstStyle/>
+          <a:p>
+            <a:pPr marL="0" marR="0" lvl="0" indent="0" algn="l" rtl="0">
+              <a:spcBef>
+                <a:spcPts val="0"/>
+              </a:spcBef>
+              <a:spcAft>
+                <a:spcPts val="0"/>
+              </a:spcAft>
+              <a:buNone/>
+            </a:pPr>
+            <a:r>
+              <a:rPr lang="en-US" sz="3150" b="1" i="0" u="none" strike="noStrike" cap="none">
+                <a:solidFill>
+                  <a:srgbClr val="FFFFFF"/>
+                </a:solidFill>
+                <a:latin typeface="Urbanist"/>
+                <a:ea typeface="Urbanist"/>
+                <a:cs typeface="Urbanist"/>
+                <a:sym typeface="Urbanist"/>
+              </a:rPr>
+              <a:t>02. Thiên vị (Bias/Fairness)</a:t>
+            </a:r>
+            <a:endParaRPr/>
+          </a:p>
+        </p:txBody>
+      </p:sp>
+      <p:sp>
+        <p:nvSpPr>
+          <p:cNvPr id="113" name="Google Shape;113;p14"/>
+          <p:cNvSpPr txBox="1"/>
+          <p:nvPr/>
+        </p:nvSpPr>
+        <p:spPr>
+          <a:xfrm>
+            <a:off x="1047750" y="1533525"/>
+            <a:ext cx="10096500" cy="361950"/>
+          </a:xfrm>
+          <a:prstGeom prst="rect">
+            <a:avLst/>
+          </a:prstGeom>
+          <a:noFill/>
+          <a:ln>
+            <a:noFill/>
+          </a:ln>
+        </p:spPr>
+        <p:txBody>
+          <a:bodyPr spcFirstLastPara="1" wrap="square" lIns="0" tIns="0" rIns="0" bIns="0" anchor="t" anchorCtr="0">
+            <a:spAutoFit/>
+          </a:bodyPr>
+          <a:lstStyle/>
+          <a:p>
+            <a:pPr marL="0" marR="0" lvl="0" indent="0" algn="l" rtl="0">
+              <a:spcBef>
+                <a:spcPts val="0"/>
+              </a:spcBef>
+              <a:spcAft>
+                <a:spcPts val="0"/>
+              </a:spcAft>
+              <a:buNone/>
+            </a:pPr>
+            <a:r>
+              <a:rPr lang="en-US" sz="2400" b="1" i="0" u="none" strike="noStrike" cap="none">
+                <a:solidFill>
+                  <a:srgbClr val="0EA5E9"/>
+                </a:solidFill>
+                <a:latin typeface="Urbanist"/>
+                <a:ea typeface="Urbanist"/>
+                <a:cs typeface="Urbanist"/>
+                <a:sym typeface="Urbanist"/>
+              </a:rPr>
+              <a:t>Công bằng cơ hội - Không phân biệt đối xử</a:t>
+            </a:r>
+            <a:endParaRPr/>
+          </a:p>
+        </p:txBody>
+      </p:sp>
+      <p:sp>
+        <p:nvSpPr>
+          <p:cNvPr id="115" name="Google Shape;115;p14"/>
+          <p:cNvSpPr txBox="1"/>
+          <p:nvPr/>
+        </p:nvSpPr>
+        <p:spPr>
+          <a:xfrm>
+            <a:off x="1333500" y="2419350"/>
+            <a:ext cx="4248946" cy="276225"/>
+          </a:xfrm>
+          <a:prstGeom prst="rect">
+            <a:avLst/>
+          </a:prstGeom>
+          <a:noFill/>
+          <a:ln>
+            <a:noFill/>
+          </a:ln>
+        </p:spPr>
+        <p:txBody>
+          <a:bodyPr spcFirstLastPara="1" wrap="square" lIns="0" tIns="0" rIns="0" bIns="0" anchor="ctr" anchorCtr="0">
+            <a:spAutoFit/>
+          </a:bodyPr>
+          <a:lstStyle/>
+          <a:p>
+            <a:pPr marL="0" marR="0" lvl="0" indent="0" algn="l" rtl="0">
+              <a:spcBef>
+                <a:spcPts val="0"/>
+              </a:spcBef>
+              <a:spcAft>
+                <a:spcPts val="0"/>
+              </a:spcAft>
+              <a:buNone/>
+            </a:pPr>
+            <a:r>
+              <a:rPr lang="en-US" sz="1800" b="1" i="0" u="none" strike="noStrike" cap="none">
+                <a:solidFill>
+                  <a:srgbClr val="B91C1C"/>
+                </a:solidFill>
+                <a:latin typeface="Urbanist"/>
+                <a:ea typeface="Urbanist"/>
+                <a:cs typeface="Urbanist"/>
+                <a:sym typeface="Urbanist"/>
+              </a:rPr>
+              <a:t>Rủi ro Định kiến</a:t>
+            </a:r>
+            <a:endParaRPr/>
+          </a:p>
+        </p:txBody>
+      </p:sp>
+      <p:sp>
+        <p:nvSpPr>
+          <p:cNvPr id="116" name="Google Shape;116;p14"/>
+          <p:cNvSpPr txBox="1"/>
+          <p:nvPr/>
+        </p:nvSpPr>
+        <p:spPr>
+          <a:xfrm>
+            <a:off x="1333500" y="2924175"/>
+            <a:ext cx="4046615" cy="1292662"/>
+          </a:xfrm>
+          <a:prstGeom prst="rect">
+            <a:avLst/>
+          </a:prstGeom>
+          <a:noFill/>
+          <a:ln>
+            <a:noFill/>
+          </a:ln>
+        </p:spPr>
+        <p:txBody>
+          <a:bodyPr spcFirstLastPara="1" wrap="square" lIns="0" tIns="0" rIns="0" bIns="0" anchor="t" anchorCtr="0">
+            <a:spAutoFit/>
+          </a:bodyPr>
+          <a:lstStyle/>
+          <a:p>
+            <a:pPr marL="0" marR="0" lvl="0" indent="0" algn="l" rtl="0">
+              <a:lnSpc>
+                <a:spcPct val="140000"/>
+              </a:lnSpc>
+              <a:spcBef>
+                <a:spcPts val="0"/>
+              </a:spcBef>
+              <a:spcAft>
+                <a:spcPts val="0"/>
+              </a:spcAft>
+              <a:buNone/>
+            </a:pPr>
+            <a:r>
+              <a:rPr lang="en-US" sz="1500" b="0" i="0" u="none" strike="noStrike" cap="none">
+                <a:solidFill>
+                  <a:srgbClr val="334155"/>
+                </a:solidFill>
+                <a:latin typeface="Urbanist"/>
+                <a:ea typeface="Urbanist"/>
+                <a:cs typeface="Urbanist"/>
+                <a:sym typeface="Urbanist"/>
+              </a:rPr>
+              <a:t>Tự động hướng Nam vào STEM(Khoa học, công nghệ, kỹ thật, Toán học), Nữ vào Sư phạm. Chỉ gợi ý trường phí cao, bỏ qua các lựa chọn vùng xa.</a:t>
+            </a:r>
+            <a:endParaRPr/>
+          </a:p>
+        </p:txBody>
+      </p:sp>
+      <p:sp>
+        <p:nvSpPr>
+          <p:cNvPr id="117" name="Google Shape;117;p14"/>
+          <p:cNvSpPr txBox="1"/>
+          <p:nvPr/>
+        </p:nvSpPr>
+        <p:spPr>
+          <a:xfrm>
+            <a:off x="6968884" y="2419350"/>
+            <a:ext cx="5071752" cy="276225"/>
+          </a:xfrm>
+          <a:prstGeom prst="rect">
+            <a:avLst/>
+          </a:prstGeom>
+          <a:noFill/>
+          <a:ln>
+            <a:noFill/>
+          </a:ln>
+        </p:spPr>
+        <p:txBody>
+          <a:bodyPr spcFirstLastPara="1" wrap="square" lIns="0" tIns="0" rIns="0" bIns="0" anchor="ctr" anchorCtr="0">
+            <a:spAutoFit/>
+          </a:bodyPr>
+          <a:lstStyle/>
+          <a:p>
+            <a:pPr marL="0" marR="0" lvl="0" indent="0" algn="l" rtl="0">
+              <a:spcBef>
+                <a:spcPts val="0"/>
+              </a:spcBef>
+              <a:spcAft>
+                <a:spcPts val="0"/>
+              </a:spcAft>
+              <a:buNone/>
+            </a:pPr>
+            <a:r>
+              <a:rPr lang="en-US" sz="1800" b="1" i="0" u="none" strike="noStrike" cap="none">
+                <a:solidFill>
+                  <a:srgbClr val="0369A1"/>
+                </a:solidFill>
+                <a:latin typeface="Urbanist"/>
+                <a:ea typeface="Urbanist"/>
+                <a:cs typeface="Urbanist"/>
+                <a:sym typeface="Urbanist"/>
+              </a:rPr>
+              <a:t>Giải pháp kỹ thuật: De-biasing Prompting</a:t>
+            </a:r>
+            <a:endParaRPr/>
+          </a:p>
+        </p:txBody>
+      </p:sp>
+      <p:sp>
+        <p:nvSpPr>
+          <p:cNvPr id="118" name="Google Shape;118;p14"/>
+          <p:cNvSpPr txBox="1"/>
+          <p:nvPr/>
+        </p:nvSpPr>
+        <p:spPr>
+          <a:xfrm>
+            <a:off x="6933695" y="2924175"/>
+            <a:ext cx="4830240" cy="969496"/>
+          </a:xfrm>
+          <a:prstGeom prst="rect">
+            <a:avLst/>
+          </a:prstGeom>
+          <a:noFill/>
+          <a:ln>
+            <a:noFill/>
+          </a:ln>
+        </p:spPr>
+        <p:txBody>
+          <a:bodyPr spcFirstLastPara="1" wrap="square" lIns="0" tIns="0" rIns="0" bIns="0" anchor="t" anchorCtr="0">
+            <a:spAutoFit/>
+          </a:bodyPr>
+          <a:lstStyle/>
+          <a:p>
+            <a:pPr marL="0" marR="0" lvl="0" indent="0" algn="l" rtl="0">
+              <a:lnSpc>
+                <a:spcPct val="140000"/>
+              </a:lnSpc>
+              <a:spcBef>
+                <a:spcPts val="0"/>
+              </a:spcBef>
+              <a:spcAft>
+                <a:spcPts val="0"/>
+              </a:spcAft>
+              <a:buNone/>
+            </a:pPr>
+            <a:r>
+              <a:rPr lang="en-US" sz="1500" b="0" i="0" u="none" strike="noStrike" cap="none">
+                <a:solidFill>
+                  <a:srgbClr val="334155"/>
+                </a:solidFill>
+                <a:latin typeface="Urbanist"/>
+                <a:ea typeface="Urbanist"/>
+                <a:cs typeface="Urbanist"/>
+                <a:sym typeface="Urbanist"/>
+              </a:rPr>
+              <a:t>Sử dụng </a:t>
+            </a:r>
+            <a:r>
+              <a:rPr lang="en-US" sz="1500" b="1" i="0" u="none" strike="noStrike" cap="none">
+                <a:solidFill>
+                  <a:srgbClr val="334155"/>
+                </a:solidFill>
+                <a:latin typeface="Urbanist"/>
+                <a:ea typeface="Urbanist"/>
+                <a:cs typeface="Urbanist"/>
+                <a:sym typeface="Urbanist"/>
+              </a:rPr>
+              <a:t>System Prompt</a:t>
+            </a:r>
+            <a:r>
+              <a:rPr lang="en-US" sz="1500" b="0" i="0" u="none" strike="noStrike" cap="none">
+                <a:solidFill>
+                  <a:srgbClr val="334155"/>
+                </a:solidFill>
+                <a:latin typeface="Urbanist"/>
+                <a:ea typeface="Urbanist"/>
+                <a:cs typeface="Urbanist"/>
+                <a:sym typeface="Urbanist"/>
+              </a:rPr>
+              <a:t> nghiêm ngặt: </a:t>
+            </a:r>
+            <a:r>
+              <a:rPr lang="en-US" sz="1500" b="0" i="1" u="none" strike="noStrike" cap="none">
+                <a:solidFill>
+                  <a:srgbClr val="334155"/>
+                </a:solidFill>
+                <a:latin typeface="Urbanist"/>
+                <a:ea typeface="Urbanist"/>
+                <a:cs typeface="Urbanist"/>
+                <a:sym typeface="Urbanist"/>
+              </a:rPr>
+              <a:t>"Bạn là chuyên gia trung lập. Tuyệt đối không gợi ý dựa trên định kiến giới tính, vùng miền."</a:t>
+            </a:r>
+            <a:endParaRPr/>
+          </a:p>
+        </p:txBody>
+      </p:sp>
+    </p:spTree>
+  </p:cSld>
+  <p:clrMapOvr>
+    <a:masterClrMapping/>
+  </p:clrMapOvr>
+</p:sld>
+</file>
+
+<file path=ppt/slides/slide12.xml><?xml version="1.0" encoding="utf-8"?>
+<p:sld xmlns:a="http://schemas.openxmlformats.org/drawingml/2006/main" xmlns:r="http://schemas.openxmlformats.org/officeDocument/2006/relationships" xmlns:p="http://schemas.openxmlformats.org/presentationml/2006/main">
+  <p:cSld>
+    <p:spTree>
+      <p:nvGrpSpPr>
+        <p:cNvPr id="1" name="Shape 122"/>
+        <p:cNvGrpSpPr/>
+        <p:nvPr/>
+      </p:nvGrpSpPr>
+      <p:grpSpPr>
+        <a:xfrm>
+          <a:off x="0" y="0"/>
+          <a:ext cx="0" cy="0"/>
+          <a:chOff x="0" y="0"/>
+          <a:chExt cx="0" cy="0"/>
+        </a:xfrm>
+      </p:grpSpPr>
+      <p:pic>
+        <p:nvPicPr>
+          <p:cNvPr id="123" name="Google Shape;123;p15" descr="image.png"/>
+          <p:cNvPicPr preferRelativeResize="0"/>
+          <p:nvPr/>
+        </p:nvPicPr>
+        <p:blipFill rotWithShape="1">
+          <a:blip r:embed="rId3">
+            <a:alphaModFix/>
+          </a:blip>
+          <a:srcRect/>
+          <a:stretch/>
+        </p:blipFill>
+        <p:spPr>
+          <a:xfrm>
+            <a:off x="0" y="0"/>
+            <a:ext cx="12192000" cy="6858000"/>
+          </a:xfrm>
+          <a:prstGeom prst="rect">
+            <a:avLst/>
+          </a:prstGeom>
+          <a:noFill/>
+          <a:ln>
+            <a:noFill/>
+          </a:ln>
+        </p:spPr>
+      </p:pic>
+      <p:pic>
+        <p:nvPicPr>
+          <p:cNvPr id="124" name="Google Shape;124;p15" descr="image.png"/>
+          <p:cNvPicPr preferRelativeResize="0"/>
+          <p:nvPr/>
+        </p:nvPicPr>
+        <p:blipFill rotWithShape="1">
+          <a:blip r:embed="rId4">
+            <a:alphaModFix/>
+          </a:blip>
+          <a:srcRect/>
+          <a:stretch/>
+        </p:blipFill>
+        <p:spPr>
+          <a:xfrm>
+            <a:off x="4769224" y="2175902"/>
+            <a:ext cx="3238500" cy="3819525"/>
+          </a:xfrm>
+          <a:prstGeom prst="rect">
+            <a:avLst/>
+          </a:prstGeom>
+          <a:noFill/>
+          <a:ln>
+            <a:noFill/>
+          </a:ln>
+        </p:spPr>
+      </p:pic>
+      <p:pic>
+        <p:nvPicPr>
+          <p:cNvPr id="125" name="Google Shape;125;p15" descr="image.png"/>
+          <p:cNvPicPr preferRelativeResize="0"/>
+          <p:nvPr/>
+        </p:nvPicPr>
+        <p:blipFill rotWithShape="1">
+          <a:blip r:embed="rId4">
+            <a:alphaModFix/>
+          </a:blip>
+          <a:srcRect/>
+          <a:stretch/>
+        </p:blipFill>
+        <p:spPr>
+          <a:xfrm>
+            <a:off x="8382000" y="2175902"/>
+            <a:ext cx="3238500" cy="3819525"/>
+          </a:xfrm>
+          <a:prstGeom prst="rect">
+            <a:avLst/>
+          </a:prstGeom>
+          <a:noFill/>
+          <a:ln>
+            <a:noFill/>
+          </a:ln>
+        </p:spPr>
+      </p:pic>
+      <p:sp>
+        <p:nvSpPr>
+          <p:cNvPr id="128" name="Google Shape;128;p15"/>
+          <p:cNvSpPr/>
+          <p:nvPr/>
+        </p:nvSpPr>
+        <p:spPr>
+          <a:xfrm>
+            <a:off x="571500" y="6467475"/>
+            <a:ext cx="11049000" cy="9525"/>
+          </a:xfrm>
+          <a:prstGeom prst="rect">
+            <a:avLst/>
+          </a:prstGeom>
+          <a:solidFill>
+            <a:srgbClr val="FFFFFF"/>
+          </a:solidFill>
+          <a:ln>
+            <a:noFill/>
+          </a:ln>
+        </p:spPr>
+        <p:txBody>
+          <a:bodyPr spcFirstLastPara="1" wrap="square" lIns="91425" tIns="45700" rIns="91425" bIns="45700" anchor="ctr" anchorCtr="0">
+            <a:noAutofit/>
+          </a:bodyPr>
+          <a:lstStyle/>
+          <a:p>
+            <a:pPr marL="0" marR="0" lvl="0" indent="0" algn="ctr" rtl="0">
+              <a:spcBef>
+                <a:spcPts val="0"/>
+              </a:spcBef>
+              <a:spcAft>
+                <a:spcPts val="0"/>
+              </a:spcAft>
+              <a:buNone/>
+            </a:pPr>
+            <a:endParaRPr sz="1800" b="0" i="0" u="none" strike="noStrike" cap="none">
+              <a:solidFill>
+                <a:schemeClr val="dk1"/>
+              </a:solidFill>
+              <a:latin typeface="Calibri"/>
+              <a:ea typeface="Calibri"/>
+              <a:cs typeface="Calibri"/>
+              <a:sym typeface="Calibri"/>
+            </a:endParaRPr>
+          </a:p>
+        </p:txBody>
+      </p:sp>
+      <p:sp>
+        <p:nvSpPr>
+          <p:cNvPr id="129" name="Google Shape;129;p15"/>
+          <p:cNvSpPr txBox="1"/>
+          <p:nvPr/>
+        </p:nvSpPr>
+        <p:spPr>
+          <a:xfrm>
+            <a:off x="571500" y="381000"/>
+            <a:ext cx="11601450" cy="485775"/>
+          </a:xfrm>
+          <a:prstGeom prst="rect">
+            <a:avLst/>
+          </a:prstGeom>
+          <a:noFill/>
+          <a:ln>
+            <a:noFill/>
+          </a:ln>
+        </p:spPr>
+        <p:txBody>
+          <a:bodyPr spcFirstLastPara="1" wrap="square" lIns="0" tIns="0" rIns="0" bIns="0" anchor="t" anchorCtr="0">
+            <a:spAutoFit/>
+          </a:bodyPr>
+          <a:lstStyle/>
+          <a:p>
+            <a:pPr marL="0" marR="0" lvl="0" indent="0" algn="l" rtl="0">
+              <a:spcBef>
+                <a:spcPts val="0"/>
+              </a:spcBef>
+              <a:spcAft>
+                <a:spcPts val="0"/>
+              </a:spcAft>
+              <a:buNone/>
+            </a:pPr>
+            <a:r>
+              <a:rPr lang="en-US" sz="3150" b="1" i="0" u="none" strike="noStrike" cap="none">
+                <a:solidFill>
+                  <a:srgbClr val="FFFFFF"/>
+                </a:solidFill>
+                <a:latin typeface="Urbanist"/>
+                <a:ea typeface="Urbanist"/>
+                <a:cs typeface="Urbanist"/>
+                <a:sym typeface="Urbanist"/>
+              </a:rPr>
+              <a:t>03. Chống chịu &amp; Bảo mật (Robustness)</a:t>
+            </a:r>
+            <a:endParaRPr/>
+          </a:p>
+        </p:txBody>
+      </p:sp>
+      <p:sp>
+        <p:nvSpPr>
+          <p:cNvPr id="130" name="Google Shape;130;p15"/>
+          <p:cNvSpPr txBox="1"/>
+          <p:nvPr/>
+        </p:nvSpPr>
+        <p:spPr>
+          <a:xfrm>
+            <a:off x="1047750" y="1533525"/>
+            <a:ext cx="10096500" cy="361950"/>
+          </a:xfrm>
+          <a:prstGeom prst="rect">
+            <a:avLst/>
+          </a:prstGeom>
+          <a:noFill/>
+          <a:ln>
+            <a:noFill/>
+          </a:ln>
+        </p:spPr>
+        <p:txBody>
+          <a:bodyPr spcFirstLastPara="1" wrap="square" lIns="0" tIns="0" rIns="0" bIns="0" anchor="t" anchorCtr="0">
+            <a:spAutoFit/>
+          </a:bodyPr>
+          <a:lstStyle/>
+          <a:p>
+            <a:pPr marL="0" marR="0" lvl="0" indent="0" algn="l" rtl="0">
+              <a:spcBef>
+                <a:spcPts val="0"/>
+              </a:spcBef>
+              <a:spcAft>
+                <a:spcPts val="0"/>
+              </a:spcAft>
+              <a:buNone/>
+            </a:pPr>
+            <a:r>
+              <a:rPr lang="en-US" sz="2400" b="1" i="0" u="none" strike="noStrike" cap="none">
+                <a:solidFill>
+                  <a:srgbClr val="0EA5E9"/>
+                </a:solidFill>
+                <a:latin typeface="Urbanist"/>
+                <a:ea typeface="Urbanist"/>
+                <a:cs typeface="Urbanist"/>
+                <a:sym typeface="Urbanist"/>
+              </a:rPr>
+              <a:t>Vận hành ổn định trước tấn công cố ý</a:t>
+            </a:r>
+            <a:endParaRPr/>
+          </a:p>
+        </p:txBody>
+      </p:sp>
+      <p:pic>
+        <p:nvPicPr>
+          <p:cNvPr id="131" name="Google Shape;131;p15" descr="image.png"/>
+          <p:cNvPicPr preferRelativeResize="0"/>
+          <p:nvPr/>
+        </p:nvPicPr>
+        <p:blipFill rotWithShape="1">
+          <a:blip r:embed="rId5">
+            <a:alphaModFix/>
+          </a:blip>
+          <a:srcRect/>
+          <a:stretch/>
+        </p:blipFill>
+        <p:spPr>
+          <a:xfrm>
+            <a:off x="5064499" y="2471177"/>
+            <a:ext cx="2647950" cy="381000"/>
+          </a:xfrm>
+          <a:prstGeom prst="rect">
+            <a:avLst/>
+          </a:prstGeom>
+          <a:noFill/>
+          <a:ln>
+            <a:noFill/>
+          </a:ln>
+        </p:spPr>
+      </p:pic>
+      <p:sp>
+        <p:nvSpPr>
+          <p:cNvPr id="132" name="Google Shape;132;p15"/>
+          <p:cNvSpPr txBox="1"/>
+          <p:nvPr/>
+        </p:nvSpPr>
+        <p:spPr>
+          <a:xfrm>
+            <a:off x="5064499" y="2995052"/>
+            <a:ext cx="2780347" cy="276225"/>
+          </a:xfrm>
+          <a:prstGeom prst="rect">
+            <a:avLst/>
+          </a:prstGeom>
+          <a:noFill/>
+          <a:ln>
+            <a:noFill/>
+          </a:ln>
+        </p:spPr>
+        <p:txBody>
+          <a:bodyPr spcFirstLastPara="1" wrap="square" lIns="0" tIns="0" rIns="0" bIns="0" anchor="ctr" anchorCtr="0">
+            <a:spAutoFit/>
+          </a:bodyPr>
+          <a:lstStyle/>
+          <a:p>
+            <a:pPr marL="0" marR="0" lvl="0" indent="0" algn="l" rtl="0">
+              <a:spcBef>
+                <a:spcPts val="0"/>
+              </a:spcBef>
+              <a:spcAft>
+                <a:spcPts val="0"/>
+              </a:spcAft>
+              <a:buNone/>
+            </a:pPr>
+            <a:r>
+              <a:rPr lang="en-US" sz="1800" b="1" i="0" u="none" strike="noStrike" cap="none">
+                <a:solidFill>
+                  <a:srgbClr val="0F172A"/>
+                </a:solidFill>
+                <a:latin typeface="Urbanist"/>
+                <a:ea typeface="Urbanist"/>
+                <a:cs typeface="Urbanist"/>
+                <a:sym typeface="Urbanist"/>
+              </a:rPr>
+              <a:t>Guardrails</a:t>
+            </a:r>
+            <a:endParaRPr/>
+          </a:p>
+        </p:txBody>
+      </p:sp>
+      <p:sp>
+        <p:nvSpPr>
+          <p:cNvPr id="133" name="Google Shape;133;p15"/>
+          <p:cNvSpPr txBox="1"/>
+          <p:nvPr/>
+        </p:nvSpPr>
+        <p:spPr>
+          <a:xfrm>
+            <a:off x="5064499" y="3833252"/>
+            <a:ext cx="2647950" cy="800100"/>
+          </a:xfrm>
+          <a:prstGeom prst="rect">
+            <a:avLst/>
+          </a:prstGeom>
+          <a:noFill/>
+          <a:ln>
+            <a:noFill/>
+          </a:ln>
+        </p:spPr>
+        <p:txBody>
+          <a:bodyPr spcFirstLastPara="1" wrap="square" lIns="0" tIns="0" rIns="0" bIns="0" anchor="t" anchorCtr="0">
+            <a:spAutoFit/>
+          </a:bodyPr>
+          <a:lstStyle/>
+          <a:p>
+            <a:pPr marL="0" marR="0" lvl="0" indent="0" algn="l" rtl="0">
+              <a:lnSpc>
+                <a:spcPct val="140000"/>
+              </a:lnSpc>
+              <a:spcBef>
+                <a:spcPts val="0"/>
+              </a:spcBef>
+              <a:spcAft>
+                <a:spcPts val="0"/>
+              </a:spcAft>
+              <a:buNone/>
+            </a:pPr>
+            <a:r>
+              <a:rPr lang="en-US" sz="1500" b="0" i="0" u="none" strike="noStrike" cap="none">
+                <a:solidFill>
+                  <a:srgbClr val="334155"/>
+                </a:solidFill>
+                <a:latin typeface="Urbanist"/>
+                <a:ea typeface="Urbanist"/>
+                <a:cs typeface="Urbanist"/>
+                <a:sym typeface="Urbanist"/>
+              </a:rPr>
+              <a:t>Lớp lọc dữ liệu đầu vào giúp chặn đứng các cuộc tấn công </a:t>
+            </a:r>
+            <a:r>
+              <a:rPr lang="en-US" sz="1500" b="1" i="0" u="none" strike="noStrike" cap="none">
+                <a:solidFill>
+                  <a:srgbClr val="334155"/>
+                </a:solidFill>
+                <a:latin typeface="Urbanist"/>
+                <a:ea typeface="Urbanist"/>
+                <a:cs typeface="Urbanist"/>
+                <a:sym typeface="Urbanist"/>
+              </a:rPr>
+              <a:t>Prompt Injection</a:t>
+            </a:r>
+            <a:r>
+              <a:rPr lang="en-US" sz="1500" b="0" i="0" u="none" strike="noStrike" cap="none">
+                <a:solidFill>
+                  <a:srgbClr val="334155"/>
+                </a:solidFill>
+                <a:latin typeface="Urbanist"/>
+                <a:ea typeface="Urbanist"/>
+                <a:cs typeface="Urbanist"/>
+                <a:sym typeface="Urbanist"/>
+              </a:rPr>
+              <a:t>.</a:t>
+            </a:r>
+            <a:endParaRPr/>
+          </a:p>
+        </p:txBody>
+      </p:sp>
+      <p:pic>
+        <p:nvPicPr>
+          <p:cNvPr id="134" name="Google Shape;134;p15" descr="image.png"/>
+          <p:cNvPicPr preferRelativeResize="0"/>
+          <p:nvPr/>
+        </p:nvPicPr>
+        <p:blipFill rotWithShape="1">
+          <a:blip r:embed="rId6">
+            <a:alphaModFix/>
+          </a:blip>
+          <a:srcRect/>
+          <a:stretch/>
+        </p:blipFill>
+        <p:spPr>
+          <a:xfrm>
+            <a:off x="8677275" y="2471177"/>
+            <a:ext cx="2647950" cy="381000"/>
+          </a:xfrm>
+          <a:prstGeom prst="rect">
+            <a:avLst/>
+          </a:prstGeom>
+          <a:noFill/>
+          <a:ln>
+            <a:noFill/>
+          </a:ln>
+        </p:spPr>
+      </p:pic>
+      <p:sp>
+        <p:nvSpPr>
+          <p:cNvPr id="135" name="Google Shape;135;p15"/>
+          <p:cNvSpPr txBox="1"/>
+          <p:nvPr/>
+        </p:nvSpPr>
+        <p:spPr>
+          <a:xfrm>
+            <a:off x="8677275" y="2995052"/>
+            <a:ext cx="2780347" cy="276225"/>
+          </a:xfrm>
+          <a:prstGeom prst="rect">
+            <a:avLst/>
+          </a:prstGeom>
+          <a:noFill/>
+          <a:ln>
+            <a:noFill/>
+          </a:ln>
+        </p:spPr>
+        <p:txBody>
+          <a:bodyPr spcFirstLastPara="1" wrap="square" lIns="0" tIns="0" rIns="0" bIns="0" anchor="ctr" anchorCtr="0">
+            <a:spAutoFit/>
+          </a:bodyPr>
+          <a:lstStyle/>
+          <a:p>
+            <a:pPr marL="0" marR="0" lvl="0" indent="0" algn="l" rtl="0">
+              <a:spcBef>
+                <a:spcPts val="0"/>
+              </a:spcBef>
+              <a:spcAft>
+                <a:spcPts val="0"/>
+              </a:spcAft>
+              <a:buNone/>
+            </a:pPr>
+            <a:r>
+              <a:rPr lang="en-US" sz="1800" b="1" i="0" u="none" strike="noStrike" cap="none">
+                <a:solidFill>
+                  <a:srgbClr val="0F172A"/>
+                </a:solidFill>
+                <a:latin typeface="Urbanist"/>
+                <a:ea typeface="Urbanist"/>
+                <a:cs typeface="Urbanist"/>
+                <a:sym typeface="Urbanist"/>
+              </a:rPr>
+              <a:t>Input Validation</a:t>
+            </a:r>
+            <a:endParaRPr/>
+          </a:p>
+        </p:txBody>
+      </p:sp>
+      <p:sp>
+        <p:nvSpPr>
+          <p:cNvPr id="136" name="Google Shape;136;p15"/>
+          <p:cNvSpPr txBox="1"/>
+          <p:nvPr/>
+        </p:nvSpPr>
+        <p:spPr>
+          <a:xfrm>
+            <a:off x="8677275" y="3833252"/>
+            <a:ext cx="2647950" cy="800100"/>
+          </a:xfrm>
+          <a:prstGeom prst="rect">
+            <a:avLst/>
+          </a:prstGeom>
+          <a:noFill/>
+          <a:ln>
+            <a:noFill/>
+          </a:ln>
+        </p:spPr>
+        <p:txBody>
+          <a:bodyPr spcFirstLastPara="1" wrap="square" lIns="0" tIns="0" rIns="0" bIns="0" anchor="t" anchorCtr="0">
+            <a:spAutoFit/>
+          </a:bodyPr>
+          <a:lstStyle/>
+          <a:p>
+            <a:pPr marL="0" marR="0" lvl="0" indent="0" algn="l" rtl="0">
+              <a:lnSpc>
+                <a:spcPct val="140000"/>
+              </a:lnSpc>
+              <a:spcBef>
+                <a:spcPts val="0"/>
+              </a:spcBef>
+              <a:spcAft>
+                <a:spcPts val="0"/>
+              </a:spcAft>
+              <a:buNone/>
+            </a:pPr>
+            <a:r>
+              <a:rPr lang="en-US" sz="1500" b="0" i="0" u="none" strike="noStrike" cap="none">
+                <a:solidFill>
+                  <a:srgbClr val="334155"/>
+                </a:solidFill>
+                <a:latin typeface="Urbanist"/>
+                <a:ea typeface="Urbanist"/>
+                <a:cs typeface="Urbanist"/>
+                <a:sym typeface="Urbanist"/>
+              </a:rPr>
+              <a:t>Thiết kế Schema nghiêm ngặt (Ví dụ: Điểm số 0-10) để loại bỏ dữ liệu nhiễu/sai lệch.</a:t>
+            </a:r>
+            <a:endParaRPr/>
+          </a:p>
+        </p:txBody>
+      </p:sp>
+      <p:pic>
+        <p:nvPicPr>
+          <p:cNvPr id="17" name="Google Shape;85;p13" descr="image.png">
+            <a:extLst>
+              <a:ext uri="{FF2B5EF4-FFF2-40B4-BE49-F238E27FC236}">
+                <a16:creationId xmlns:a16="http://schemas.microsoft.com/office/drawing/2014/main" id="{8FA26BF3-9377-4F7F-B4E7-4819F660A6C4}"/>
+              </a:ext>
+            </a:extLst>
+          </p:cNvPr>
+          <p:cNvPicPr preferRelativeResize="0"/>
+          <p:nvPr/>
+        </p:nvPicPr>
+        <p:blipFill rotWithShape="1">
+          <a:blip r:embed="rId7">
+            <a:alphaModFix/>
+          </a:blip>
+          <a:srcRect/>
+          <a:stretch/>
+        </p:blipFill>
+        <p:spPr>
+          <a:xfrm>
+            <a:off x="1047750" y="2181225"/>
+            <a:ext cx="3248025" cy="3814202"/>
+          </a:xfrm>
+          <a:prstGeom prst="rect">
+            <a:avLst/>
+          </a:prstGeom>
+          <a:noFill/>
+          <a:ln>
+            <a:noFill/>
+          </a:ln>
+        </p:spPr>
+      </p:pic>
+      <p:sp>
+        <p:nvSpPr>
+          <p:cNvPr id="18" name="Google Shape;92;p13">
+            <a:extLst>
+              <a:ext uri="{FF2B5EF4-FFF2-40B4-BE49-F238E27FC236}">
+                <a16:creationId xmlns:a16="http://schemas.microsoft.com/office/drawing/2014/main" id="{1769E5F3-B313-4F7D-A374-518F6B7A7DC4}"/>
+              </a:ext>
+            </a:extLst>
+          </p:cNvPr>
+          <p:cNvSpPr txBox="1"/>
+          <p:nvPr/>
+        </p:nvSpPr>
+        <p:spPr>
+          <a:xfrm>
+            <a:off x="1657350" y="2419350"/>
+            <a:ext cx="2502274" cy="276225"/>
+          </a:xfrm>
+          <a:prstGeom prst="rect">
+            <a:avLst/>
+          </a:prstGeom>
+          <a:noFill/>
+          <a:ln>
+            <a:noFill/>
+          </a:ln>
+        </p:spPr>
+        <p:txBody>
+          <a:bodyPr spcFirstLastPara="1" wrap="square" lIns="0" tIns="0" rIns="0" bIns="0" anchor="ctr" anchorCtr="0">
+            <a:spAutoFit/>
+          </a:bodyPr>
+          <a:lstStyle/>
+          <a:p>
+            <a:pPr marL="0" marR="0" lvl="0" indent="0" algn="l" rtl="0">
+              <a:spcBef>
+                <a:spcPts val="0"/>
+              </a:spcBef>
+              <a:spcAft>
+                <a:spcPts val="0"/>
+              </a:spcAft>
+              <a:buNone/>
+            </a:pPr>
+            <a:r>
+              <a:rPr lang="en-US" sz="1800" b="1" i="0" u="none" strike="noStrike" cap="none">
+                <a:solidFill>
+                  <a:srgbClr val="B91C1C"/>
+                </a:solidFill>
+                <a:latin typeface="Urbanist"/>
+                <a:ea typeface="Urbanist"/>
+                <a:cs typeface="Urbanist"/>
+                <a:sym typeface="Urbanist"/>
+              </a:rPr>
+              <a:t>Rủi ro</a:t>
+            </a:r>
+            <a:endParaRPr/>
+          </a:p>
+        </p:txBody>
+      </p:sp>
+      <p:sp>
+        <p:nvSpPr>
+          <p:cNvPr id="19" name="Google Shape;93;p13">
+            <a:extLst>
+              <a:ext uri="{FF2B5EF4-FFF2-40B4-BE49-F238E27FC236}">
+                <a16:creationId xmlns:a16="http://schemas.microsoft.com/office/drawing/2014/main" id="{992A19A4-9B47-4933-9C73-86AD24BDFDBF}"/>
+              </a:ext>
+            </a:extLst>
+          </p:cNvPr>
+          <p:cNvSpPr txBox="1"/>
+          <p:nvPr/>
+        </p:nvSpPr>
+        <p:spPr>
+          <a:xfrm>
+            <a:off x="1333500" y="2924175"/>
+            <a:ext cx="2745441" cy="2262158"/>
+          </a:xfrm>
+          <a:prstGeom prst="rect">
+            <a:avLst/>
+          </a:prstGeom>
+          <a:noFill/>
+          <a:ln>
+            <a:noFill/>
+          </a:ln>
+        </p:spPr>
+        <p:txBody>
+          <a:bodyPr spcFirstLastPara="1" wrap="square" lIns="0" tIns="0" rIns="0" bIns="0" anchor="t" anchorCtr="0">
+            <a:spAutoFit/>
+          </a:bodyPr>
+          <a:lstStyle/>
+          <a:p>
+            <a:pPr lvl="0">
+              <a:lnSpc>
+                <a:spcPct val="140000"/>
+              </a:lnSpc>
+            </a:pPr>
+            <a:r>
+              <a:rPr lang="vi-VN" sz="1500">
+                <a:solidFill>
+                  <a:srgbClr val="334155"/>
+                </a:solidFill>
+                <a:latin typeface="Urbanist"/>
+                <a:ea typeface="Urbanist"/>
+                <a:cs typeface="Urbanist"/>
+                <a:sym typeface="Urbanist"/>
+              </a:rPr>
+              <a:t>Học sinh cố tình nhập dữ liệu sai lệch (ví dụ: điểm số âm, sở thích mâu thuẫn) để làm hệ thống bị lỗi, hoặc sử dụng Prompt Injection để ép AI trả lời các nội dung độc hại, không liên quan đến hướng nghiệp.</a:t>
+            </a:r>
+            <a:endParaRPr/>
+          </a:p>
+        </p:txBody>
+      </p:sp>
+      <p:pic>
+        <p:nvPicPr>
+          <p:cNvPr id="20" name="Google Shape;95;p13" descr="image.png">
+            <a:extLst>
+              <a:ext uri="{FF2B5EF4-FFF2-40B4-BE49-F238E27FC236}">
+                <a16:creationId xmlns:a16="http://schemas.microsoft.com/office/drawing/2014/main" id="{8384A726-E13C-4F1C-95AB-BE910A12E3AE}"/>
+              </a:ext>
+            </a:extLst>
+          </p:cNvPr>
+          <p:cNvPicPr preferRelativeResize="0"/>
+          <p:nvPr/>
+        </p:nvPicPr>
+        <p:blipFill rotWithShape="1">
+          <a:blip r:embed="rId8">
+            <a:alphaModFix/>
+          </a:blip>
+          <a:srcRect/>
+          <a:stretch/>
+        </p:blipFill>
+        <p:spPr>
+          <a:xfrm>
+            <a:off x="1333500" y="2443162"/>
+            <a:ext cx="228600" cy="228600"/>
+          </a:xfrm>
+          <a:prstGeom prst="rect">
+            <a:avLst/>
+          </a:prstGeom>
+          <a:noFill/>
+          <a:ln>
+            <a:noFill/>
+          </a:ln>
+        </p:spPr>
+      </p:pic>
+    </p:spTree>
+  </p:cSld>
+  <p:clrMapOvr>
+    <a:masterClrMapping/>
+  </p:clrMapOvr>
+</p:sld>
+</file>
+
+<file path=ppt/slides/slide13.xml><?xml version="1.0" encoding="utf-8"?>
+<p:sld xmlns:a="http://schemas.openxmlformats.org/drawingml/2006/main" xmlns:r="http://schemas.openxmlformats.org/officeDocument/2006/relationships" xmlns:p="http://schemas.openxmlformats.org/presentationml/2006/main">
+  <p:cSld>
+    <p:spTree>
+      <p:nvGrpSpPr>
+        <p:cNvPr id="1" name="Shape 141"/>
+        <p:cNvGrpSpPr/>
+        <p:nvPr/>
+      </p:nvGrpSpPr>
+      <p:grpSpPr>
+        <a:xfrm>
+          <a:off x="0" y="0"/>
+          <a:ext cx="0" cy="0"/>
+          <a:chOff x="0" y="0"/>
+          <a:chExt cx="0" cy="0"/>
+        </a:xfrm>
+      </p:grpSpPr>
+      <p:pic>
+        <p:nvPicPr>
+          <p:cNvPr id="142" name="Google Shape;142;p16" descr="image.png"/>
+          <p:cNvPicPr preferRelativeResize="0"/>
+          <p:nvPr/>
+        </p:nvPicPr>
+        <p:blipFill rotWithShape="1">
+          <a:blip r:embed="rId3">
+            <a:alphaModFix/>
+          </a:blip>
+          <a:srcRect/>
+          <a:stretch/>
+        </p:blipFill>
+        <p:spPr>
+          <a:xfrm>
+            <a:off x="0" y="0"/>
+            <a:ext cx="12192000" cy="6858000"/>
+          </a:xfrm>
+          <a:prstGeom prst="rect">
+            <a:avLst/>
+          </a:prstGeom>
+          <a:noFill/>
+          <a:ln>
+            <a:noFill/>
+          </a:ln>
+        </p:spPr>
+      </p:pic>
+      <p:pic>
+        <p:nvPicPr>
+          <p:cNvPr id="144" name="Google Shape;144;p16" descr="image.png"/>
+          <p:cNvPicPr preferRelativeResize="0"/>
+          <p:nvPr/>
+        </p:nvPicPr>
+        <p:blipFill rotWithShape="1">
+          <a:blip r:embed="rId4">
+            <a:alphaModFix/>
+          </a:blip>
+          <a:srcRect/>
+          <a:stretch/>
+        </p:blipFill>
+        <p:spPr>
+          <a:xfrm>
+            <a:off x="6398559" y="1462087"/>
+            <a:ext cx="5623112" cy="4257676"/>
+          </a:xfrm>
+          <a:prstGeom prst="rect">
+            <a:avLst/>
+          </a:prstGeom>
+          <a:noFill/>
+          <a:ln>
+            <a:noFill/>
+          </a:ln>
+        </p:spPr>
+      </p:pic>
+      <p:sp>
+        <p:nvSpPr>
+          <p:cNvPr id="145" name="Google Shape;145;p16"/>
+          <p:cNvSpPr/>
+          <p:nvPr/>
+        </p:nvSpPr>
+        <p:spPr>
+          <a:xfrm>
+            <a:off x="571500" y="6467475"/>
+            <a:ext cx="11049000" cy="9525"/>
+          </a:xfrm>
+          <a:prstGeom prst="rect">
+            <a:avLst/>
+          </a:prstGeom>
+          <a:solidFill>
+            <a:srgbClr val="FFFFFF"/>
+          </a:solidFill>
+          <a:ln>
+            <a:noFill/>
+          </a:ln>
+        </p:spPr>
+        <p:txBody>
+          <a:bodyPr spcFirstLastPara="1" wrap="square" lIns="91425" tIns="45700" rIns="91425" bIns="45700" anchor="ctr" anchorCtr="0">
+            <a:noAutofit/>
+          </a:bodyPr>
+          <a:lstStyle/>
+          <a:p>
+            <a:pPr marL="0" marR="0" lvl="0" indent="0" algn="ctr" rtl="0">
+              <a:spcBef>
+                <a:spcPts val="0"/>
+              </a:spcBef>
+              <a:spcAft>
+                <a:spcPts val="0"/>
+              </a:spcAft>
+              <a:buNone/>
+            </a:pPr>
+            <a:endParaRPr sz="1800" b="0" i="0" u="none" strike="noStrike" cap="none">
+              <a:solidFill>
+                <a:schemeClr val="dk1"/>
+              </a:solidFill>
+              <a:latin typeface="Calibri"/>
+              <a:ea typeface="Calibri"/>
+              <a:cs typeface="Calibri"/>
+              <a:sym typeface="Calibri"/>
+            </a:endParaRPr>
+          </a:p>
+        </p:txBody>
+      </p:sp>
+      <p:sp>
+        <p:nvSpPr>
+          <p:cNvPr id="146" name="Google Shape;146;p16"/>
+          <p:cNvSpPr txBox="1"/>
+          <p:nvPr/>
+        </p:nvSpPr>
+        <p:spPr>
+          <a:xfrm>
+            <a:off x="571500" y="381000"/>
+            <a:ext cx="11601450" cy="485775"/>
+          </a:xfrm>
+          <a:prstGeom prst="rect">
+            <a:avLst/>
+          </a:prstGeom>
+          <a:noFill/>
+          <a:ln>
+            <a:noFill/>
+          </a:ln>
+        </p:spPr>
+        <p:txBody>
+          <a:bodyPr spcFirstLastPara="1" wrap="square" lIns="0" tIns="0" rIns="0" bIns="0" anchor="t" anchorCtr="0">
+            <a:spAutoFit/>
+          </a:bodyPr>
+          <a:lstStyle/>
+          <a:p>
+            <a:pPr marL="0" marR="0" lvl="0" indent="0" algn="l" rtl="0">
+              <a:spcBef>
+                <a:spcPts val="0"/>
+              </a:spcBef>
+              <a:spcAft>
+                <a:spcPts val="0"/>
+              </a:spcAft>
+              <a:buNone/>
+            </a:pPr>
+            <a:r>
+              <a:rPr lang="en-US" sz="3150" b="1" i="0" u="none" strike="noStrike" cap="none">
+                <a:solidFill>
+                  <a:srgbClr val="FFFFFF"/>
+                </a:solidFill>
+                <a:latin typeface="Urbanist"/>
+                <a:ea typeface="Urbanist"/>
+                <a:cs typeface="Urbanist"/>
+                <a:sym typeface="Urbanist"/>
+              </a:rPr>
+              <a:t>04. Tác động xã hội (Social Impact)</a:t>
+            </a:r>
+            <a:endParaRPr/>
+          </a:p>
+        </p:txBody>
+      </p:sp>
+      <p:sp>
+        <p:nvSpPr>
+          <p:cNvPr id="148" name="Google Shape;148;p16"/>
+          <p:cNvSpPr txBox="1"/>
+          <p:nvPr/>
+        </p:nvSpPr>
+        <p:spPr>
+          <a:xfrm>
+            <a:off x="6874809" y="1699438"/>
+            <a:ext cx="4572000" cy="276999"/>
+          </a:xfrm>
+          <a:prstGeom prst="rect">
+            <a:avLst/>
+          </a:prstGeom>
+          <a:noFill/>
+          <a:ln>
+            <a:noFill/>
+          </a:ln>
+        </p:spPr>
+        <p:txBody>
+          <a:bodyPr spcFirstLastPara="1" wrap="square" lIns="0" tIns="0" rIns="0" bIns="0" anchor="t" anchorCtr="0">
+            <a:spAutoFit/>
+          </a:bodyPr>
+          <a:lstStyle/>
+          <a:p>
+            <a:pPr marL="0" marR="0" lvl="0" indent="0" algn="l" rtl="0">
+              <a:spcBef>
+                <a:spcPts val="0"/>
+              </a:spcBef>
+              <a:spcAft>
+                <a:spcPts val="0"/>
+              </a:spcAft>
+              <a:buNone/>
+            </a:pPr>
+            <a:r>
+              <a:rPr lang="en-US" sz="1800" b="1" i="0" u="none" strike="noStrike" cap="none">
+                <a:solidFill>
+                  <a:srgbClr val="0EA5E9"/>
+                </a:solidFill>
+                <a:latin typeface="Urbanist"/>
+                <a:ea typeface="Urbanist"/>
+                <a:cs typeface="Urbanist"/>
+                <a:sym typeface="Urbanist"/>
+              </a:rPr>
+              <a:t>Cá nhân hóa theo điều kiện thực tế</a:t>
+            </a:r>
+            <a:endParaRPr sz="1800"/>
+          </a:p>
+        </p:txBody>
+      </p:sp>
+      <p:sp>
+        <p:nvSpPr>
+          <p:cNvPr id="150" name="Google Shape;150;p16"/>
+          <p:cNvSpPr txBox="1"/>
+          <p:nvPr/>
+        </p:nvSpPr>
+        <p:spPr>
+          <a:xfrm>
+            <a:off x="1200150" y="3476625"/>
+            <a:ext cx="38100" cy="266700"/>
+          </a:xfrm>
+          <a:prstGeom prst="rect">
+            <a:avLst/>
+          </a:prstGeom>
+          <a:noFill/>
+          <a:ln>
+            <a:noFill/>
+          </a:ln>
+        </p:spPr>
+        <p:txBody>
+          <a:bodyPr spcFirstLastPara="1" wrap="square" lIns="0" tIns="0" rIns="0" bIns="0" anchor="t" anchorCtr="0">
+            <a:spAutoFit/>
+          </a:bodyPr>
+          <a:lstStyle/>
+          <a:p>
+            <a:pPr marL="0" marR="0" lvl="0" indent="0" algn="l" rtl="0">
+              <a:spcBef>
+                <a:spcPts val="0"/>
+              </a:spcBef>
+              <a:spcAft>
+                <a:spcPts val="0"/>
+              </a:spcAft>
+              <a:buNone/>
+            </a:pPr>
+            <a:r>
+              <a:rPr lang="en-US" sz="1500" b="0" i="0" u="none" strike="noStrike" cap="none">
+                <a:solidFill>
+                  <a:srgbClr val="334155"/>
+                </a:solidFill>
+                <a:latin typeface="Urbanist"/>
+                <a:ea typeface="Urbanist"/>
+                <a:cs typeface="Urbanist"/>
+                <a:sym typeface="Urbanist"/>
+              </a:rPr>
+              <a:t>•</a:t>
+            </a:r>
+            <a:endParaRPr/>
+          </a:p>
+        </p:txBody>
+      </p:sp>
+      <p:sp>
+        <p:nvSpPr>
+          <p:cNvPr id="151" name="Google Shape;151;p16"/>
+          <p:cNvSpPr txBox="1"/>
+          <p:nvPr/>
+        </p:nvSpPr>
+        <p:spPr>
+          <a:xfrm>
+            <a:off x="6874809" y="2190468"/>
+            <a:ext cx="4381500" cy="533400"/>
+          </a:xfrm>
+          <a:prstGeom prst="rect">
+            <a:avLst/>
+          </a:prstGeom>
+          <a:noFill/>
+          <a:ln>
+            <a:noFill/>
+          </a:ln>
+        </p:spPr>
+        <p:txBody>
+          <a:bodyPr spcFirstLastPara="1" wrap="square" lIns="38100" tIns="0" rIns="0" bIns="0" anchor="t" anchorCtr="0">
+            <a:spAutoFit/>
+          </a:bodyPr>
+          <a:lstStyle/>
+          <a:p>
+            <a:pPr marL="0" marR="0" lvl="0" indent="0" algn="l" rtl="0">
+              <a:lnSpc>
+                <a:spcPct val="140000"/>
+              </a:lnSpc>
+              <a:spcBef>
+                <a:spcPts val="0"/>
+              </a:spcBef>
+              <a:spcAft>
+                <a:spcPts val="0"/>
+              </a:spcAft>
+              <a:buNone/>
+            </a:pPr>
+            <a:r>
+              <a:rPr lang="en-US" sz="1500" b="0" i="0" u="none" strike="noStrike" cap="none">
+                <a:solidFill>
+                  <a:srgbClr val="334155"/>
+                </a:solidFill>
+                <a:latin typeface="Urbanist"/>
+                <a:ea typeface="Urbanist"/>
+                <a:cs typeface="Urbanist"/>
+                <a:sym typeface="Urbanist"/>
+              </a:rPr>
+              <a:t>Bộ lọc "Mức học phí kỳ vọng" &amp; "Lộ trình vừa học vừa làm".</a:t>
+            </a:r>
+            <a:endParaRPr/>
+          </a:p>
+        </p:txBody>
+      </p:sp>
+      <p:sp>
+        <p:nvSpPr>
+          <p:cNvPr id="152" name="Google Shape;152;p16"/>
+          <p:cNvSpPr txBox="1"/>
+          <p:nvPr/>
+        </p:nvSpPr>
+        <p:spPr>
+          <a:xfrm>
+            <a:off x="1200150" y="4105275"/>
+            <a:ext cx="38100" cy="266700"/>
+          </a:xfrm>
+          <a:prstGeom prst="rect">
+            <a:avLst/>
+          </a:prstGeom>
+          <a:noFill/>
+          <a:ln>
+            <a:noFill/>
+          </a:ln>
+        </p:spPr>
+        <p:txBody>
+          <a:bodyPr spcFirstLastPara="1" wrap="square" lIns="0" tIns="0" rIns="0" bIns="0" anchor="t" anchorCtr="0">
+            <a:spAutoFit/>
+          </a:bodyPr>
+          <a:lstStyle/>
+          <a:p>
+            <a:pPr marL="0" marR="0" lvl="0" indent="0" algn="l" rtl="0">
+              <a:spcBef>
+                <a:spcPts val="0"/>
+              </a:spcBef>
+              <a:spcAft>
+                <a:spcPts val="0"/>
+              </a:spcAft>
+              <a:buNone/>
+            </a:pPr>
+            <a:r>
+              <a:rPr lang="en-US" sz="1500" b="0" i="0" u="none" strike="noStrike" cap="none">
+                <a:solidFill>
+                  <a:srgbClr val="334155"/>
+                </a:solidFill>
+                <a:latin typeface="Urbanist"/>
+                <a:ea typeface="Urbanist"/>
+                <a:cs typeface="Urbanist"/>
+                <a:sym typeface="Urbanist"/>
+              </a:rPr>
+              <a:t>•</a:t>
+            </a:r>
+            <a:endParaRPr/>
+          </a:p>
+        </p:txBody>
+      </p:sp>
+      <p:sp>
+        <p:nvSpPr>
+          <p:cNvPr id="153" name="Google Shape;153;p16"/>
+          <p:cNvSpPr txBox="1"/>
+          <p:nvPr/>
+        </p:nvSpPr>
+        <p:spPr>
+          <a:xfrm>
+            <a:off x="6874809" y="2831024"/>
+            <a:ext cx="4381500" cy="266700"/>
+          </a:xfrm>
+          <a:prstGeom prst="rect">
+            <a:avLst/>
+          </a:prstGeom>
+          <a:noFill/>
+          <a:ln>
+            <a:noFill/>
+          </a:ln>
+        </p:spPr>
+        <p:txBody>
+          <a:bodyPr spcFirstLastPara="1" wrap="square" lIns="38100" tIns="0" rIns="0" bIns="0" anchor="t" anchorCtr="0">
+            <a:spAutoFit/>
+          </a:bodyPr>
+          <a:lstStyle/>
+          <a:p>
+            <a:pPr marL="0" marR="0" lvl="0" indent="0" algn="l" rtl="0">
+              <a:lnSpc>
+                <a:spcPct val="140000"/>
+              </a:lnSpc>
+              <a:spcBef>
+                <a:spcPts val="0"/>
+              </a:spcBef>
+              <a:spcAft>
+                <a:spcPts val="0"/>
+              </a:spcAft>
+              <a:buNone/>
+            </a:pPr>
+            <a:r>
+              <a:rPr lang="en-US" sz="1500" b="0" i="0" u="none" strike="noStrike" cap="none">
+                <a:solidFill>
+                  <a:srgbClr val="334155"/>
+                </a:solidFill>
+                <a:latin typeface="Urbanist"/>
+                <a:ea typeface="Urbanist"/>
+                <a:cs typeface="Urbanist"/>
+                <a:sym typeface="Urbanist"/>
+              </a:rPr>
+              <a:t>Ưu tiên học bổng cho HS vùng sâu, vùng xa.</a:t>
+            </a:r>
+            <a:endParaRPr/>
+          </a:p>
+        </p:txBody>
+      </p:sp>
+      <p:sp>
+        <p:nvSpPr>
+          <p:cNvPr id="154" name="Google Shape;154;p16"/>
+          <p:cNvSpPr txBox="1"/>
+          <p:nvPr/>
+        </p:nvSpPr>
+        <p:spPr>
+          <a:xfrm>
+            <a:off x="1200150" y="4467225"/>
+            <a:ext cx="38100" cy="266700"/>
+          </a:xfrm>
+          <a:prstGeom prst="rect">
+            <a:avLst/>
+          </a:prstGeom>
+          <a:noFill/>
+          <a:ln>
+            <a:noFill/>
+          </a:ln>
+        </p:spPr>
+        <p:txBody>
+          <a:bodyPr spcFirstLastPara="1" wrap="square" lIns="0" tIns="0" rIns="0" bIns="0" anchor="t" anchorCtr="0">
+            <a:spAutoFit/>
+          </a:bodyPr>
+          <a:lstStyle/>
+          <a:p>
+            <a:pPr marL="0" marR="0" lvl="0" indent="0" algn="l" rtl="0">
+              <a:spcBef>
+                <a:spcPts val="0"/>
+              </a:spcBef>
+              <a:spcAft>
+                <a:spcPts val="0"/>
+              </a:spcAft>
+              <a:buNone/>
+            </a:pPr>
+            <a:r>
+              <a:rPr lang="en-US" sz="1500" b="0" i="0" u="none" strike="noStrike" cap="none">
+                <a:solidFill>
+                  <a:srgbClr val="334155"/>
+                </a:solidFill>
+                <a:latin typeface="Urbanist"/>
+                <a:ea typeface="Urbanist"/>
+                <a:cs typeface="Urbanist"/>
+                <a:sym typeface="Urbanist"/>
+              </a:rPr>
+              <a:t>•</a:t>
+            </a:r>
+            <a:endParaRPr/>
+          </a:p>
+        </p:txBody>
+      </p:sp>
+      <p:sp>
+        <p:nvSpPr>
+          <p:cNvPr id="155" name="Google Shape;155;p16"/>
+          <p:cNvSpPr txBox="1"/>
+          <p:nvPr/>
+        </p:nvSpPr>
+        <p:spPr>
+          <a:xfrm>
+            <a:off x="6874809" y="3214689"/>
+            <a:ext cx="4381500" cy="533400"/>
+          </a:xfrm>
+          <a:prstGeom prst="rect">
+            <a:avLst/>
+          </a:prstGeom>
+          <a:noFill/>
+          <a:ln>
+            <a:noFill/>
+          </a:ln>
+        </p:spPr>
+        <p:txBody>
+          <a:bodyPr spcFirstLastPara="1" wrap="square" lIns="38100" tIns="0" rIns="0" bIns="0" anchor="t" anchorCtr="0">
+            <a:spAutoFit/>
+          </a:bodyPr>
+          <a:lstStyle/>
+          <a:p>
+            <a:pPr marL="0" marR="0" lvl="0" indent="0" algn="l" rtl="0">
+              <a:lnSpc>
+                <a:spcPct val="140000"/>
+              </a:lnSpc>
+              <a:spcBef>
+                <a:spcPts val="0"/>
+              </a:spcBef>
+              <a:spcAft>
+                <a:spcPts val="0"/>
+              </a:spcAft>
+              <a:buNone/>
+            </a:pPr>
+            <a:r>
+              <a:rPr lang="en-US" sz="1500" b="0" i="0" u="none" strike="noStrike" cap="none">
+                <a:solidFill>
+                  <a:srgbClr val="334155"/>
+                </a:solidFill>
+                <a:latin typeface="Urbanist"/>
+                <a:ea typeface="Urbanist"/>
+                <a:cs typeface="Urbanist"/>
+                <a:sym typeface="Urbanist"/>
+              </a:rPr>
+              <a:t>Lộ trình cải thiện từng bước cho HS học lực trung bình thay vì chỉ tập trung ngành "hot".</a:t>
+            </a:r>
+            <a:endParaRPr/>
+          </a:p>
+        </p:txBody>
+      </p:sp>
+      <p:pic>
+        <p:nvPicPr>
+          <p:cNvPr id="17" name="Google Shape;85;p13" descr="image.png">
+            <a:extLst>
+              <a:ext uri="{FF2B5EF4-FFF2-40B4-BE49-F238E27FC236}">
+                <a16:creationId xmlns:a16="http://schemas.microsoft.com/office/drawing/2014/main" id="{1F59186B-FA47-4983-9A26-819C9BBA763E}"/>
+              </a:ext>
+            </a:extLst>
+          </p:cNvPr>
+          <p:cNvPicPr preferRelativeResize="0"/>
+          <p:nvPr/>
+        </p:nvPicPr>
+        <p:blipFill rotWithShape="1">
+          <a:blip r:embed="rId5">
+            <a:alphaModFix/>
+          </a:blip>
+          <a:srcRect/>
+          <a:stretch/>
+        </p:blipFill>
+        <p:spPr>
+          <a:xfrm>
+            <a:off x="850527" y="1462086"/>
+            <a:ext cx="4806202" cy="4257675"/>
+          </a:xfrm>
+          <a:prstGeom prst="rect">
+            <a:avLst/>
+          </a:prstGeom>
+          <a:noFill/>
+          <a:ln>
+            <a:noFill/>
+          </a:ln>
+        </p:spPr>
+      </p:pic>
+      <p:sp>
+        <p:nvSpPr>
+          <p:cNvPr id="18" name="Google Shape;92;p13">
+            <a:extLst>
+              <a:ext uri="{FF2B5EF4-FFF2-40B4-BE49-F238E27FC236}">
+                <a16:creationId xmlns:a16="http://schemas.microsoft.com/office/drawing/2014/main" id="{A0EE7409-9B02-4D8B-8B00-A4E7A88249FC}"/>
+              </a:ext>
+            </a:extLst>
+          </p:cNvPr>
+          <p:cNvSpPr txBox="1"/>
+          <p:nvPr/>
+        </p:nvSpPr>
+        <p:spPr>
+          <a:xfrm>
+            <a:off x="1460126" y="1700212"/>
+            <a:ext cx="3702691" cy="276225"/>
+          </a:xfrm>
+          <a:prstGeom prst="rect">
+            <a:avLst/>
+          </a:prstGeom>
+          <a:noFill/>
+          <a:ln>
+            <a:noFill/>
+          </a:ln>
+        </p:spPr>
+        <p:txBody>
+          <a:bodyPr spcFirstLastPara="1" wrap="square" lIns="0" tIns="0" rIns="0" bIns="0" anchor="ctr" anchorCtr="0">
+            <a:spAutoFit/>
+          </a:bodyPr>
+          <a:lstStyle/>
+          <a:p>
+            <a:pPr marL="0" marR="0" lvl="0" indent="0" algn="l" rtl="0">
+              <a:spcBef>
+                <a:spcPts val="0"/>
+              </a:spcBef>
+              <a:spcAft>
+                <a:spcPts val="0"/>
+              </a:spcAft>
+              <a:buNone/>
+            </a:pPr>
+            <a:r>
+              <a:rPr lang="en-US" sz="1800" b="1" i="0" u="none" strike="noStrike" cap="none">
+                <a:solidFill>
+                  <a:srgbClr val="B91C1C"/>
+                </a:solidFill>
+                <a:latin typeface="Urbanist"/>
+                <a:ea typeface="Urbanist"/>
+                <a:cs typeface="Urbanist"/>
+                <a:sym typeface="Urbanist"/>
+              </a:rPr>
+              <a:t>Rủi ro</a:t>
+            </a:r>
+            <a:endParaRPr/>
+          </a:p>
+        </p:txBody>
+      </p:sp>
+      <p:sp>
+        <p:nvSpPr>
+          <p:cNvPr id="19" name="Google Shape;93;p13">
+            <a:extLst>
+              <a:ext uri="{FF2B5EF4-FFF2-40B4-BE49-F238E27FC236}">
+                <a16:creationId xmlns:a16="http://schemas.microsoft.com/office/drawing/2014/main" id="{8C8C0759-0B3D-4C55-9D8E-3C711ED5168A}"/>
+              </a:ext>
+            </a:extLst>
+          </p:cNvPr>
+          <p:cNvSpPr txBox="1"/>
+          <p:nvPr/>
+        </p:nvSpPr>
+        <p:spPr>
+          <a:xfrm>
+            <a:off x="1136277" y="2205037"/>
+            <a:ext cx="4062514" cy="1615827"/>
+          </a:xfrm>
+          <a:prstGeom prst="rect">
+            <a:avLst/>
+          </a:prstGeom>
+          <a:noFill/>
+          <a:ln>
+            <a:noFill/>
+          </a:ln>
+        </p:spPr>
+        <p:txBody>
+          <a:bodyPr spcFirstLastPara="1" wrap="square" lIns="0" tIns="0" rIns="0" bIns="0" anchor="t" anchorCtr="0">
+            <a:spAutoFit/>
+          </a:bodyPr>
+          <a:lstStyle/>
+          <a:p>
+            <a:pPr lvl="0">
+              <a:lnSpc>
+                <a:spcPct val="140000"/>
+              </a:lnSpc>
+            </a:pPr>
+            <a:r>
+              <a:rPr lang="vi-VN" sz="1500">
+                <a:solidFill>
+                  <a:srgbClr val="334155"/>
+                </a:solidFill>
+                <a:latin typeface="Urbanist"/>
+                <a:ea typeface="Urbanist"/>
+                <a:cs typeface="Urbanist"/>
+                <a:sym typeface="Urbanist"/>
+              </a:rPr>
+              <a:t>Ứng dụng chỉ phục vụ tốt cho "học sinh giỏi, có điều kiện", vô tình bỏ rơi hoặc làm nản chí các nhóm yếu thế khi liên tục gợi ý những lộ trình vượt quá khả năng tài chính hoặc năng lực hiện tại của họ.</a:t>
+            </a:r>
+            <a:endParaRPr/>
+          </a:p>
+        </p:txBody>
+      </p:sp>
+      <p:pic>
+        <p:nvPicPr>
+          <p:cNvPr id="20" name="Google Shape;95;p13" descr="image.png">
+            <a:extLst>
+              <a:ext uri="{FF2B5EF4-FFF2-40B4-BE49-F238E27FC236}">
+                <a16:creationId xmlns:a16="http://schemas.microsoft.com/office/drawing/2014/main" id="{44CD5703-9292-4297-AD74-54C0C3156BBD}"/>
+              </a:ext>
+            </a:extLst>
+          </p:cNvPr>
+          <p:cNvPicPr preferRelativeResize="0"/>
+          <p:nvPr/>
+        </p:nvPicPr>
+        <p:blipFill rotWithShape="1">
+          <a:blip r:embed="rId6">
+            <a:alphaModFix/>
+          </a:blip>
+          <a:srcRect/>
+          <a:stretch/>
+        </p:blipFill>
+        <p:spPr>
+          <a:xfrm>
+            <a:off x="1123950" y="1740705"/>
+            <a:ext cx="228600" cy="195238"/>
+          </a:xfrm>
+          <a:prstGeom prst="rect">
+            <a:avLst/>
+          </a:prstGeom>
+          <a:noFill/>
+          <a:ln>
+            <a:noFill/>
+          </a:ln>
+        </p:spPr>
+      </p:pic>
+    </p:spTree>
+  </p:cSld>
+  <p:clrMapOvr>
+    <a:masterClrMapping/>
+  </p:clrMapOvr>
+</p:sld>
+</file>
+
+<file path=ppt/slides/slide14.xml><?xml version="1.0" encoding="utf-8"?>
+<p:sld xmlns:a="http://schemas.openxmlformats.org/drawingml/2006/main" xmlns:r="http://schemas.openxmlformats.org/officeDocument/2006/relationships" xmlns:p="http://schemas.openxmlformats.org/presentationml/2006/main">
+  <p:cSld>
+    <p:spTree>
+      <p:nvGrpSpPr>
+        <p:cNvPr id="1" name="Shape 159"/>
+        <p:cNvGrpSpPr/>
+        <p:nvPr/>
+      </p:nvGrpSpPr>
+      <p:grpSpPr>
+        <a:xfrm>
+          <a:off x="0" y="0"/>
+          <a:ext cx="0" cy="0"/>
+          <a:chOff x="0" y="0"/>
+          <a:chExt cx="0" cy="0"/>
+        </a:xfrm>
+      </p:grpSpPr>
+      <p:pic>
+        <p:nvPicPr>
+          <p:cNvPr id="160" name="Google Shape;160;p17" descr="image.png"/>
+          <p:cNvPicPr preferRelativeResize="0"/>
+          <p:nvPr/>
+        </p:nvPicPr>
+        <p:blipFill rotWithShape="1">
+          <a:blip r:embed="rId3">
+            <a:alphaModFix/>
+          </a:blip>
+          <a:srcRect/>
+          <a:stretch/>
+        </p:blipFill>
+        <p:spPr>
+          <a:xfrm>
+            <a:off x="0" y="0"/>
+            <a:ext cx="12192000" cy="6858000"/>
+          </a:xfrm>
+          <a:prstGeom prst="rect">
+            <a:avLst/>
+          </a:prstGeom>
+          <a:noFill/>
+          <a:ln>
+            <a:noFill/>
+          </a:ln>
+        </p:spPr>
+      </p:pic>
+      <p:pic>
+        <p:nvPicPr>
+          <p:cNvPr id="161" name="Google Shape;161;p17" descr="image.png"/>
+          <p:cNvPicPr preferRelativeResize="0"/>
+          <p:nvPr/>
+        </p:nvPicPr>
+        <p:blipFill rotWithShape="1">
+          <a:blip r:embed="rId4">
+            <a:alphaModFix/>
+          </a:blip>
+          <a:srcRect/>
+          <a:stretch/>
+        </p:blipFill>
+        <p:spPr>
+          <a:xfrm>
+            <a:off x="4643717" y="2181225"/>
+            <a:ext cx="3560107" cy="3257550"/>
+          </a:xfrm>
+          <a:prstGeom prst="rect">
+            <a:avLst/>
+          </a:prstGeom>
+          <a:noFill/>
+          <a:ln>
+            <a:noFill/>
+          </a:ln>
+        </p:spPr>
+      </p:pic>
+      <p:pic>
+        <p:nvPicPr>
+          <p:cNvPr id="162" name="Google Shape;162;p17" descr="image.png"/>
+          <p:cNvPicPr preferRelativeResize="0"/>
+          <p:nvPr/>
+        </p:nvPicPr>
+        <p:blipFill rotWithShape="1">
+          <a:blip r:embed="rId5">
+            <a:alphaModFix/>
+          </a:blip>
+          <a:srcRect/>
+          <a:stretch/>
+        </p:blipFill>
+        <p:spPr>
+          <a:xfrm>
+            <a:off x="8516470" y="2181225"/>
+            <a:ext cx="3362885" cy="3257550"/>
+          </a:xfrm>
+          <a:prstGeom prst="rect">
+            <a:avLst/>
+          </a:prstGeom>
+          <a:noFill/>
+          <a:ln>
+            <a:noFill/>
+          </a:ln>
+        </p:spPr>
+      </p:pic>
+      <p:sp>
+        <p:nvSpPr>
+          <p:cNvPr id="164" name="Google Shape;164;p17"/>
+          <p:cNvSpPr/>
+          <p:nvPr/>
+        </p:nvSpPr>
+        <p:spPr>
+          <a:xfrm>
+            <a:off x="571500" y="6467475"/>
+            <a:ext cx="11049000" cy="9525"/>
+          </a:xfrm>
+          <a:prstGeom prst="rect">
+            <a:avLst/>
+          </a:prstGeom>
+          <a:solidFill>
+            <a:srgbClr val="FFFFFF"/>
+          </a:solidFill>
+          <a:ln>
+            <a:noFill/>
+          </a:ln>
+        </p:spPr>
+        <p:txBody>
+          <a:bodyPr spcFirstLastPara="1" wrap="square" lIns="91425" tIns="45700" rIns="91425" bIns="45700" anchor="ctr" anchorCtr="0">
+            <a:noAutofit/>
+          </a:bodyPr>
+          <a:lstStyle/>
+          <a:p>
+            <a:pPr marL="0" marR="0" lvl="0" indent="0" algn="ctr" rtl="0">
+              <a:spcBef>
+                <a:spcPts val="0"/>
+              </a:spcBef>
+              <a:spcAft>
+                <a:spcPts val="0"/>
+              </a:spcAft>
+              <a:buNone/>
+            </a:pPr>
+            <a:endParaRPr sz="1800" b="0" i="0" u="none" strike="noStrike" cap="none">
+              <a:solidFill>
+                <a:schemeClr val="dk1"/>
+              </a:solidFill>
+              <a:latin typeface="Calibri"/>
+              <a:ea typeface="Calibri"/>
+              <a:cs typeface="Calibri"/>
+              <a:sym typeface="Calibri"/>
+            </a:endParaRPr>
+          </a:p>
+        </p:txBody>
+      </p:sp>
+      <p:sp>
+        <p:nvSpPr>
+          <p:cNvPr id="165" name="Google Shape;165;p17"/>
+          <p:cNvSpPr txBox="1"/>
+          <p:nvPr/>
+        </p:nvSpPr>
+        <p:spPr>
+          <a:xfrm>
+            <a:off x="571500" y="381000"/>
+            <a:ext cx="11601450" cy="485775"/>
+          </a:xfrm>
+          <a:prstGeom prst="rect">
+            <a:avLst/>
+          </a:prstGeom>
+          <a:noFill/>
+          <a:ln>
+            <a:noFill/>
+          </a:ln>
+        </p:spPr>
+        <p:txBody>
+          <a:bodyPr spcFirstLastPara="1" wrap="square" lIns="0" tIns="0" rIns="0" bIns="0" anchor="t" anchorCtr="0">
+            <a:spAutoFit/>
+          </a:bodyPr>
+          <a:lstStyle/>
+          <a:p>
+            <a:pPr marL="0" marR="0" lvl="0" indent="0" algn="l" rtl="0">
+              <a:spcBef>
+                <a:spcPts val="0"/>
+              </a:spcBef>
+              <a:spcAft>
+                <a:spcPts val="0"/>
+              </a:spcAft>
+              <a:buNone/>
+            </a:pPr>
+            <a:r>
+              <a:rPr lang="en-US" sz="3150" b="1" i="0" u="none" strike="noStrike" cap="none">
+                <a:solidFill>
+                  <a:srgbClr val="FFFFFF"/>
+                </a:solidFill>
+                <a:latin typeface="Urbanist"/>
+                <a:ea typeface="Urbanist"/>
+                <a:cs typeface="Urbanist"/>
+                <a:sym typeface="Urbanist"/>
+              </a:rPr>
+              <a:t>05. Minh bạch &amp; Giải thích (Explainability)</a:t>
+            </a:r>
+            <a:endParaRPr/>
+          </a:p>
+        </p:txBody>
+      </p:sp>
+      <p:sp>
+        <p:nvSpPr>
+          <p:cNvPr id="166" name="Google Shape;166;p17"/>
+          <p:cNvSpPr txBox="1"/>
+          <p:nvPr/>
+        </p:nvSpPr>
+        <p:spPr>
+          <a:xfrm>
+            <a:off x="1047750" y="1533525"/>
+            <a:ext cx="10096500" cy="361950"/>
+          </a:xfrm>
+          <a:prstGeom prst="rect">
+            <a:avLst/>
+          </a:prstGeom>
+          <a:noFill/>
+          <a:ln>
+            <a:noFill/>
+          </a:ln>
+        </p:spPr>
+        <p:txBody>
+          <a:bodyPr spcFirstLastPara="1" wrap="square" lIns="0" tIns="0" rIns="0" bIns="0" anchor="t" anchorCtr="0">
+            <a:spAutoFit/>
+          </a:bodyPr>
+          <a:lstStyle/>
+          <a:p>
+            <a:pPr marL="0" marR="0" lvl="0" indent="0" algn="l" rtl="0">
+              <a:spcBef>
+                <a:spcPts val="0"/>
+              </a:spcBef>
+              <a:spcAft>
+                <a:spcPts val="0"/>
+              </a:spcAft>
+              <a:buNone/>
+            </a:pPr>
+            <a:r>
+              <a:rPr lang="en-US" sz="2400" b="1" i="0" u="none" strike="noStrike" cap="none">
+                <a:solidFill>
+                  <a:srgbClr val="0EA5E9"/>
+                </a:solidFill>
+                <a:latin typeface="Urbanist"/>
+                <a:ea typeface="Urbanist"/>
+                <a:cs typeface="Urbanist"/>
+                <a:sym typeface="Urbanist"/>
+              </a:rPr>
+              <a:t>Mở toang "Hộp đen" (Black box) của AI</a:t>
+            </a:r>
+            <a:endParaRPr/>
+          </a:p>
+        </p:txBody>
+      </p:sp>
+      <p:pic>
+        <p:nvPicPr>
+          <p:cNvPr id="168" name="Google Shape;168;p17" descr="image.png"/>
+          <p:cNvPicPr preferRelativeResize="0"/>
+          <p:nvPr/>
+        </p:nvPicPr>
+        <p:blipFill rotWithShape="1">
+          <a:blip r:embed="rId6">
+            <a:alphaModFix/>
+          </a:blip>
+          <a:srcRect/>
+          <a:stretch/>
+        </p:blipFill>
+        <p:spPr>
+          <a:xfrm>
+            <a:off x="4781240" y="2476500"/>
+            <a:ext cx="3127310" cy="381000"/>
+          </a:xfrm>
+          <a:prstGeom prst="rect">
+            <a:avLst/>
+          </a:prstGeom>
+          <a:noFill/>
+          <a:ln>
+            <a:noFill/>
+          </a:ln>
+        </p:spPr>
+      </p:pic>
+      <p:sp>
+        <p:nvSpPr>
+          <p:cNvPr id="169" name="Google Shape;169;p17"/>
+          <p:cNvSpPr txBox="1"/>
+          <p:nvPr/>
+        </p:nvSpPr>
+        <p:spPr>
+          <a:xfrm>
+            <a:off x="4838234" y="3000375"/>
+            <a:ext cx="3283675" cy="276225"/>
+          </a:xfrm>
+          <a:prstGeom prst="rect">
+            <a:avLst/>
+          </a:prstGeom>
+          <a:noFill/>
+          <a:ln>
+            <a:noFill/>
+          </a:ln>
+        </p:spPr>
+        <p:txBody>
+          <a:bodyPr spcFirstLastPara="1" wrap="square" lIns="0" tIns="0" rIns="0" bIns="0" anchor="ctr" anchorCtr="0">
+            <a:spAutoFit/>
+          </a:bodyPr>
+          <a:lstStyle/>
+          <a:p>
+            <a:pPr marL="0" marR="0" lvl="0" indent="0" algn="l" rtl="0">
+              <a:spcBef>
+                <a:spcPts val="0"/>
+              </a:spcBef>
+              <a:spcAft>
+                <a:spcPts val="0"/>
+              </a:spcAft>
+              <a:buNone/>
+            </a:pPr>
+            <a:r>
+              <a:rPr lang="en-US" sz="1800" b="1" i="0" u="none" strike="noStrike" cap="none">
+                <a:solidFill>
+                  <a:srgbClr val="0F172A"/>
+                </a:solidFill>
+                <a:latin typeface="Urbanist"/>
+                <a:ea typeface="Urbanist"/>
+                <a:cs typeface="Urbanist"/>
+                <a:sym typeface="Urbanist"/>
+              </a:rPr>
+              <a:t>Chain-of-Thought</a:t>
+            </a:r>
+            <a:endParaRPr/>
+          </a:p>
+        </p:txBody>
+      </p:sp>
+      <p:sp>
+        <p:nvSpPr>
+          <p:cNvPr id="170" name="Google Shape;170;p17"/>
+          <p:cNvSpPr txBox="1"/>
+          <p:nvPr/>
+        </p:nvSpPr>
+        <p:spPr>
+          <a:xfrm>
+            <a:off x="4781240" y="3838575"/>
+            <a:ext cx="3127310" cy="969496"/>
+          </a:xfrm>
+          <a:prstGeom prst="rect">
+            <a:avLst/>
+          </a:prstGeom>
+          <a:noFill/>
+          <a:ln>
+            <a:noFill/>
+          </a:ln>
+        </p:spPr>
+        <p:txBody>
+          <a:bodyPr spcFirstLastPara="1" wrap="square" lIns="0" tIns="0" rIns="0" bIns="0" anchor="t" anchorCtr="0">
+            <a:spAutoFit/>
+          </a:bodyPr>
+          <a:lstStyle/>
+          <a:p>
+            <a:pPr marL="0" marR="0" lvl="0" indent="0" algn="l" rtl="0">
+              <a:lnSpc>
+                <a:spcPct val="140000"/>
+              </a:lnSpc>
+              <a:spcBef>
+                <a:spcPts val="0"/>
+              </a:spcBef>
+              <a:spcAft>
+                <a:spcPts val="0"/>
+              </a:spcAft>
+              <a:buNone/>
+            </a:pPr>
+            <a:r>
+              <a:rPr lang="en-US" sz="1500" b="0" i="0" u="none" strike="noStrike" cap="none">
+                <a:solidFill>
+                  <a:srgbClr val="334155"/>
+                </a:solidFill>
+                <a:latin typeface="Urbanist"/>
+                <a:ea typeface="Urbanist"/>
+                <a:cs typeface="Urbanist"/>
+                <a:sym typeface="Urbanist"/>
+              </a:rPr>
+              <a:t>Ép LLM giải thích tường tận tư duy: </a:t>
+            </a:r>
+            <a:r>
+              <a:rPr lang="en-US" sz="1500" b="0" i="1" u="none" strike="noStrike" cap="none">
+                <a:solidFill>
+                  <a:srgbClr val="334155"/>
+                </a:solidFill>
+                <a:latin typeface="Urbanist"/>
+                <a:ea typeface="Urbanist"/>
+                <a:cs typeface="Urbanist"/>
+                <a:sym typeface="Urbanist"/>
+              </a:rPr>
+              <a:t>Toán 8.5 + Tính cách hướng nội + Thích máy tính → Khoa học dữ liệu.</a:t>
+            </a:r>
+            <a:endParaRPr/>
+          </a:p>
+        </p:txBody>
+      </p:sp>
+      <p:pic>
+        <p:nvPicPr>
+          <p:cNvPr id="171" name="Google Shape;171;p17" descr="image.png"/>
+          <p:cNvPicPr preferRelativeResize="0"/>
+          <p:nvPr/>
+        </p:nvPicPr>
+        <p:blipFill rotWithShape="1">
+          <a:blip r:embed="rId7">
+            <a:alphaModFix/>
+          </a:blip>
+          <a:srcRect/>
+          <a:stretch/>
+        </p:blipFill>
+        <p:spPr>
+          <a:xfrm>
+            <a:off x="8630017" y="2476500"/>
+            <a:ext cx="2954064" cy="381000"/>
+          </a:xfrm>
+          <a:prstGeom prst="rect">
+            <a:avLst/>
+          </a:prstGeom>
+          <a:noFill/>
+          <a:ln>
+            <a:noFill/>
+          </a:ln>
+        </p:spPr>
+      </p:pic>
+      <p:sp>
+        <p:nvSpPr>
+          <p:cNvPr id="172" name="Google Shape;172;p17"/>
+          <p:cNvSpPr txBox="1"/>
+          <p:nvPr/>
+        </p:nvSpPr>
+        <p:spPr>
+          <a:xfrm>
+            <a:off x="8695673" y="3000375"/>
+            <a:ext cx="3101767" cy="276225"/>
+          </a:xfrm>
+          <a:prstGeom prst="rect">
+            <a:avLst/>
+          </a:prstGeom>
+          <a:noFill/>
+          <a:ln>
+            <a:noFill/>
+          </a:ln>
+        </p:spPr>
+        <p:txBody>
+          <a:bodyPr spcFirstLastPara="1" wrap="square" lIns="0" tIns="0" rIns="0" bIns="0" anchor="ctr" anchorCtr="0">
+            <a:spAutoFit/>
+          </a:bodyPr>
+          <a:lstStyle/>
+          <a:p>
+            <a:pPr marL="0" marR="0" lvl="0" indent="0" algn="l" rtl="0">
+              <a:spcBef>
+                <a:spcPts val="0"/>
+              </a:spcBef>
+              <a:spcAft>
+                <a:spcPts val="0"/>
+              </a:spcAft>
+              <a:buNone/>
+            </a:pPr>
+            <a:r>
+              <a:rPr lang="en-US" sz="1800" b="1" i="0" u="none" strike="noStrike" cap="none">
+                <a:solidFill>
+                  <a:srgbClr val="0F172A"/>
+                </a:solidFill>
+                <a:latin typeface="Urbanist"/>
+                <a:ea typeface="Urbanist"/>
+                <a:cs typeface="Urbanist"/>
+                <a:sym typeface="Urbanist"/>
+              </a:rPr>
+              <a:t>XAI Visualization</a:t>
+            </a:r>
+            <a:endParaRPr/>
+          </a:p>
+        </p:txBody>
+      </p:sp>
+      <p:sp>
+        <p:nvSpPr>
+          <p:cNvPr id="173" name="Google Shape;173;p17"/>
+          <p:cNvSpPr txBox="1"/>
+          <p:nvPr/>
+        </p:nvSpPr>
+        <p:spPr>
+          <a:xfrm>
+            <a:off x="8630017" y="3838575"/>
+            <a:ext cx="2954064" cy="969496"/>
+          </a:xfrm>
+          <a:prstGeom prst="rect">
+            <a:avLst/>
+          </a:prstGeom>
+          <a:noFill/>
+          <a:ln>
+            <a:noFill/>
+          </a:ln>
+        </p:spPr>
+        <p:txBody>
+          <a:bodyPr spcFirstLastPara="1" wrap="square" lIns="0" tIns="0" rIns="0" bIns="0" anchor="t" anchorCtr="0">
+            <a:spAutoFit/>
+          </a:bodyPr>
+          <a:lstStyle/>
+          <a:p>
+            <a:pPr marL="0" marR="0" lvl="0" indent="0" algn="l" rtl="0">
+              <a:lnSpc>
+                <a:spcPct val="140000"/>
+              </a:lnSpc>
+              <a:spcBef>
+                <a:spcPts val="0"/>
+              </a:spcBef>
+              <a:spcAft>
+                <a:spcPts val="0"/>
+              </a:spcAft>
+              <a:buNone/>
+            </a:pPr>
+            <a:r>
+              <a:rPr lang="en-US" sz="1500" b="0" i="0" u="none" strike="noStrike" cap="none">
+                <a:solidFill>
+                  <a:srgbClr val="334155"/>
+                </a:solidFill>
+                <a:latin typeface="Urbanist"/>
+                <a:ea typeface="Urbanist"/>
+                <a:cs typeface="Urbanist"/>
+                <a:sym typeface="Urbanist"/>
+              </a:rPr>
+              <a:t>Dùng SHAP/LIME vẽ biểu đồ trọng số đóng góp: Điểm số (40%), Tài chính (30%), Trực giác (30%).</a:t>
+            </a:r>
+            <a:endParaRPr/>
+          </a:p>
+        </p:txBody>
+      </p:sp>
+      <p:pic>
+        <p:nvPicPr>
+          <p:cNvPr id="17" name="Google Shape;85;p13" descr="image.png">
+            <a:extLst>
+              <a:ext uri="{FF2B5EF4-FFF2-40B4-BE49-F238E27FC236}">
+                <a16:creationId xmlns:a16="http://schemas.microsoft.com/office/drawing/2014/main" id="{CAB794E9-2317-41A1-9598-10D921C6AB95}"/>
+              </a:ext>
+            </a:extLst>
+          </p:cNvPr>
+          <p:cNvPicPr preferRelativeResize="0"/>
+          <p:nvPr/>
+        </p:nvPicPr>
+        <p:blipFill rotWithShape="1">
+          <a:blip r:embed="rId8">
+            <a:alphaModFix/>
+          </a:blip>
+          <a:srcRect/>
+          <a:stretch/>
+        </p:blipFill>
+        <p:spPr>
+          <a:xfrm>
+            <a:off x="1047750" y="2181225"/>
+            <a:ext cx="3248025" cy="3257550"/>
+          </a:xfrm>
+          <a:prstGeom prst="rect">
+            <a:avLst/>
+          </a:prstGeom>
+          <a:noFill/>
+          <a:ln>
+            <a:noFill/>
+          </a:ln>
+        </p:spPr>
+      </p:pic>
+      <p:sp>
+        <p:nvSpPr>
+          <p:cNvPr id="18" name="Google Shape;92;p13">
+            <a:extLst>
+              <a:ext uri="{FF2B5EF4-FFF2-40B4-BE49-F238E27FC236}">
+                <a16:creationId xmlns:a16="http://schemas.microsoft.com/office/drawing/2014/main" id="{4F24C88E-DEED-4991-9EA0-3B484C14DC5C}"/>
+              </a:ext>
+            </a:extLst>
+          </p:cNvPr>
+          <p:cNvSpPr txBox="1"/>
+          <p:nvPr/>
+        </p:nvSpPr>
+        <p:spPr>
+          <a:xfrm>
+            <a:off x="1657350" y="2419350"/>
+            <a:ext cx="2502274" cy="276225"/>
+          </a:xfrm>
+          <a:prstGeom prst="rect">
+            <a:avLst/>
+          </a:prstGeom>
+          <a:noFill/>
+          <a:ln>
+            <a:noFill/>
+          </a:ln>
+        </p:spPr>
+        <p:txBody>
+          <a:bodyPr spcFirstLastPara="1" wrap="square" lIns="0" tIns="0" rIns="0" bIns="0" anchor="ctr" anchorCtr="0">
+            <a:spAutoFit/>
+          </a:bodyPr>
+          <a:lstStyle/>
+          <a:p>
+            <a:pPr marL="0" marR="0" lvl="0" indent="0" algn="l" rtl="0">
+              <a:spcBef>
+                <a:spcPts val="0"/>
+              </a:spcBef>
+              <a:spcAft>
+                <a:spcPts val="0"/>
+              </a:spcAft>
+              <a:buNone/>
+            </a:pPr>
+            <a:r>
+              <a:rPr lang="en-US" sz="1800" b="1" i="0" u="none" strike="noStrike" cap="none">
+                <a:solidFill>
+                  <a:srgbClr val="B91C1C"/>
+                </a:solidFill>
+                <a:latin typeface="Urbanist"/>
+                <a:ea typeface="Urbanist"/>
+                <a:cs typeface="Urbanist"/>
+                <a:sym typeface="Urbanist"/>
+              </a:rPr>
+              <a:t>Rủi ro</a:t>
+            </a:r>
+            <a:endParaRPr/>
+          </a:p>
+        </p:txBody>
+      </p:sp>
+      <p:sp>
+        <p:nvSpPr>
+          <p:cNvPr id="19" name="Google Shape;93;p13">
+            <a:extLst>
+              <a:ext uri="{FF2B5EF4-FFF2-40B4-BE49-F238E27FC236}">
+                <a16:creationId xmlns:a16="http://schemas.microsoft.com/office/drawing/2014/main" id="{45A75E3A-9E9E-4516-B29F-1F775767097F}"/>
+              </a:ext>
+            </a:extLst>
+          </p:cNvPr>
+          <p:cNvSpPr txBox="1"/>
+          <p:nvPr/>
+        </p:nvSpPr>
+        <p:spPr>
+          <a:xfrm>
+            <a:off x="1333500" y="2924175"/>
+            <a:ext cx="2745441" cy="1615827"/>
+          </a:xfrm>
+          <a:prstGeom prst="rect">
+            <a:avLst/>
+          </a:prstGeom>
+          <a:noFill/>
+          <a:ln>
+            <a:noFill/>
+          </a:ln>
+        </p:spPr>
+        <p:txBody>
+          <a:bodyPr spcFirstLastPara="1" wrap="square" lIns="0" tIns="0" rIns="0" bIns="0" anchor="t" anchorCtr="0">
+            <a:spAutoFit/>
+          </a:bodyPr>
+          <a:lstStyle/>
+          <a:p>
+            <a:pPr lvl="0">
+              <a:lnSpc>
+                <a:spcPct val="140000"/>
+              </a:lnSpc>
+            </a:pPr>
+            <a:r>
+              <a:rPr lang="vi-VN" sz="1500">
+                <a:solidFill>
+                  <a:srgbClr val="334155"/>
+                </a:solidFill>
+                <a:latin typeface="Urbanist"/>
+                <a:ea typeface="Urbanist"/>
+                <a:cs typeface="Urbanist"/>
+                <a:sym typeface="Urbanist"/>
+              </a:rPr>
+              <a:t>AI hoạt động như một "hộp đen" (Black box). Gợi ý một học sinh đi học ngành Công nghệ thông tin nhưng không giải thích lý do</a:t>
+            </a:r>
+            <a:r>
+              <a:rPr lang="en-US" sz="1500">
+                <a:solidFill>
+                  <a:srgbClr val="334155"/>
+                </a:solidFill>
+                <a:latin typeface="Urbanist"/>
+                <a:ea typeface="Urbanist"/>
+                <a:cs typeface="Urbanist"/>
+                <a:sym typeface="Urbanist"/>
+              </a:rPr>
+              <a:t>, giải thích chung chung</a:t>
+            </a:r>
+            <a:endParaRPr/>
+          </a:p>
+        </p:txBody>
+      </p:sp>
+      <p:pic>
+        <p:nvPicPr>
+          <p:cNvPr id="20" name="Google Shape;95;p13" descr="image.png">
+            <a:extLst>
+              <a:ext uri="{FF2B5EF4-FFF2-40B4-BE49-F238E27FC236}">
+                <a16:creationId xmlns:a16="http://schemas.microsoft.com/office/drawing/2014/main" id="{4C405E92-5B8B-4404-8F32-DC908A85DB2D}"/>
+              </a:ext>
+            </a:extLst>
+          </p:cNvPr>
+          <p:cNvPicPr preferRelativeResize="0"/>
+          <p:nvPr/>
+        </p:nvPicPr>
+        <p:blipFill rotWithShape="1">
+          <a:blip r:embed="rId9">
+            <a:alphaModFix/>
+          </a:blip>
+          <a:srcRect/>
+          <a:stretch/>
+        </p:blipFill>
+        <p:spPr>
+          <a:xfrm>
+            <a:off x="1333500" y="2443162"/>
+            <a:ext cx="228600" cy="195238"/>
+          </a:xfrm>
+          <a:prstGeom prst="rect">
+            <a:avLst/>
+          </a:prstGeom>
+          <a:noFill/>
+          <a:ln>
+            <a:noFill/>
+          </a:ln>
+        </p:spPr>
+      </p:pic>
+    </p:spTree>
+  </p:cSld>
+  <p:clrMapOvr>
+    <a:masterClrMapping/>
+  </p:clrMapOvr>
+</p:sld>
+</file>
+
+<file path=ppt/slides/slide15.xml><?xml version="1.0" encoding="utf-8"?>
+<p:sld xmlns:a="http://schemas.openxmlformats.org/drawingml/2006/main" xmlns:r="http://schemas.openxmlformats.org/officeDocument/2006/relationships" xmlns:p="http://schemas.openxmlformats.org/presentationml/2006/main">
+  <p:cSld>
+    <p:bg>
+      <p:bgPr>
+        <a:solidFill>
+          <a:srgbClr val="0F172A"/>
+        </a:solidFill>
+        <a:effectLst/>
+      </p:bgPr>
+    </p:bg>
+    <p:spTree>
+      <p:nvGrpSpPr>
+        <p:cNvPr id="1" name="Shape 260"/>
+        <p:cNvGrpSpPr/>
+        <p:nvPr/>
+      </p:nvGrpSpPr>
+      <p:grpSpPr>
+        <a:xfrm>
+          <a:off x="0" y="0"/>
+          <a:ext cx="0" cy="0"/>
+          <a:chOff x="0" y="0"/>
+          <a:chExt cx="0" cy="0"/>
+        </a:xfrm>
+      </p:grpSpPr>
+      <p:pic>
+        <p:nvPicPr>
+          <p:cNvPr id="261" name="Google Shape;261;p23" descr="image.png"/>
+          <p:cNvPicPr preferRelativeResize="0"/>
+          <p:nvPr/>
+        </p:nvPicPr>
+        <p:blipFill rotWithShape="1">
+          <a:blip r:embed="rId3">
+            <a:alphaModFix/>
+          </a:blip>
+          <a:srcRect/>
+          <a:stretch/>
+        </p:blipFill>
+        <p:spPr>
+          <a:xfrm>
+            <a:off x="0" y="0"/>
+            <a:ext cx="12192000" cy="6858000"/>
+          </a:xfrm>
+          <a:prstGeom prst="rect">
+            <a:avLst/>
+          </a:prstGeom>
+          <a:noFill/>
+          <a:ln>
+            <a:noFill/>
+          </a:ln>
+        </p:spPr>
+      </p:pic>
+      <p:sp>
+        <p:nvSpPr>
+          <p:cNvPr id="262" name="Google Shape;262;p23"/>
+          <p:cNvSpPr txBox="1"/>
+          <p:nvPr/>
+        </p:nvSpPr>
+        <p:spPr>
+          <a:xfrm>
+            <a:off x="1000125" y="2671762"/>
+            <a:ext cx="4857750" cy="609600"/>
+          </a:xfrm>
+          <a:prstGeom prst="rect">
+            <a:avLst/>
+          </a:prstGeom>
+          <a:noFill/>
+          <a:ln>
+            <a:noFill/>
+          </a:ln>
+        </p:spPr>
+        <p:txBody>
+          <a:bodyPr spcFirstLastPara="1" wrap="square" lIns="0" tIns="0" rIns="0" bIns="0" anchor="t" anchorCtr="0">
+            <a:spAutoFit/>
+          </a:bodyPr>
+          <a:lstStyle/>
+          <a:p>
+            <a:pPr marL="0" marR="0" lvl="0" indent="0" algn="l" rtl="0">
+              <a:lnSpc>
+                <a:spcPct val="160000"/>
+              </a:lnSpc>
+              <a:spcBef>
+                <a:spcPts val="0"/>
+              </a:spcBef>
+              <a:spcAft>
+                <a:spcPts val="0"/>
+              </a:spcAft>
+              <a:buNone/>
+            </a:pPr>
+            <a:r>
+              <a:rPr lang="en-US" sz="1500" b="0" i="0" u="none" strike="noStrike" cap="none">
+                <a:solidFill>
+                  <a:srgbClr val="94A3B8"/>
+                </a:solidFill>
+                <a:latin typeface="Inter"/>
+                <a:ea typeface="Inter"/>
+                <a:cs typeface="Inter"/>
+                <a:sym typeface="Inter"/>
+              </a:rPr>
+              <a:t>Xây dựng thành công hệ thống RAG + LLM hoàn chỉnh.</a:t>
+            </a:r>
+            <a:endParaRPr/>
+          </a:p>
+        </p:txBody>
+      </p:sp>
+      <p:sp>
+        <p:nvSpPr>
+          <p:cNvPr id="263" name="Google Shape;263;p23"/>
+          <p:cNvSpPr txBox="1"/>
+          <p:nvPr/>
+        </p:nvSpPr>
+        <p:spPr>
+          <a:xfrm>
+            <a:off x="1000125" y="3471862"/>
+            <a:ext cx="4857750" cy="369332"/>
+          </a:xfrm>
+          <a:prstGeom prst="rect">
+            <a:avLst/>
+          </a:prstGeom>
+          <a:noFill/>
+          <a:ln>
+            <a:noFill/>
+          </a:ln>
+        </p:spPr>
+        <p:txBody>
+          <a:bodyPr spcFirstLastPara="1" wrap="square" lIns="0" tIns="0" rIns="0" bIns="0" anchor="t" anchorCtr="0">
+            <a:spAutoFit/>
+          </a:bodyPr>
+          <a:lstStyle/>
+          <a:p>
+            <a:pPr marL="0" marR="0" lvl="0" indent="0" algn="l" rtl="0">
+              <a:lnSpc>
+                <a:spcPct val="160000"/>
+              </a:lnSpc>
+              <a:spcBef>
+                <a:spcPts val="0"/>
+              </a:spcBef>
+              <a:spcAft>
+                <a:spcPts val="0"/>
+              </a:spcAft>
+              <a:buNone/>
+            </a:pPr>
+            <a:r>
+              <a:rPr lang="en-US" sz="1500" b="0" i="0" u="none" strike="noStrike" cap="none">
+                <a:solidFill>
+                  <a:srgbClr val="94A3B8"/>
+                </a:solidFill>
+                <a:latin typeface="Inter"/>
+                <a:ea typeface="Inter"/>
+                <a:cs typeface="Inter"/>
+                <a:sym typeface="Inter"/>
+              </a:rPr>
+              <a:t>Chiến lược Fallback đảm bảo độ sẵn sàng 99.9%.</a:t>
+            </a:r>
+            <a:endParaRPr/>
+          </a:p>
+        </p:txBody>
+      </p:sp>
+      <p:sp>
+        <p:nvSpPr>
+          <p:cNvPr id="264" name="Google Shape;264;p23"/>
+          <p:cNvSpPr txBox="1"/>
+          <p:nvPr/>
+        </p:nvSpPr>
+        <p:spPr>
+          <a:xfrm>
+            <a:off x="1000125" y="4271962"/>
+            <a:ext cx="4857750" cy="304800"/>
+          </a:xfrm>
+          <a:prstGeom prst="rect">
+            <a:avLst/>
+          </a:prstGeom>
+          <a:noFill/>
+          <a:ln>
+            <a:noFill/>
+          </a:ln>
+        </p:spPr>
+        <p:txBody>
+          <a:bodyPr spcFirstLastPara="1" wrap="square" lIns="0" tIns="0" rIns="0" bIns="0" anchor="t" anchorCtr="0">
+            <a:spAutoFit/>
+          </a:bodyPr>
+          <a:lstStyle/>
+          <a:p>
+            <a:pPr marL="0" marR="0" lvl="0" indent="0" algn="l" rtl="0">
+              <a:lnSpc>
+                <a:spcPct val="160000"/>
+              </a:lnSpc>
+              <a:spcBef>
+                <a:spcPts val="0"/>
+              </a:spcBef>
+              <a:spcAft>
+                <a:spcPts val="0"/>
+              </a:spcAft>
+              <a:buNone/>
+            </a:pPr>
+            <a:r>
+              <a:rPr lang="en-US" sz="1500" b="0" i="0" u="none" strike="noStrike" cap="none">
+                <a:solidFill>
+                  <a:srgbClr val="94A3B8"/>
+                </a:solidFill>
+                <a:latin typeface="Inter"/>
+                <a:ea typeface="Inter"/>
+                <a:cs typeface="Inter"/>
+                <a:sym typeface="Inter"/>
+              </a:rPr>
+              <a:t>Cá nhân hóa tư vấn dựa trên Holland Code thực tế.</a:t>
+            </a:r>
+            <a:endParaRPr/>
+          </a:p>
+        </p:txBody>
+      </p:sp>
+      <p:sp>
+        <p:nvSpPr>
+          <p:cNvPr id="265" name="Google Shape;265;p23"/>
+          <p:cNvSpPr txBox="1"/>
+          <p:nvPr/>
+        </p:nvSpPr>
+        <p:spPr>
+          <a:xfrm>
+            <a:off x="6762750" y="2671762"/>
+            <a:ext cx="4857750" cy="609600"/>
+          </a:xfrm>
+          <a:prstGeom prst="rect">
+            <a:avLst/>
+          </a:prstGeom>
+          <a:noFill/>
+          <a:ln>
+            <a:noFill/>
+          </a:ln>
+        </p:spPr>
+        <p:txBody>
+          <a:bodyPr spcFirstLastPara="1" wrap="square" lIns="0" tIns="0" rIns="0" bIns="0" anchor="t" anchorCtr="0">
+            <a:spAutoFit/>
+          </a:bodyPr>
+          <a:lstStyle/>
+          <a:p>
+            <a:pPr marL="0" marR="0" lvl="0" indent="0" algn="l" rtl="0">
+              <a:lnSpc>
+                <a:spcPct val="160000"/>
+              </a:lnSpc>
+              <a:spcBef>
+                <a:spcPts val="0"/>
+              </a:spcBef>
+              <a:spcAft>
+                <a:spcPts val="0"/>
+              </a:spcAft>
+              <a:buNone/>
+            </a:pPr>
+            <a:r>
+              <a:rPr lang="en-US" sz="1500" b="0" i="0" u="none" strike="noStrike" cap="none">
+                <a:solidFill>
+                  <a:srgbClr val="94A3B8"/>
+                </a:solidFill>
+                <a:latin typeface="Inter"/>
+                <a:ea typeface="Inter"/>
+                <a:cs typeface="Inter"/>
+                <a:sym typeface="Inter"/>
+              </a:rPr>
+              <a:t>Thiết lập hàng rào bảo mật Anti-bias &amp; Anti-hallucination.</a:t>
+            </a:r>
+            <a:endParaRPr/>
+          </a:p>
+        </p:txBody>
+      </p:sp>
+      <p:sp>
+        <p:nvSpPr>
+          <p:cNvPr id="266" name="Google Shape;266;p23"/>
+          <p:cNvSpPr txBox="1"/>
+          <p:nvPr/>
+        </p:nvSpPr>
+        <p:spPr>
+          <a:xfrm>
+            <a:off x="6762750" y="3471862"/>
+            <a:ext cx="4857750" cy="609600"/>
+          </a:xfrm>
+          <a:prstGeom prst="rect">
+            <a:avLst/>
+          </a:prstGeom>
+          <a:noFill/>
+          <a:ln>
+            <a:noFill/>
+          </a:ln>
+        </p:spPr>
+        <p:txBody>
+          <a:bodyPr spcFirstLastPara="1" wrap="square" lIns="0" tIns="0" rIns="0" bIns="0" anchor="t" anchorCtr="0">
+            <a:spAutoFit/>
+          </a:bodyPr>
+          <a:lstStyle/>
+          <a:p>
+            <a:pPr marL="0" marR="0" lvl="0" indent="0" algn="l" rtl="0">
+              <a:lnSpc>
+                <a:spcPct val="160000"/>
+              </a:lnSpc>
+              <a:spcBef>
+                <a:spcPts val="0"/>
+              </a:spcBef>
+              <a:spcAft>
+                <a:spcPts val="0"/>
+              </a:spcAft>
+              <a:buNone/>
+            </a:pPr>
+            <a:r>
+              <a:rPr lang="en-US" sz="1500" b="0" i="0" u="none" strike="noStrike" cap="none">
+                <a:solidFill>
+                  <a:srgbClr val="94A3B8"/>
+                </a:solidFill>
+                <a:latin typeface="Inter"/>
+                <a:ea typeface="Inter"/>
+                <a:cs typeface="Inter"/>
+                <a:sym typeface="Inter"/>
+              </a:rPr>
+              <a:t>Giao diện Responsive hiện đại trên nền tảng Angular 17.</a:t>
+            </a:r>
+            <a:endParaRPr/>
+          </a:p>
+        </p:txBody>
+      </p:sp>
+      <p:sp>
+        <p:nvSpPr>
+          <p:cNvPr id="267" name="Google Shape;267;p23"/>
+          <p:cNvSpPr txBox="1"/>
+          <p:nvPr/>
+        </p:nvSpPr>
+        <p:spPr>
+          <a:xfrm>
+            <a:off x="6762750" y="4271962"/>
+            <a:ext cx="4857750" cy="609600"/>
+          </a:xfrm>
+          <a:prstGeom prst="rect">
+            <a:avLst/>
+          </a:prstGeom>
+          <a:noFill/>
+          <a:ln>
+            <a:noFill/>
+          </a:ln>
+        </p:spPr>
+        <p:txBody>
+          <a:bodyPr spcFirstLastPara="1" wrap="square" lIns="0" tIns="0" rIns="0" bIns="0" anchor="t" anchorCtr="0">
+            <a:spAutoFit/>
+          </a:bodyPr>
+          <a:lstStyle/>
+          <a:p>
+            <a:pPr marL="0" marR="0" lvl="0" indent="0" algn="l" rtl="0">
+              <a:lnSpc>
+                <a:spcPct val="160000"/>
+              </a:lnSpc>
+              <a:spcBef>
+                <a:spcPts val="0"/>
+              </a:spcBef>
+              <a:spcAft>
+                <a:spcPts val="0"/>
+              </a:spcAft>
+              <a:buNone/>
+            </a:pPr>
+            <a:r>
+              <a:rPr lang="en-US" sz="1500" b="0" i="0" u="none" strike="noStrike" cap="none">
+                <a:solidFill>
+                  <a:srgbClr val="94A3B8"/>
+                </a:solidFill>
+                <a:latin typeface="Inter"/>
+                <a:ea typeface="Inter"/>
+                <a:cs typeface="Inter"/>
+                <a:sym typeface="Inter"/>
+              </a:rPr>
+              <a:t>Hệ thống sẵn sàng cho việc mở rộng (Scalable architecture).</a:t>
+            </a:r>
+            <a:endParaRPr/>
+          </a:p>
+        </p:txBody>
+      </p:sp>
+      <p:pic>
+        <p:nvPicPr>
+          <p:cNvPr id="268" name="Google Shape;268;p23" descr="image.png"/>
+          <p:cNvPicPr preferRelativeResize="0"/>
+          <p:nvPr/>
+        </p:nvPicPr>
+        <p:blipFill rotWithShape="1">
+          <a:blip r:embed="rId4">
+            <a:alphaModFix/>
+          </a:blip>
+          <a:srcRect/>
+          <a:stretch/>
+        </p:blipFill>
+        <p:spPr>
+          <a:xfrm>
+            <a:off x="571500" y="2709862"/>
+            <a:ext cx="228600" cy="247650"/>
+          </a:xfrm>
+          <a:prstGeom prst="rect">
+            <a:avLst/>
+          </a:prstGeom>
+          <a:noFill/>
+          <a:ln>
+            <a:noFill/>
+          </a:ln>
+        </p:spPr>
+      </p:pic>
+      <p:pic>
+        <p:nvPicPr>
+          <p:cNvPr id="269" name="Google Shape;269;p23" descr="image.png"/>
+          <p:cNvPicPr preferRelativeResize="0"/>
+          <p:nvPr/>
+        </p:nvPicPr>
+        <p:blipFill rotWithShape="1">
+          <a:blip r:embed="rId4">
+            <a:alphaModFix/>
+          </a:blip>
+          <a:srcRect/>
+          <a:stretch/>
+        </p:blipFill>
+        <p:spPr>
+          <a:xfrm>
+            <a:off x="571500" y="3509962"/>
+            <a:ext cx="228600" cy="247650"/>
+          </a:xfrm>
+          <a:prstGeom prst="rect">
+            <a:avLst/>
+          </a:prstGeom>
+          <a:noFill/>
+          <a:ln>
+            <a:noFill/>
+          </a:ln>
+        </p:spPr>
+      </p:pic>
+      <p:pic>
+        <p:nvPicPr>
+          <p:cNvPr id="270" name="Google Shape;270;p23" descr="image.png"/>
+          <p:cNvPicPr preferRelativeResize="0"/>
+          <p:nvPr/>
+        </p:nvPicPr>
+        <p:blipFill rotWithShape="1">
+          <a:blip r:embed="rId4">
+            <a:alphaModFix/>
+          </a:blip>
+          <a:srcRect/>
+          <a:stretch/>
+        </p:blipFill>
+        <p:spPr>
+          <a:xfrm>
+            <a:off x="571500" y="4310062"/>
+            <a:ext cx="228600" cy="247650"/>
+          </a:xfrm>
+          <a:prstGeom prst="rect">
+            <a:avLst/>
+          </a:prstGeom>
+          <a:noFill/>
+          <a:ln>
+            <a:noFill/>
+          </a:ln>
+        </p:spPr>
+      </p:pic>
+      <p:pic>
+        <p:nvPicPr>
+          <p:cNvPr id="271" name="Google Shape;271;p23" descr="image.png"/>
+          <p:cNvPicPr preferRelativeResize="0"/>
+          <p:nvPr/>
+        </p:nvPicPr>
+        <p:blipFill rotWithShape="1">
+          <a:blip r:embed="rId4">
+            <a:alphaModFix/>
+          </a:blip>
+          <a:srcRect/>
+          <a:stretch/>
+        </p:blipFill>
+        <p:spPr>
+          <a:xfrm>
+            <a:off x="6334125" y="2709862"/>
+            <a:ext cx="228600" cy="247650"/>
+          </a:xfrm>
+          <a:prstGeom prst="rect">
+            <a:avLst/>
+          </a:prstGeom>
+          <a:noFill/>
+          <a:ln>
+            <a:noFill/>
+          </a:ln>
+        </p:spPr>
+      </p:pic>
+      <p:pic>
+        <p:nvPicPr>
+          <p:cNvPr id="272" name="Google Shape;272;p23" descr="image.png"/>
+          <p:cNvPicPr preferRelativeResize="0"/>
+          <p:nvPr/>
+        </p:nvPicPr>
+        <p:blipFill rotWithShape="1">
+          <a:blip r:embed="rId4">
+            <a:alphaModFix/>
+          </a:blip>
+          <a:srcRect/>
+          <a:stretch/>
+        </p:blipFill>
+        <p:spPr>
+          <a:xfrm>
+            <a:off x="6334125" y="3509962"/>
+            <a:ext cx="228600" cy="247650"/>
+          </a:xfrm>
+          <a:prstGeom prst="rect">
+            <a:avLst/>
+          </a:prstGeom>
+          <a:noFill/>
+          <a:ln>
+            <a:noFill/>
+          </a:ln>
+        </p:spPr>
+      </p:pic>
+      <p:pic>
+        <p:nvPicPr>
+          <p:cNvPr id="273" name="Google Shape;273;p23" descr="image.png"/>
+          <p:cNvPicPr preferRelativeResize="0"/>
+          <p:nvPr/>
+        </p:nvPicPr>
+        <p:blipFill rotWithShape="1">
+          <a:blip r:embed="rId4">
+            <a:alphaModFix/>
+          </a:blip>
+          <a:srcRect/>
+          <a:stretch/>
+        </p:blipFill>
+        <p:spPr>
+          <a:xfrm>
+            <a:off x="6334125" y="4310062"/>
+            <a:ext cx="228600" cy="247650"/>
+          </a:xfrm>
+          <a:prstGeom prst="rect">
+            <a:avLst/>
+          </a:prstGeom>
+          <a:noFill/>
+          <a:ln>
+            <a:noFill/>
+          </a:ln>
+        </p:spPr>
+      </p:pic>
+      <p:sp>
+        <p:nvSpPr>
+          <p:cNvPr id="274" name="Google Shape;274;p23"/>
+          <p:cNvSpPr txBox="1"/>
+          <p:nvPr/>
+        </p:nvSpPr>
+        <p:spPr>
+          <a:xfrm>
+            <a:off x="809625" y="571500"/>
+            <a:ext cx="11351418" cy="504825"/>
+          </a:xfrm>
+          <a:prstGeom prst="rect">
+            <a:avLst/>
+          </a:prstGeom>
+          <a:noFill/>
+          <a:ln>
+            <a:noFill/>
+          </a:ln>
+        </p:spPr>
+        <p:txBody>
+          <a:bodyPr spcFirstLastPara="1" wrap="square" lIns="0" tIns="0" rIns="0" bIns="0" anchor="t" anchorCtr="0">
+            <a:spAutoFit/>
+          </a:bodyPr>
+          <a:lstStyle/>
+          <a:p>
+            <a:pPr marL="0" marR="0" lvl="0" indent="0" algn="l" rtl="0">
+              <a:spcBef>
+                <a:spcPts val="0"/>
+              </a:spcBef>
+              <a:spcAft>
+                <a:spcPts val="0"/>
+              </a:spcAft>
+              <a:buNone/>
+            </a:pPr>
+            <a:r>
+              <a:rPr lang="en-US" sz="3300" b="1" i="0" u="none" strike="noStrike" cap="none">
+                <a:solidFill>
+                  <a:srgbClr val="FFFFFF"/>
+                </a:solidFill>
+                <a:latin typeface="Urbanist"/>
+                <a:ea typeface="Urbanist"/>
+                <a:cs typeface="Urbanist"/>
+                <a:sym typeface="Urbanist"/>
+              </a:rPr>
+              <a:t>Thành tựu &amp; Kết quả Đạt được</a:t>
+            </a:r>
+            <a:endParaRPr/>
+          </a:p>
+        </p:txBody>
+      </p:sp>
+      <p:sp>
+        <p:nvSpPr>
+          <p:cNvPr id="275" name="Google Shape;275;p23"/>
+          <p:cNvSpPr/>
+          <p:nvPr/>
+        </p:nvSpPr>
+        <p:spPr>
+          <a:xfrm>
+            <a:off x="571500" y="571500"/>
+            <a:ext cx="57150" cy="504825"/>
+          </a:xfrm>
+          <a:prstGeom prst="rect">
+            <a:avLst/>
+          </a:prstGeom>
+          <a:solidFill>
+            <a:srgbClr val="06B6D4"/>
+          </a:solidFill>
+          <a:ln>
+            <a:noFill/>
+          </a:ln>
+        </p:spPr>
+        <p:txBody>
+          <a:bodyPr spcFirstLastPara="1" wrap="square" lIns="91425" tIns="45700" rIns="91425" bIns="45700" anchor="ctr" anchorCtr="0">
+            <a:noAutofit/>
+          </a:bodyPr>
+          <a:lstStyle/>
+          <a:p>
+            <a:pPr marL="0" marR="0" lvl="0" indent="0" algn="ctr" rtl="0">
+              <a:spcBef>
+                <a:spcPts val="0"/>
+              </a:spcBef>
+              <a:spcAft>
+                <a:spcPts val="0"/>
+              </a:spcAft>
+              <a:buNone/>
+            </a:pPr>
+            <a:endParaRPr sz="1800" b="0" i="0" u="none" strike="noStrike" cap="none">
+              <a:solidFill>
+                <a:schemeClr val="dk1"/>
+              </a:solidFill>
+              <a:latin typeface="Calibri"/>
+              <a:ea typeface="Calibri"/>
+              <a:cs typeface="Calibri"/>
+              <a:sym typeface="Calibri"/>
+            </a:endParaRPr>
+          </a:p>
+        </p:txBody>
+      </p:sp>
+    </p:spTree>
+  </p:cSld>
+  <p:clrMapOvr>
+    <a:masterClrMapping/>
+  </p:clrMapOvr>
+</p:sld>
+</file>
+
+<file path=ppt/slides/slide16.xml><?xml version="1.0" encoding="utf-8"?>
 <p:sld xmlns:a="http://schemas.openxmlformats.org/drawingml/2006/main" xmlns:r="http://schemas.openxmlformats.org/officeDocument/2006/relationships" xmlns:p="http://schemas.openxmlformats.org/presentationml/2006/main">
   <p:cSld>
     <p:bg>
@@ -15419,645 +19337,7 @@
 </p:sld>
 </file>
 
-<file path=ppt/slides/slide12.xml><?xml version="1.0" encoding="utf-8"?>
-<p:sld xmlns:a="http://schemas.openxmlformats.org/drawingml/2006/main" xmlns:r="http://schemas.openxmlformats.org/officeDocument/2006/relationships" xmlns:p="http://schemas.openxmlformats.org/presentationml/2006/main">
-  <p:cSld>
-    <p:bg>
-      <p:bgPr>
-        <a:solidFill>
-          <a:srgbClr val="0F172A"/>
-        </a:solidFill>
-        <a:effectLst/>
-      </p:bgPr>
-    </p:bg>
-    <p:spTree>
-      <p:nvGrpSpPr>
-        <p:cNvPr id="1" name="Shape 260"/>
-        <p:cNvGrpSpPr/>
-        <p:nvPr/>
-      </p:nvGrpSpPr>
-      <p:grpSpPr>
-        <a:xfrm>
-          <a:off x="0" y="0"/>
-          <a:ext cx="0" cy="0"/>
-          <a:chOff x="0" y="0"/>
-          <a:chExt cx="0" cy="0"/>
-        </a:xfrm>
-      </p:grpSpPr>
-      <p:pic>
-        <p:nvPicPr>
-          <p:cNvPr id="261" name="Google Shape;261;p23" descr="image.png"/>
-          <p:cNvPicPr preferRelativeResize="0"/>
-          <p:nvPr/>
-        </p:nvPicPr>
-        <p:blipFill rotWithShape="1">
-          <a:blip r:embed="rId3">
-            <a:alphaModFix/>
-          </a:blip>
-          <a:srcRect/>
-          <a:stretch/>
-        </p:blipFill>
-        <p:spPr>
-          <a:xfrm>
-            <a:off x="0" y="0"/>
-            <a:ext cx="12192000" cy="6858000"/>
-          </a:xfrm>
-          <a:prstGeom prst="rect">
-            <a:avLst/>
-          </a:prstGeom>
-          <a:noFill/>
-          <a:ln>
-            <a:noFill/>
-          </a:ln>
-        </p:spPr>
-      </p:pic>
-      <p:sp>
-        <p:nvSpPr>
-          <p:cNvPr id="262" name="Google Shape;262;p23"/>
-          <p:cNvSpPr txBox="1"/>
-          <p:nvPr/>
-        </p:nvSpPr>
-        <p:spPr>
-          <a:xfrm>
-            <a:off x="1000125" y="2671762"/>
-            <a:ext cx="4857750" cy="609600"/>
-          </a:xfrm>
-          <a:prstGeom prst="rect">
-            <a:avLst/>
-          </a:prstGeom>
-          <a:noFill/>
-          <a:ln>
-            <a:noFill/>
-          </a:ln>
-        </p:spPr>
-        <p:txBody>
-          <a:bodyPr spcFirstLastPara="1" wrap="square" lIns="0" tIns="0" rIns="0" bIns="0" anchor="t" anchorCtr="0">
-            <a:spAutoFit/>
-          </a:bodyPr>
-          <a:lstStyle/>
-          <a:p>
-            <a:pPr marL="0" marR="0" lvl="0" indent="0" algn="l" rtl="0">
-              <a:lnSpc>
-                <a:spcPct val="160000"/>
-              </a:lnSpc>
-              <a:spcBef>
-                <a:spcPts val="0"/>
-              </a:spcBef>
-              <a:spcAft>
-                <a:spcPts val="0"/>
-              </a:spcAft>
-              <a:buNone/>
-            </a:pPr>
-            <a:r>
-              <a:rPr lang="en-US" sz="1500" b="0" i="0" u="none" strike="noStrike" cap="none">
-                <a:solidFill>
-                  <a:srgbClr val="94A3B8"/>
-                </a:solidFill>
-                <a:latin typeface="Inter"/>
-                <a:ea typeface="Inter"/>
-                <a:cs typeface="Inter"/>
-                <a:sym typeface="Inter"/>
-              </a:rPr>
-              <a:t>Xây dựng thành công hệ thống RAG + LLM hoàn chỉnh.</a:t>
-            </a:r>
-            <a:endParaRPr/>
-          </a:p>
-        </p:txBody>
-      </p:sp>
-      <p:sp>
-        <p:nvSpPr>
-          <p:cNvPr id="263" name="Google Shape;263;p23"/>
-          <p:cNvSpPr txBox="1"/>
-          <p:nvPr/>
-        </p:nvSpPr>
-        <p:spPr>
-          <a:xfrm>
-            <a:off x="1000125" y="3471862"/>
-            <a:ext cx="4857750" cy="609600"/>
-          </a:xfrm>
-          <a:prstGeom prst="rect">
-            <a:avLst/>
-          </a:prstGeom>
-          <a:noFill/>
-          <a:ln>
-            <a:noFill/>
-          </a:ln>
-        </p:spPr>
-        <p:txBody>
-          <a:bodyPr spcFirstLastPara="1" wrap="square" lIns="0" tIns="0" rIns="0" bIns="0" anchor="t" anchorCtr="0">
-            <a:spAutoFit/>
-          </a:bodyPr>
-          <a:lstStyle/>
-          <a:p>
-            <a:pPr marL="0" marR="0" lvl="0" indent="0" algn="l" rtl="0">
-              <a:lnSpc>
-                <a:spcPct val="160000"/>
-              </a:lnSpc>
-              <a:spcBef>
-                <a:spcPts val="0"/>
-              </a:spcBef>
-              <a:spcAft>
-                <a:spcPts val="0"/>
-              </a:spcAft>
-              <a:buNone/>
-            </a:pPr>
-            <a:r>
-              <a:rPr lang="en-US" sz="1500" b="0" i="0" u="none" strike="noStrike" cap="none">
-                <a:solidFill>
-                  <a:srgbClr val="94A3B8"/>
-                </a:solidFill>
-                <a:latin typeface="Inter"/>
-                <a:ea typeface="Inter"/>
-                <a:cs typeface="Inter"/>
-                <a:sym typeface="Inter"/>
-              </a:rPr>
-              <a:t>Chiến lược Fallback 3 cấp độ đảm bảo độ sẵn sàng 99.9%.</a:t>
-            </a:r>
-            <a:endParaRPr/>
-          </a:p>
-        </p:txBody>
-      </p:sp>
-      <p:sp>
-        <p:nvSpPr>
-          <p:cNvPr id="264" name="Google Shape;264;p23"/>
-          <p:cNvSpPr txBox="1"/>
-          <p:nvPr/>
-        </p:nvSpPr>
-        <p:spPr>
-          <a:xfrm>
-            <a:off x="1000125" y="4271962"/>
-            <a:ext cx="4857750" cy="304800"/>
-          </a:xfrm>
-          <a:prstGeom prst="rect">
-            <a:avLst/>
-          </a:prstGeom>
-          <a:noFill/>
-          <a:ln>
-            <a:noFill/>
-          </a:ln>
-        </p:spPr>
-        <p:txBody>
-          <a:bodyPr spcFirstLastPara="1" wrap="square" lIns="0" tIns="0" rIns="0" bIns="0" anchor="t" anchorCtr="0">
-            <a:spAutoFit/>
-          </a:bodyPr>
-          <a:lstStyle/>
-          <a:p>
-            <a:pPr marL="0" marR="0" lvl="0" indent="0" algn="l" rtl="0">
-              <a:lnSpc>
-                <a:spcPct val="160000"/>
-              </a:lnSpc>
-              <a:spcBef>
-                <a:spcPts val="0"/>
-              </a:spcBef>
-              <a:spcAft>
-                <a:spcPts val="0"/>
-              </a:spcAft>
-              <a:buNone/>
-            </a:pPr>
-            <a:r>
-              <a:rPr lang="en-US" sz="1500" b="0" i="0" u="none" strike="noStrike" cap="none">
-                <a:solidFill>
-                  <a:srgbClr val="94A3B8"/>
-                </a:solidFill>
-                <a:latin typeface="Inter"/>
-                <a:ea typeface="Inter"/>
-                <a:cs typeface="Inter"/>
-                <a:sym typeface="Inter"/>
-              </a:rPr>
-              <a:t>Cá nhân hóa tư vấn dựa trên Holland Code thực tế.</a:t>
-            </a:r>
-            <a:endParaRPr/>
-          </a:p>
-        </p:txBody>
-      </p:sp>
-      <p:sp>
-        <p:nvSpPr>
-          <p:cNvPr id="265" name="Google Shape;265;p23"/>
-          <p:cNvSpPr txBox="1"/>
-          <p:nvPr/>
-        </p:nvSpPr>
-        <p:spPr>
-          <a:xfrm>
-            <a:off x="6762750" y="2671762"/>
-            <a:ext cx="4857750" cy="609600"/>
-          </a:xfrm>
-          <a:prstGeom prst="rect">
-            <a:avLst/>
-          </a:prstGeom>
-          <a:noFill/>
-          <a:ln>
-            <a:noFill/>
-          </a:ln>
-        </p:spPr>
-        <p:txBody>
-          <a:bodyPr spcFirstLastPara="1" wrap="square" lIns="0" tIns="0" rIns="0" bIns="0" anchor="t" anchorCtr="0">
-            <a:spAutoFit/>
-          </a:bodyPr>
-          <a:lstStyle/>
-          <a:p>
-            <a:pPr marL="0" marR="0" lvl="0" indent="0" algn="l" rtl="0">
-              <a:lnSpc>
-                <a:spcPct val="160000"/>
-              </a:lnSpc>
-              <a:spcBef>
-                <a:spcPts val="0"/>
-              </a:spcBef>
-              <a:spcAft>
-                <a:spcPts val="0"/>
-              </a:spcAft>
-              <a:buNone/>
-            </a:pPr>
-            <a:r>
-              <a:rPr lang="en-US" sz="1500" b="0" i="0" u="none" strike="noStrike" cap="none">
-                <a:solidFill>
-                  <a:srgbClr val="94A3B8"/>
-                </a:solidFill>
-                <a:latin typeface="Inter"/>
-                <a:ea typeface="Inter"/>
-                <a:cs typeface="Inter"/>
-                <a:sym typeface="Inter"/>
-              </a:rPr>
-              <a:t>Thiết lập hàng rào bảo mật Anti-bias &amp; Anti-hallucination.</a:t>
-            </a:r>
-            <a:endParaRPr/>
-          </a:p>
-        </p:txBody>
-      </p:sp>
-      <p:sp>
-        <p:nvSpPr>
-          <p:cNvPr id="266" name="Google Shape;266;p23"/>
-          <p:cNvSpPr txBox="1"/>
-          <p:nvPr/>
-        </p:nvSpPr>
-        <p:spPr>
-          <a:xfrm>
-            <a:off x="6762750" y="3471862"/>
-            <a:ext cx="4857750" cy="609600"/>
-          </a:xfrm>
-          <a:prstGeom prst="rect">
-            <a:avLst/>
-          </a:prstGeom>
-          <a:noFill/>
-          <a:ln>
-            <a:noFill/>
-          </a:ln>
-        </p:spPr>
-        <p:txBody>
-          <a:bodyPr spcFirstLastPara="1" wrap="square" lIns="0" tIns="0" rIns="0" bIns="0" anchor="t" anchorCtr="0">
-            <a:spAutoFit/>
-          </a:bodyPr>
-          <a:lstStyle/>
-          <a:p>
-            <a:pPr marL="0" marR="0" lvl="0" indent="0" algn="l" rtl="0">
-              <a:lnSpc>
-                <a:spcPct val="160000"/>
-              </a:lnSpc>
-              <a:spcBef>
-                <a:spcPts val="0"/>
-              </a:spcBef>
-              <a:spcAft>
-                <a:spcPts val="0"/>
-              </a:spcAft>
-              <a:buNone/>
-            </a:pPr>
-            <a:r>
-              <a:rPr lang="en-US" sz="1500" b="0" i="0" u="none" strike="noStrike" cap="none">
-                <a:solidFill>
-                  <a:srgbClr val="94A3B8"/>
-                </a:solidFill>
-                <a:latin typeface="Inter"/>
-                <a:ea typeface="Inter"/>
-                <a:cs typeface="Inter"/>
-                <a:sym typeface="Inter"/>
-              </a:rPr>
-              <a:t>Giao diện Responsive hiện đại trên nền tảng Angular 17.</a:t>
-            </a:r>
-            <a:endParaRPr/>
-          </a:p>
-        </p:txBody>
-      </p:sp>
-      <p:sp>
-        <p:nvSpPr>
-          <p:cNvPr id="267" name="Google Shape;267;p23"/>
-          <p:cNvSpPr txBox="1"/>
-          <p:nvPr/>
-        </p:nvSpPr>
-        <p:spPr>
-          <a:xfrm>
-            <a:off x="6762750" y="4271962"/>
-            <a:ext cx="4857750" cy="609600"/>
-          </a:xfrm>
-          <a:prstGeom prst="rect">
-            <a:avLst/>
-          </a:prstGeom>
-          <a:noFill/>
-          <a:ln>
-            <a:noFill/>
-          </a:ln>
-        </p:spPr>
-        <p:txBody>
-          <a:bodyPr spcFirstLastPara="1" wrap="square" lIns="0" tIns="0" rIns="0" bIns="0" anchor="t" anchorCtr="0">
-            <a:spAutoFit/>
-          </a:bodyPr>
-          <a:lstStyle/>
-          <a:p>
-            <a:pPr marL="0" marR="0" lvl="0" indent="0" algn="l" rtl="0">
-              <a:lnSpc>
-                <a:spcPct val="160000"/>
-              </a:lnSpc>
-              <a:spcBef>
-                <a:spcPts val="0"/>
-              </a:spcBef>
-              <a:spcAft>
-                <a:spcPts val="0"/>
-              </a:spcAft>
-              <a:buNone/>
-            </a:pPr>
-            <a:r>
-              <a:rPr lang="en-US" sz="1500" b="0" i="0" u="none" strike="noStrike" cap="none">
-                <a:solidFill>
-                  <a:srgbClr val="94A3B8"/>
-                </a:solidFill>
-                <a:latin typeface="Inter"/>
-                <a:ea typeface="Inter"/>
-                <a:cs typeface="Inter"/>
-                <a:sym typeface="Inter"/>
-              </a:rPr>
-              <a:t>Hệ thống sẵn sàng cho việc mở rộng (Scalable architecture).</a:t>
-            </a:r>
-            <a:endParaRPr/>
-          </a:p>
-        </p:txBody>
-      </p:sp>
-      <p:pic>
-        <p:nvPicPr>
-          <p:cNvPr id="268" name="Google Shape;268;p23" descr="image.png"/>
-          <p:cNvPicPr preferRelativeResize="0"/>
-          <p:nvPr/>
-        </p:nvPicPr>
-        <p:blipFill rotWithShape="1">
-          <a:blip r:embed="rId4">
-            <a:alphaModFix/>
-          </a:blip>
-          <a:srcRect/>
-          <a:stretch/>
-        </p:blipFill>
-        <p:spPr>
-          <a:xfrm>
-            <a:off x="571500" y="2709862"/>
-            <a:ext cx="228600" cy="247650"/>
-          </a:xfrm>
-          <a:prstGeom prst="rect">
-            <a:avLst/>
-          </a:prstGeom>
-          <a:noFill/>
-          <a:ln>
-            <a:noFill/>
-          </a:ln>
-        </p:spPr>
-      </p:pic>
-      <p:pic>
-        <p:nvPicPr>
-          <p:cNvPr id="269" name="Google Shape;269;p23" descr="image.png"/>
-          <p:cNvPicPr preferRelativeResize="0"/>
-          <p:nvPr/>
-        </p:nvPicPr>
-        <p:blipFill rotWithShape="1">
-          <a:blip r:embed="rId4">
-            <a:alphaModFix/>
-          </a:blip>
-          <a:srcRect/>
-          <a:stretch/>
-        </p:blipFill>
-        <p:spPr>
-          <a:xfrm>
-            <a:off x="571500" y="3509962"/>
-            <a:ext cx="228600" cy="247650"/>
-          </a:xfrm>
-          <a:prstGeom prst="rect">
-            <a:avLst/>
-          </a:prstGeom>
-          <a:noFill/>
-          <a:ln>
-            <a:noFill/>
-          </a:ln>
-        </p:spPr>
-      </p:pic>
-      <p:pic>
-        <p:nvPicPr>
-          <p:cNvPr id="270" name="Google Shape;270;p23" descr="image.png"/>
-          <p:cNvPicPr preferRelativeResize="0"/>
-          <p:nvPr/>
-        </p:nvPicPr>
-        <p:blipFill rotWithShape="1">
-          <a:blip r:embed="rId4">
-            <a:alphaModFix/>
-          </a:blip>
-          <a:srcRect/>
-          <a:stretch/>
-        </p:blipFill>
-        <p:spPr>
-          <a:xfrm>
-            <a:off x="571500" y="4310062"/>
-            <a:ext cx="228600" cy="247650"/>
-          </a:xfrm>
-          <a:prstGeom prst="rect">
-            <a:avLst/>
-          </a:prstGeom>
-          <a:noFill/>
-          <a:ln>
-            <a:noFill/>
-          </a:ln>
-        </p:spPr>
-      </p:pic>
-      <p:pic>
-        <p:nvPicPr>
-          <p:cNvPr id="271" name="Google Shape;271;p23" descr="image.png"/>
-          <p:cNvPicPr preferRelativeResize="0"/>
-          <p:nvPr/>
-        </p:nvPicPr>
-        <p:blipFill rotWithShape="1">
-          <a:blip r:embed="rId4">
-            <a:alphaModFix/>
-          </a:blip>
-          <a:srcRect/>
-          <a:stretch/>
-        </p:blipFill>
-        <p:spPr>
-          <a:xfrm>
-            <a:off x="6334125" y="2709862"/>
-            <a:ext cx="228600" cy="247650"/>
-          </a:xfrm>
-          <a:prstGeom prst="rect">
-            <a:avLst/>
-          </a:prstGeom>
-          <a:noFill/>
-          <a:ln>
-            <a:noFill/>
-          </a:ln>
-        </p:spPr>
-      </p:pic>
-      <p:pic>
-        <p:nvPicPr>
-          <p:cNvPr id="272" name="Google Shape;272;p23" descr="image.png"/>
-          <p:cNvPicPr preferRelativeResize="0"/>
-          <p:nvPr/>
-        </p:nvPicPr>
-        <p:blipFill rotWithShape="1">
-          <a:blip r:embed="rId4">
-            <a:alphaModFix/>
-          </a:blip>
-          <a:srcRect/>
-          <a:stretch/>
-        </p:blipFill>
-        <p:spPr>
-          <a:xfrm>
-            <a:off x="6334125" y="3509962"/>
-            <a:ext cx="228600" cy="247650"/>
-          </a:xfrm>
-          <a:prstGeom prst="rect">
-            <a:avLst/>
-          </a:prstGeom>
-          <a:noFill/>
-          <a:ln>
-            <a:noFill/>
-          </a:ln>
-        </p:spPr>
-      </p:pic>
-      <p:pic>
-        <p:nvPicPr>
-          <p:cNvPr id="273" name="Google Shape;273;p23" descr="image.png"/>
-          <p:cNvPicPr preferRelativeResize="0"/>
-          <p:nvPr/>
-        </p:nvPicPr>
-        <p:blipFill rotWithShape="1">
-          <a:blip r:embed="rId4">
-            <a:alphaModFix/>
-          </a:blip>
-          <a:srcRect/>
-          <a:stretch/>
-        </p:blipFill>
-        <p:spPr>
-          <a:xfrm>
-            <a:off x="6334125" y="4310062"/>
-            <a:ext cx="228600" cy="247650"/>
-          </a:xfrm>
-          <a:prstGeom prst="rect">
-            <a:avLst/>
-          </a:prstGeom>
-          <a:noFill/>
-          <a:ln>
-            <a:noFill/>
-          </a:ln>
-        </p:spPr>
-      </p:pic>
-      <p:sp>
-        <p:nvSpPr>
-          <p:cNvPr id="274" name="Google Shape;274;p23"/>
-          <p:cNvSpPr txBox="1"/>
-          <p:nvPr/>
-        </p:nvSpPr>
-        <p:spPr>
-          <a:xfrm>
-            <a:off x="809625" y="571500"/>
-            <a:ext cx="11351418" cy="504825"/>
-          </a:xfrm>
-          <a:prstGeom prst="rect">
-            <a:avLst/>
-          </a:prstGeom>
-          <a:noFill/>
-          <a:ln>
-            <a:noFill/>
-          </a:ln>
-        </p:spPr>
-        <p:txBody>
-          <a:bodyPr spcFirstLastPara="1" wrap="square" lIns="0" tIns="0" rIns="0" bIns="0" anchor="t" anchorCtr="0">
-            <a:spAutoFit/>
-          </a:bodyPr>
-          <a:lstStyle/>
-          <a:p>
-            <a:pPr marL="0" marR="0" lvl="0" indent="0" algn="l" rtl="0">
-              <a:spcBef>
-                <a:spcPts val="0"/>
-              </a:spcBef>
-              <a:spcAft>
-                <a:spcPts val="0"/>
-              </a:spcAft>
-              <a:buNone/>
-            </a:pPr>
-            <a:r>
-              <a:rPr lang="en-US" sz="3300" b="1" i="0" u="none" strike="noStrike" cap="none">
-                <a:solidFill>
-                  <a:srgbClr val="FFFFFF"/>
-                </a:solidFill>
-                <a:latin typeface="Urbanist"/>
-                <a:ea typeface="Urbanist"/>
-                <a:cs typeface="Urbanist"/>
-                <a:sym typeface="Urbanist"/>
-              </a:rPr>
-              <a:t>Thành tựu &amp; Kết quả Đạt được</a:t>
-            </a:r>
-            <a:endParaRPr/>
-          </a:p>
-        </p:txBody>
-      </p:sp>
-      <p:sp>
-        <p:nvSpPr>
-          <p:cNvPr id="275" name="Google Shape;275;p23"/>
-          <p:cNvSpPr/>
-          <p:nvPr/>
-        </p:nvSpPr>
-        <p:spPr>
-          <a:xfrm>
-            <a:off x="571500" y="571500"/>
-            <a:ext cx="57150" cy="504825"/>
-          </a:xfrm>
-          <a:prstGeom prst="rect">
-            <a:avLst/>
-          </a:prstGeom>
-          <a:solidFill>
-            <a:srgbClr val="06B6D4"/>
-          </a:solidFill>
-          <a:ln>
-            <a:noFill/>
-          </a:ln>
-        </p:spPr>
-        <p:txBody>
-          <a:bodyPr spcFirstLastPara="1" wrap="square" lIns="91425" tIns="45700" rIns="91425" bIns="45700" anchor="ctr" anchorCtr="0">
-            <a:noAutofit/>
-          </a:bodyPr>
-          <a:lstStyle/>
-          <a:p>
-            <a:pPr marL="0" marR="0" lvl="0" indent="0" algn="ctr" rtl="0">
-              <a:spcBef>
-                <a:spcPts val="0"/>
-              </a:spcBef>
-              <a:spcAft>
-                <a:spcPts val="0"/>
-              </a:spcAft>
-              <a:buNone/>
-            </a:pPr>
-            <a:endParaRPr sz="1800" b="0" i="0" u="none" strike="noStrike" cap="none">
-              <a:solidFill>
-                <a:schemeClr val="dk1"/>
-              </a:solidFill>
-              <a:latin typeface="Calibri"/>
-              <a:ea typeface="Calibri"/>
-              <a:cs typeface="Calibri"/>
-              <a:sym typeface="Calibri"/>
-            </a:endParaRPr>
-          </a:p>
-        </p:txBody>
-      </p:sp>
-    </p:spTree>
-  </p:cSld>
-  <p:clrMapOvr>
-    <a:masterClrMapping/>
-  </p:clrMapOvr>
-</p:sld>
-</file>
-
-<file path=ppt/slides/slide13.xml><?xml version="1.0" encoding="utf-8"?>
+<file path=ppt/slides/slide17.xml><?xml version="1.0" encoding="utf-8"?>
 <p:sld xmlns:a="http://schemas.openxmlformats.org/drawingml/2006/main" xmlns:r="http://schemas.openxmlformats.org/officeDocument/2006/relationships" xmlns:p="http://schemas.openxmlformats.org/presentationml/2006/main">
   <p:cSld>
     <p:spTree>
@@ -16117,7 +19397,7 @@
         <p:spPr>
           <a:xfrm>
             <a:off x="2719387" y="2552700"/>
-            <a:ext cx="2838450" cy="1295400"/>
+            <a:ext cx="2838450" cy="1965672"/>
           </a:xfrm>
           <a:prstGeom prst="rect">
             <a:avLst/>
@@ -16143,8 +19423,8 @@
         </p:blipFill>
         <p:spPr>
           <a:xfrm>
-            <a:off x="5938837" y="2552700"/>
-            <a:ext cx="3533775" cy="1295400"/>
+            <a:off x="5938837" y="2552699"/>
+            <a:ext cx="3533775" cy="1965673"/>
           </a:xfrm>
           <a:prstGeom prst="rect">
             <a:avLst/>
@@ -16267,7 +19547,7 @@
         <p:spPr>
           <a:xfrm>
             <a:off x="2909887" y="2743200"/>
-            <a:ext cx="2457450" cy="304800"/>
+            <a:ext cx="2457450" cy="369332"/>
           </a:xfrm>
           <a:prstGeom prst="rect">
             <a:avLst/>
@@ -16305,7 +19585,7 @@
                 <a:cs typeface="Inter SemiBold"/>
                 <a:sym typeface="Inter SemiBold"/>
               </a:rPr>
-              <a:t>Liên hệ:</a:t>
+              <a:t> Liên hệ:</a:t>
             </a:r>
             <a:endParaRPr/>
           </a:p>
@@ -16426,7 +19706,7 @@
         <p:spPr>
           <a:xfrm>
             <a:off x="6129337" y="2743200"/>
-            <a:ext cx="3152775" cy="304800"/>
+            <a:ext cx="3152775" cy="369332"/>
           </a:xfrm>
           <a:prstGeom prst="rect">
             <a:avLst/>
@@ -16464,7 +19744,7 @@
                 <a:cs typeface="Inter SemiBold"/>
                 <a:sym typeface="Inter SemiBold"/>
               </a:rPr>
-              <a:t>Hướng phát triển:</a:t>
+              <a:t> Hướng phát triển:</a:t>
             </a:r>
             <a:endParaRPr/>
           </a:p>
@@ -16472,14 +19752,14 @@
       </p:sp>
       <p:sp>
         <p:nvSpPr>
-          <p:cNvPr id="289" name="Google Shape;289;p24"/>
+          <p:cNvPr id="290" name="Google Shape;290;p24"/>
           <p:cNvSpPr txBox="1"/>
           <p:nvPr/>
         </p:nvSpPr>
         <p:spPr>
           <a:xfrm>
-            <a:off x="6129337" y="3048000"/>
-            <a:ext cx="3152775" cy="304800"/>
+            <a:off x="6129337" y="3041045"/>
+            <a:ext cx="3152775" cy="1477328"/>
           </a:xfrm>
           <a:prstGeom prst="rect">
             <a:avLst/>
@@ -16517,51 +19797,10 @@
                 <a:cs typeface="Inter"/>
                 <a:sym typeface="Inter"/>
               </a:rPr>
-              <a:t>Fine-tuning local LLM (Llama 3)</a:t>
+              <a:t>Integration với Career Data thực tế t</a:t>
             </a:r>
-            <a:endParaRPr/>
-          </a:p>
-        </p:txBody>
-      </p:sp>
-      <p:sp>
-        <p:nvSpPr>
-          <p:cNvPr id="290" name="Google Shape;290;p24"/>
-          <p:cNvSpPr txBox="1"/>
-          <p:nvPr/>
-        </p:nvSpPr>
-        <p:spPr>
-          <a:xfrm>
-            <a:off x="6129337" y="3352800"/>
-            <a:ext cx="3152775" cy="304800"/>
-          </a:xfrm>
-          <a:prstGeom prst="rect">
-            <a:avLst/>
-          </a:prstGeom>
-          <a:noFill/>
-          <a:ln>
-            <a:noFill/>
-          </a:ln>
-        </p:spPr>
-        <p:txBody>
-          <a:bodyPr spcFirstLastPara="1" wrap="square" lIns="0" tIns="0" rIns="0" bIns="0" anchor="t" anchorCtr="0">
-            <a:spAutoFit/>
-          </a:bodyPr>
-          <a:lstStyle/>
-          <a:p>
-            <a:pPr marL="0" marR="0" lvl="0" indent="0" algn="l" rtl="0">
-              <a:lnSpc>
-                <a:spcPct val="160000"/>
-              </a:lnSpc>
-              <a:spcBef>
-                <a:spcPts val="0"/>
-              </a:spcBef>
-              <a:spcAft>
-                <a:spcPts val="0"/>
-              </a:spcAft>
-              <a:buNone/>
-            </a:pPr>
             <a:r>
-              <a:rPr lang="en-US" sz="1500" b="0" i="0" u="none" strike="noStrike" cap="none">
+              <a:rPr lang="en-US" sz="1500">
                 <a:solidFill>
                   <a:srgbClr val="94A3B8"/>
                 </a:solidFill>
@@ -16570,7 +19809,31 @@
                 <a:cs typeface="Inter"/>
                 <a:sym typeface="Inter"/>
               </a:rPr>
-              <a:t>Integration với Career Data thực tế</a:t>
+              <a:t>ừ các tr</a:t>
+            </a:r>
+            <a:r>
+              <a:rPr lang="vi-VN" sz="1500">
+                <a:solidFill>
+                  <a:srgbClr val="94A3B8"/>
+                </a:solidFill>
+                <a:latin typeface="Inter"/>
+                <a:ea typeface="Inter"/>
+                <a:cs typeface="Inter"/>
+                <a:sym typeface="Inter"/>
+              </a:rPr>
+              <a:t>ư</a:t>
+            </a:r>
+            <a:r>
+              <a:rPr lang="en-US" sz="1500">
+                <a:solidFill>
+                  <a:srgbClr val="94A3B8"/>
+                </a:solidFill>
+                <a:latin typeface="Inter"/>
+                <a:ea typeface="Inter"/>
+                <a:cs typeface="Inter"/>
+                <a:sym typeface="Inter"/>
+              </a:rPr>
+              <a:t>ờng đại học/cao đẳng, các trong tuyển dụng việc làm uy tín</a:t>
             </a:r>
             <a:endParaRPr/>
           </a:p>
@@ -16591,7 +19854,7 @@
         </p:blipFill>
         <p:spPr>
           <a:xfrm>
-            <a:off x="2909887" y="2800350"/>
+            <a:off x="2909887" y="2855259"/>
             <a:ext cx="190500" cy="190500"/>
           </a:xfrm>
           <a:prstGeom prst="rect">
@@ -16618,7 +19881,7 @@
         </p:blipFill>
         <p:spPr>
           <a:xfrm>
-            <a:off x="6129337" y="2800350"/>
+            <a:off x="6129337" y="2850545"/>
             <a:ext cx="190500" cy="190500"/>
           </a:xfrm>
           <a:prstGeom prst="rect">
@@ -16725,7 +19988,7 @@
         </p:nvSpPr>
         <p:spPr>
           <a:xfrm>
-            <a:off x="571500" y="1614487"/>
+            <a:off x="545307" y="1170894"/>
             <a:ext cx="5550693" cy="323850"/>
           </a:xfrm>
           <a:prstGeom prst="rect">
@@ -16775,8 +20038,8 @@
         </p:nvSpPr>
         <p:spPr>
           <a:xfrm>
-            <a:off x="571500" y="2081212"/>
-            <a:ext cx="5286375" cy="609600"/>
+            <a:off x="571500" y="1443835"/>
+            <a:ext cx="5286375" cy="1895904"/>
           </a:xfrm>
           <a:prstGeom prst="rect">
             <a:avLst/>
@@ -16792,20 +20055,13 @@
           </a:bodyPr>
           <a:lstStyle/>
           <a:p>
-            <a:pPr marL="0" marR="0" lvl="0" indent="0" algn="l" rtl="0">
+            <a:pPr lvl="0">
               <a:lnSpc>
                 <a:spcPct val="160000"/>
               </a:lnSpc>
-              <a:spcBef>
-                <a:spcPts val="0"/>
-              </a:spcBef>
-              <a:spcAft>
-                <a:spcPts val="0"/>
-              </a:spcAft>
-              <a:buNone/>
             </a:pPr>
             <a:r>
-              <a:rPr lang="en-US" sz="1500" b="0" i="0" u="none" strike="noStrike" cap="none">
+              <a:rPr lang="en-US" sz="1100">
                 <a:solidFill>
                   <a:srgbClr val="94A3B8"/>
                 </a:solidFill>
@@ -16814,9 +20070,95 @@
                 <a:cs typeface="Inter"/>
                 <a:sym typeface="Inter"/>
               </a:rPr>
-              <a:t>Học sinh Việt Nam hiện nay đang đối mặt với sự thiếu hụt nghiêm trọng trong việc định hướng tương lai.</a:t>
+              <a:t>Tình trạng chọn sai ngành, học sai ngành tại Việt Nam hiện nay không còn là chuyện hiếm gặp mà đã trở thành một thực trạng đáng báo động.</a:t>
             </a:r>
-            <a:endParaRPr/>
+            <a:br>
+              <a:rPr lang="en-US" sz="1100">
+                <a:solidFill>
+                  <a:srgbClr val="94A3B8"/>
+                </a:solidFill>
+                <a:latin typeface="Inter"/>
+                <a:ea typeface="Inter"/>
+                <a:cs typeface="Inter"/>
+                <a:sym typeface="Inter"/>
+              </a:rPr>
+            </a:br>
+            <a:r>
+              <a:rPr lang="vi-VN" sz="1100">
+                <a:solidFill>
+                  <a:srgbClr val="94A3B8"/>
+                </a:solidFill>
+                <a:latin typeface="Inter"/>
+                <a:ea typeface="Inter"/>
+                <a:cs typeface="Inter"/>
+                <a:sym typeface="Inter"/>
+              </a:rPr>
+              <a:t>Khảo sát tại các sự kiện hướng nghiệp lớn</a:t>
+            </a:r>
+            <a:r>
+              <a:rPr lang="en-US" sz="1100">
+                <a:solidFill>
+                  <a:srgbClr val="94A3B8"/>
+                </a:solidFill>
+                <a:latin typeface="Inter"/>
+                <a:ea typeface="Inter"/>
+                <a:cs typeface="Inter"/>
+                <a:sym typeface="Inter"/>
+              </a:rPr>
+              <a:t> </a:t>
+            </a:r>
+            <a:r>
+              <a:rPr lang="vi-VN" sz="1100">
+                <a:solidFill>
+                  <a:srgbClr val="94A3B8"/>
+                </a:solidFill>
+                <a:latin typeface="Inter"/>
+                <a:ea typeface="Inter"/>
+                <a:cs typeface="Inter"/>
+                <a:sym typeface="Inter"/>
+              </a:rPr>
+              <a:t>cứ 2 sinh viên đại học thì có 1 người cảm thấy lựa chọn ban đầu của mình chưa phù hợp</a:t>
+            </a:r>
+            <a:endParaRPr lang="en-US" sz="1100">
+              <a:solidFill>
+                <a:srgbClr val="94A3B8"/>
+              </a:solidFill>
+              <a:latin typeface="Inter"/>
+              <a:ea typeface="Inter"/>
+              <a:cs typeface="Inter"/>
+              <a:sym typeface="Inter"/>
+            </a:endParaRPr>
+          </a:p>
+          <a:p>
+            <a:pPr lvl="0">
+              <a:lnSpc>
+                <a:spcPct val="160000"/>
+              </a:lnSpc>
+            </a:pPr>
+            <a:r>
+              <a:rPr lang="vi-VN" sz="1100">
+                <a:solidFill>
+                  <a:srgbClr val="94A3B8"/>
+                </a:solidFill>
+                <a:latin typeface="Inter"/>
+                <a:ea typeface="Inter"/>
+                <a:cs typeface="Inter"/>
+                <a:sym typeface="Inter"/>
+              </a:rPr>
+              <a:t>Theo dữ liệu từ Bộ GD-ĐT, mỗi năm có khoảng 20% thí sinh dù đã trúng tuyển nhưng quyết định không nhập học</a:t>
+            </a:r>
+            <a:br>
+              <a:rPr lang="en-US" sz="1100">
+                <a:solidFill>
+                  <a:srgbClr val="94A3B8"/>
+                </a:solidFill>
+                <a:latin typeface="Inter"/>
+                <a:ea typeface="Inter"/>
+                <a:cs typeface="Inter"/>
+                <a:sym typeface="Inter"/>
+              </a:rPr>
+            </a:br>
+            <a:endParaRPr sz="1100"/>
           </a:p>
         </p:txBody>
       </p:sp>
@@ -16855,7 +20197,7 @@
         </p:nvSpPr>
         <p:spPr>
           <a:xfrm>
-            <a:off x="1000125" y="2928937"/>
+            <a:off x="973932" y="3215100"/>
             <a:ext cx="4857750" cy="609600"/>
           </a:xfrm>
           <a:prstGeom prst="rect">
@@ -16920,7 +20262,7 @@
         </p:nvSpPr>
         <p:spPr>
           <a:xfrm>
-            <a:off x="1000125" y="3729037"/>
+            <a:off x="973932" y="4023498"/>
             <a:ext cx="4857750" cy="609600"/>
           </a:xfrm>
           <a:prstGeom prst="rect">
@@ -16985,7 +20327,7 @@
         </p:nvSpPr>
         <p:spPr>
           <a:xfrm>
-            <a:off x="1000125" y="4529137"/>
+            <a:off x="1000125" y="4831896"/>
             <a:ext cx="4857750" cy="609600"/>
           </a:xfrm>
           <a:prstGeom prst="rect">
@@ -17050,7 +20392,7 @@
         </p:nvSpPr>
         <p:spPr>
           <a:xfrm>
-            <a:off x="1000125" y="5329237"/>
+            <a:off x="1000125" y="5649006"/>
             <a:ext cx="4857750" cy="609600"/>
           </a:xfrm>
           <a:prstGeom prst="rect">
@@ -17122,7 +20464,7 @@
         </p:blipFill>
         <p:spPr>
           <a:xfrm>
-            <a:off x="571500" y="2967037"/>
+            <a:off x="571500" y="3305175"/>
             <a:ext cx="228600" cy="247650"/>
           </a:xfrm>
           <a:prstGeom prst="rect">
@@ -17149,7 +20491,7 @@
         </p:blipFill>
         <p:spPr>
           <a:xfrm>
-            <a:off x="571500" y="3767137"/>
+            <a:off x="545307" y="4061598"/>
             <a:ext cx="285750" cy="247650"/>
           </a:xfrm>
           <a:prstGeom prst="rect">
@@ -17176,7 +20518,7 @@
         </p:blipFill>
         <p:spPr>
           <a:xfrm>
-            <a:off x="571500" y="4567237"/>
+            <a:off x="571500" y="4869996"/>
             <a:ext cx="228600" cy="247650"/>
           </a:xfrm>
           <a:prstGeom prst="rect">
@@ -17203,7 +20545,7 @@
         </p:blipFill>
         <p:spPr>
           <a:xfrm>
-            <a:off x="571500" y="5367337"/>
+            <a:off x="571500" y="5687106"/>
             <a:ext cx="171450" cy="247650"/>
           </a:xfrm>
           <a:prstGeom prst="rect">
@@ -20857,7 +24199,7 @@
         </p:nvSpPr>
         <p:spPr>
           <a:xfrm>
-            <a:off x="1691580" y="4252912"/>
+            <a:off x="1657051" y="4062412"/>
             <a:ext cx="190500" cy="190500"/>
           </a:xfrm>
           <a:prstGeom prst="roundRect">
@@ -20913,7 +24255,7 @@
         </p:nvSpPr>
         <p:spPr>
           <a:xfrm>
-            <a:off x="4564260" y="4252912"/>
+            <a:off x="4564261" y="4038600"/>
             <a:ext cx="190500" cy="190500"/>
           </a:xfrm>
           <a:prstGeom prst="roundRect">
@@ -20969,7 +24311,7 @@
         </p:nvSpPr>
         <p:spPr>
           <a:xfrm>
-            <a:off x="7436941" y="4252912"/>
+            <a:off x="7411212" y="4014106"/>
             <a:ext cx="190500" cy="190500"/>
           </a:xfrm>
           <a:prstGeom prst="roundRect">

--- a/Hệ thống Tư vấn Hướng nghiệp AI.pptx
+++ b/Hệ thống Tư vấn Hướng nghiệp AI.pptx
@@ -12689,6 +12689,64 @@
               <a:t>MSSV: 26410020</a:t>
             </a:r>
             <a:endParaRPr/>
+          </a:p>
+        </p:txBody>
+      </p:sp>
+      <p:sp>
+        <p:nvSpPr>
+          <p:cNvPr id="11" name="Google Shape;91;p13">
+            <a:extLst>
+              <a:ext uri="{FF2B5EF4-FFF2-40B4-BE49-F238E27FC236}">
+                <a16:creationId xmlns:a16="http://schemas.microsoft.com/office/drawing/2014/main" id="{EADCFF5D-5F8E-46C3-A8D1-1029FB34FAE9}"/>
+              </a:ext>
+            </a:extLst>
+          </p:cNvPr>
+          <p:cNvSpPr txBox="1"/>
+          <p:nvPr/>
+        </p:nvSpPr>
+        <p:spPr>
+          <a:xfrm>
+            <a:off x="771524" y="5851252"/>
+            <a:ext cx="4886325" cy="295466"/>
+          </a:xfrm>
+          <a:prstGeom prst="rect">
+            <a:avLst/>
+          </a:prstGeom>
+          <a:noFill/>
+          <a:ln>
+            <a:noFill/>
+          </a:ln>
+        </p:spPr>
+        <p:txBody>
+          <a:bodyPr spcFirstLastPara="1" wrap="square" lIns="0" tIns="0" rIns="0" bIns="0" anchor="t" anchorCtr="0">
+            <a:spAutoFit/>
+          </a:bodyPr>
+          <a:lstStyle/>
+          <a:p>
+            <a:pPr marL="0" marR="0" lvl="0" indent="0" algn="l" rtl="0">
+              <a:lnSpc>
+                <a:spcPct val="160000"/>
+              </a:lnSpc>
+              <a:spcBef>
+                <a:spcPts val="0"/>
+              </a:spcBef>
+              <a:spcAft>
+                <a:spcPts val="0"/>
+              </a:spcAft>
+              <a:buNone/>
+            </a:pPr>
+            <a:r>
+              <a:rPr lang="en-US" sz="1200" b="0" i="0" u="none" strike="noStrike" cap="none">
+                <a:solidFill>
+                  <a:srgbClr val="94A3B8"/>
+                </a:solidFill>
+                <a:latin typeface="Inter"/>
+                <a:ea typeface="Inter"/>
+                <a:cs typeface="Inter"/>
+                <a:sym typeface="Inter"/>
+              </a:rPr>
+              <a:t>DT11</a:t>
+            </a:r>
           </a:p>
         </p:txBody>
       </p:sp>

--- a/Hệ thống Tư vấn Hướng nghiệp AI.pptx
+++ b/Hệ thống Tư vấn Hướng nghiệp AI.pptx
@@ -12692,64 +12692,6 @@
           </a:p>
         </p:txBody>
       </p:sp>
-      <p:sp>
-        <p:nvSpPr>
-          <p:cNvPr id="11" name="Google Shape;91;p13">
-            <a:extLst>
-              <a:ext uri="{FF2B5EF4-FFF2-40B4-BE49-F238E27FC236}">
-                <a16:creationId xmlns:a16="http://schemas.microsoft.com/office/drawing/2014/main" id="{EADCFF5D-5F8E-46C3-A8D1-1029FB34FAE9}"/>
-              </a:ext>
-            </a:extLst>
-          </p:cNvPr>
-          <p:cNvSpPr txBox="1"/>
-          <p:nvPr/>
-        </p:nvSpPr>
-        <p:spPr>
-          <a:xfrm>
-            <a:off x="771524" y="5851252"/>
-            <a:ext cx="4886325" cy="295466"/>
-          </a:xfrm>
-          <a:prstGeom prst="rect">
-            <a:avLst/>
-          </a:prstGeom>
-          <a:noFill/>
-          <a:ln>
-            <a:noFill/>
-          </a:ln>
-        </p:spPr>
-        <p:txBody>
-          <a:bodyPr spcFirstLastPara="1" wrap="square" lIns="0" tIns="0" rIns="0" bIns="0" anchor="t" anchorCtr="0">
-            <a:spAutoFit/>
-          </a:bodyPr>
-          <a:lstStyle/>
-          <a:p>
-            <a:pPr marL="0" marR="0" lvl="0" indent="0" algn="l" rtl="0">
-              <a:lnSpc>
-                <a:spcPct val="160000"/>
-              </a:lnSpc>
-              <a:spcBef>
-                <a:spcPts val="0"/>
-              </a:spcBef>
-              <a:spcAft>
-                <a:spcPts val="0"/>
-              </a:spcAft>
-              <a:buNone/>
-            </a:pPr>
-            <a:r>
-              <a:rPr lang="en-US" sz="1200" b="0" i="0" u="none" strike="noStrike" cap="none">
-                <a:solidFill>
-                  <a:srgbClr val="94A3B8"/>
-                </a:solidFill>
-                <a:latin typeface="Inter"/>
-                <a:ea typeface="Inter"/>
-                <a:cs typeface="Inter"/>
-                <a:sym typeface="Inter"/>
-              </a:rPr>
-              <a:t>DT11</a:t>
-            </a:r>
-          </a:p>
-        </p:txBody>
-      </p:sp>
     </p:spTree>
   </p:cSld>
   <p:clrMapOvr>
@@ -16202,33 +16144,6 @@
           <a:chExt cx="0" cy="0"/>
         </a:xfrm>
       </p:grpSpPr>
-      <p:pic>
-        <p:nvPicPr>
-          <p:cNvPr id="261" name="Google Shape;261;p23" descr="image.png"/>
-          <p:cNvPicPr preferRelativeResize="0"/>
-          <p:nvPr/>
-        </p:nvPicPr>
-        <p:blipFill rotWithShape="1">
-          <a:blip r:embed="rId3">
-            <a:alphaModFix/>
-          </a:blip>
-          <a:srcRect/>
-          <a:stretch/>
-        </p:blipFill>
-        <p:spPr>
-          <a:xfrm>
-            <a:off x="0" y="0"/>
-            <a:ext cx="12192000" cy="6858000"/>
-          </a:xfrm>
-          <a:prstGeom prst="rect">
-            <a:avLst/>
-          </a:prstGeom>
-          <a:noFill/>
-          <a:ln>
-            <a:noFill/>
-          </a:ln>
-        </p:spPr>
-      </p:pic>
       <p:sp>
         <p:nvSpPr>
           <p:cNvPr id="262" name="Google Shape;262;p23"/>
@@ -16284,66 +16199,13 @@
       </p:sp>
       <p:sp>
         <p:nvSpPr>
-          <p:cNvPr id="263" name="Google Shape;263;p23"/>
-          <p:cNvSpPr txBox="1"/>
-          <p:nvPr/>
-        </p:nvSpPr>
-        <p:spPr>
-          <a:xfrm>
-            <a:off x="1000125" y="3471862"/>
-            <a:ext cx="4857750" cy="369332"/>
-          </a:xfrm>
-          <a:prstGeom prst="rect">
-            <a:avLst/>
-          </a:prstGeom>
-          <a:noFill/>
-          <a:ln>
-            <a:noFill/>
-          </a:ln>
-        </p:spPr>
-        <p:txBody>
-          <a:bodyPr spcFirstLastPara="1" wrap="square" lIns="0" tIns="0" rIns="0" bIns="0" anchor="t" anchorCtr="0">
-            <a:spAutoFit/>
-          </a:bodyPr>
-          <a:lstStyle/>
-          <a:p>
-            <a:pPr marL="0" marR="0" lvl="0" indent="0" algn="l" rtl="0">
-              <a:lnSpc>
-                <a:spcPct val="160000"/>
-              </a:lnSpc>
-              <a:spcBef>
-                <a:spcPts val="0"/>
-              </a:spcBef>
-              <a:spcAft>
-                <a:spcPts val="0"/>
-              </a:spcAft>
-              <a:buNone/>
-            </a:pPr>
-            <a:r>
-              <a:rPr lang="en-US" sz="1500" b="0" i="0" u="none" strike="noStrike" cap="none">
-                <a:solidFill>
-                  <a:srgbClr val="94A3B8"/>
-                </a:solidFill>
-                <a:latin typeface="Inter"/>
-                <a:ea typeface="Inter"/>
-                <a:cs typeface="Inter"/>
-                <a:sym typeface="Inter"/>
-              </a:rPr>
-              <a:t>Chiến lược Fallback đảm bảo độ sẵn sàng 99.9%.</a:t>
-            </a:r>
-            <a:endParaRPr/>
-          </a:p>
-        </p:txBody>
-      </p:sp>
-      <p:sp>
-        <p:nvSpPr>
           <p:cNvPr id="264" name="Google Shape;264;p23"/>
           <p:cNvSpPr txBox="1"/>
           <p:nvPr/>
         </p:nvSpPr>
         <p:spPr>
           <a:xfrm>
-            <a:off x="1000125" y="4271962"/>
+            <a:off x="1057275" y="3471862"/>
             <a:ext cx="4857750" cy="304800"/>
           </a:xfrm>
           <a:prstGeom prst="rect">
@@ -16494,59 +16356,6 @@
           </a:p>
         </p:txBody>
       </p:sp>
-      <p:sp>
-        <p:nvSpPr>
-          <p:cNvPr id="267" name="Google Shape;267;p23"/>
-          <p:cNvSpPr txBox="1"/>
-          <p:nvPr/>
-        </p:nvSpPr>
-        <p:spPr>
-          <a:xfrm>
-            <a:off x="6762750" y="4271962"/>
-            <a:ext cx="4857750" cy="609600"/>
-          </a:xfrm>
-          <a:prstGeom prst="rect">
-            <a:avLst/>
-          </a:prstGeom>
-          <a:noFill/>
-          <a:ln>
-            <a:noFill/>
-          </a:ln>
-        </p:spPr>
-        <p:txBody>
-          <a:bodyPr spcFirstLastPara="1" wrap="square" lIns="0" tIns="0" rIns="0" bIns="0" anchor="t" anchorCtr="0">
-            <a:spAutoFit/>
-          </a:bodyPr>
-          <a:lstStyle/>
-          <a:p>
-            <a:pPr marL="0" marR="0" lvl="0" indent="0" algn="l" rtl="0">
-              <a:lnSpc>
-                <a:spcPct val="160000"/>
-              </a:lnSpc>
-              <a:spcBef>
-                <a:spcPts val="0"/>
-              </a:spcBef>
-              <a:spcAft>
-                <a:spcPts val="0"/>
-              </a:spcAft>
-              <a:buNone/>
-            </a:pPr>
-            <a:r>
-              <a:rPr lang="en-US" sz="1500" b="0" i="0" u="none" strike="noStrike" cap="none">
-                <a:solidFill>
-                  <a:srgbClr val="94A3B8"/>
-                </a:solidFill>
-                <a:latin typeface="Inter"/>
-                <a:ea typeface="Inter"/>
-                <a:cs typeface="Inter"/>
-                <a:sym typeface="Inter"/>
-              </a:rPr>
-              <a:t>Hệ thống sẵn sàng cho việc mở rộng (Scalable architecture).</a:t>
-            </a:r>
-            <a:endParaRPr/>
-          </a:p>
-        </p:txBody>
-      </p:sp>
       <p:pic>
         <p:nvPicPr>
           <p:cNvPr id="268" name="Google Shape;268;p23" descr="image.png"/>
@@ -16554,7 +16363,7 @@
           <p:nvPr/>
         </p:nvPicPr>
         <p:blipFill rotWithShape="1">
-          <a:blip r:embed="rId4">
+          <a:blip r:embed="rId3">
             <a:alphaModFix/>
           </a:blip>
           <a:srcRect/>
@@ -16563,33 +16372,6 @@
         <p:spPr>
           <a:xfrm>
             <a:off x="571500" y="2709862"/>
-            <a:ext cx="228600" cy="247650"/>
-          </a:xfrm>
-          <a:prstGeom prst="rect">
-            <a:avLst/>
-          </a:prstGeom>
-          <a:noFill/>
-          <a:ln>
-            <a:noFill/>
-          </a:ln>
-        </p:spPr>
-      </p:pic>
-      <p:pic>
-        <p:nvPicPr>
-          <p:cNvPr id="269" name="Google Shape;269;p23" descr="image.png"/>
-          <p:cNvPicPr preferRelativeResize="0"/>
-          <p:nvPr/>
-        </p:nvPicPr>
-        <p:blipFill rotWithShape="1">
-          <a:blip r:embed="rId4">
-            <a:alphaModFix/>
-          </a:blip>
-          <a:srcRect/>
-          <a:stretch/>
-        </p:blipFill>
-        <p:spPr>
-          <a:xfrm>
-            <a:off x="571500" y="3509962"/>
             <a:ext cx="228600" cy="247650"/>
           </a:xfrm>
           <a:prstGeom prst="rect">
@@ -16608,7 +16390,7 @@
           <p:nvPr/>
         </p:nvPicPr>
         <p:blipFill rotWithShape="1">
-          <a:blip r:embed="rId4">
+          <a:blip r:embed="rId3">
             <a:alphaModFix/>
           </a:blip>
           <a:srcRect/>
@@ -16616,7 +16398,7 @@
         </p:blipFill>
         <p:spPr>
           <a:xfrm>
-            <a:off x="571500" y="4310062"/>
+            <a:off x="628650" y="3509962"/>
             <a:ext cx="228600" cy="247650"/>
           </a:xfrm>
           <a:prstGeom prst="rect">
@@ -16635,7 +16417,7 @@
           <p:nvPr/>
         </p:nvPicPr>
         <p:blipFill rotWithShape="1">
-          <a:blip r:embed="rId4">
+          <a:blip r:embed="rId3">
             <a:alphaModFix/>
           </a:blip>
           <a:srcRect/>
@@ -16662,7 +16444,7 @@
           <p:nvPr/>
         </p:nvPicPr>
         <p:blipFill rotWithShape="1">
-          <a:blip r:embed="rId4">
+          <a:blip r:embed="rId3">
             <a:alphaModFix/>
           </a:blip>
           <a:srcRect/>
@@ -16671,33 +16453,6 @@
         <p:spPr>
           <a:xfrm>
             <a:off x="6334125" y="3509962"/>
-            <a:ext cx="228600" cy="247650"/>
-          </a:xfrm>
-          <a:prstGeom prst="rect">
-            <a:avLst/>
-          </a:prstGeom>
-          <a:noFill/>
-          <a:ln>
-            <a:noFill/>
-          </a:ln>
-        </p:spPr>
-      </p:pic>
-      <p:pic>
-        <p:nvPicPr>
-          <p:cNvPr id="273" name="Google Shape;273;p23" descr="image.png"/>
-          <p:cNvPicPr preferRelativeResize="0"/>
-          <p:nvPr/>
-        </p:nvPicPr>
-        <p:blipFill rotWithShape="1">
-          <a:blip r:embed="rId4">
-            <a:alphaModFix/>
-          </a:blip>
-          <a:srcRect/>
-          <a:stretch/>
-        </p:blipFill>
-        <p:spPr>
-          <a:xfrm>
-            <a:off x="6334125" y="4310062"/>
             <a:ext cx="228600" cy="247650"/>
           </a:xfrm>
           <a:prstGeom prst="rect">
@@ -19891,7 +19646,7 @@
                 <a:cs typeface="Inter"/>
                 <a:sym typeface="Inter"/>
               </a:rPr>
-              <a:t>ờng đại học/cao đẳng, các trong tuyển dụng việc làm uy tín</a:t>
+              <a:t>ờng đại học/cao đẳng, các trong tuyển dụng việc làm uy tín VietNamWorks</a:t>
             </a:r>
             <a:endParaRPr/>
           </a:p>
@@ -20386,7 +20141,7 @@
         <p:spPr>
           <a:xfrm>
             <a:off x="1000125" y="4831896"/>
-            <a:ext cx="4857750" cy="609600"/>
+            <a:ext cx="4857750" cy="738664"/>
           </a:xfrm>
           <a:prstGeom prst="rect">
             <a:avLst/>
@@ -20402,17 +20157,10 @@
           </a:bodyPr>
           <a:lstStyle/>
           <a:p>
-            <a:pPr marL="0" marR="0" lvl="0" indent="0" algn="l" rtl="0">
+            <a:pPr lvl="0">
               <a:lnSpc>
                 <a:spcPct val="160000"/>
               </a:lnSpc>
-              <a:spcBef>
-                <a:spcPts val="0"/>
-              </a:spcBef>
-              <a:spcAft>
-                <a:spcPts val="0"/>
-              </a:spcAft>
-              <a:buNone/>
             </a:pPr>
             <a:r>
               <a:rPr lang="en-US" sz="1500" b="1" i="0" u="none" strike="noStrike" cap="none">
@@ -20436,7 +20184,31 @@
                 <a:cs typeface="Inter"/>
                 <a:sym typeface="Inter"/>
               </a:rPr>
-              <a:t> Khó tìm kiếm tư vấn viên chuyên nghiệp mọi lúc mọi nơi.</a:t>
+              <a:t> </a:t>
+            </a:r>
+            <a:r>
+              <a:rPr lang="vi-VN" sz="1500">
+                <a:solidFill>
+                  <a:srgbClr val="94A3B8"/>
+                </a:solidFill>
+                <a:latin typeface="Inter"/>
+                <a:ea typeface="Inter"/>
+                <a:cs typeface="Inter"/>
+                <a:sym typeface="Inter"/>
+              </a:rPr>
+              <a:t>Thiếu định hướng nghề nghiệp thực chất</a:t>
+            </a:r>
+            <a:r>
+              <a:rPr lang="en-US" sz="1500" b="0" i="0" u="none" strike="noStrike" cap="none">
+                <a:solidFill>
+                  <a:srgbClr val="94A3B8"/>
+                </a:solidFill>
+                <a:latin typeface="Inter"/>
+                <a:ea typeface="Inter"/>
+                <a:cs typeface="Inter"/>
+                <a:sym typeface="Inter"/>
+              </a:rPr>
+              <a:t>.</a:t>
             </a:r>
             <a:endParaRPr/>
           </a:p>
@@ -21119,7 +20891,7 @@
         <p:spPr>
           <a:xfrm>
             <a:off x="8470850" y="3848100"/>
-            <a:ext cx="2806600" cy="1107996"/>
+            <a:ext cx="2806600" cy="738664"/>
           </a:xfrm>
           <a:prstGeom prst="rect">
             <a:avLst/>
@@ -21157,7 +20929,7 @@
                 <a:cs typeface="Inter"/>
                 <a:sym typeface="Inter"/>
               </a:rPr>
-              <a:t>Đảm bảo tính chính xác, minh bạch qua RAG và cơ chế Resilience với fallback.</a:t>
+              <a:t>Đảm bảo tính chính xác, minh bạch qua RAG.</a:t>
             </a:r>
             <a:endParaRPr/>
           </a:p>
@@ -24642,7 +24414,7 @@
         <p:spPr>
           <a:xfrm>
             <a:off x="571500" y="2781300"/>
-            <a:ext cx="5524500" cy="1107996"/>
+            <a:ext cx="5524500" cy="738664"/>
           </a:xfrm>
           <a:prstGeom prst="rect">
             <a:avLst/>
@@ -24680,55 +24452,7 @@
                 <a:cs typeface="Inter"/>
                 <a:sym typeface="Inter"/>
               </a:rPr>
-              <a:t>Sử dụng các thông tư nhà nước (26/2020/TT-BLĐTBXH, 09/2022/TT-BGDĐT) và dữ liệu thị trường từ VietnamWorks, d</a:t>
-            </a:r>
-            <a:r>
-              <a:rPr lang="en-US" sz="1500">
-                <a:solidFill>
-                  <a:srgbClr val="94A3B8"/>
-                </a:solidFill>
-                <a:latin typeface="Inter"/>
-                <a:ea typeface="Inter"/>
-                <a:cs typeface="Inter"/>
-                <a:sym typeface="Inter"/>
-              </a:rPr>
-              <a:t>ữ liệu từ các tr</a:t>
-            </a:r>
-            <a:r>
-              <a:rPr lang="vi-VN" sz="1500">
-                <a:solidFill>
-                  <a:srgbClr val="94A3B8"/>
-                </a:solidFill>
-                <a:latin typeface="Inter"/>
-                <a:ea typeface="Inter"/>
-                <a:cs typeface="Inter"/>
-                <a:sym typeface="Inter"/>
-              </a:rPr>
-              <a:t>ư</a:t>
-            </a:r>
-            <a:r>
-              <a:rPr lang="en-US" sz="1500">
-                <a:solidFill>
-                  <a:srgbClr val="94A3B8"/>
-                </a:solidFill>
-                <a:latin typeface="Inter"/>
-                <a:ea typeface="Inter"/>
-                <a:cs typeface="Inter"/>
-                <a:sym typeface="Inter"/>
-              </a:rPr>
-              <a:t>ờng đại học/cao đẳng</a:t>
-            </a:r>
-            <a:r>
-              <a:rPr lang="en-US" sz="1500" b="0" i="0" u="none" strike="noStrike" cap="none">
-                <a:solidFill>
-                  <a:srgbClr val="94A3B8"/>
-                </a:solidFill>
-                <a:latin typeface="Inter"/>
-                <a:ea typeface="Inter"/>
-                <a:cs typeface="Inter"/>
-                <a:sym typeface="Inter"/>
-              </a:rPr>
-              <a:t>.</a:t>
+              <a:t>Sử dụng các thông tư nhà nước (26/2020/TT-BLĐTBXH, 09/2022/TT-BGDĐT</a:t>
             </a:r>
             <a:endParaRPr/>
           </a:p>
